--- a/modulo-02/02.07 - Projetando Código Orientado a Objetos Eficaz/02.07_Projetando_código_orientado_a_objetos_eficaz.pptx
+++ b/modulo-02/02.07 - Projetando Código Orientado a Objetos Eficaz/02.07_Projetando_código_orientado_a_objetos_eficaz.pptx
@@ -1639,7 +1639,7 @@
                   <a:srgbClr val="8FA3C7"/>
                 </a:solidFill>
               </a:rPr>
-              <a:t>ABAP Moderno · Módulo 04 — Programação ABAP Intermediária  ·  Aula 7 de 9 — OO eficaz</a:t>
+              <a:t>ABAP Moderno · Módulo 02 — Programação ABAP Intermediária  ·  Aula 7 de 9 — OO eficaz</a:t>
             </a:r>
             <a:endParaRPr lang="en-US" sz="900" dirty="0"/>
           </a:p>
@@ -1785,7 +1785,7 @@
                   <a:srgbClr val="556B82"/>
                 </a:solidFill>
               </a:rPr>
-              <a:t>ABAP Moderno · Módulo 04 — Programação ABAP Intermediária  ·  Aula 7 de 9 — OO eficaz</a:t>
+              <a:t>ABAP Moderno · Módulo 02 — Programação ABAP Intermediária  ·  Aula 7 de 9 — OO eficaz</a:t>
             </a:r>
             <a:endParaRPr lang="en-US" sz="900" dirty="0"/>
           </a:p>
@@ -2216,7 +2216,7 @@
                   <a:srgbClr val="89D1FF"/>
                 </a:solidFill>
               </a:rPr>
-              <a:t>MÓDULO 04 · AULA 07 DE 09</a:t>
+              <a:t>MÓDULO 02 · AULA 07 DE 09</a:t>
             </a:r>
             <a:endParaRPr lang="en-US" sz="1400" dirty="0"/>
           </a:p>
@@ -2602,7 +2602,7 @@
                   <a:srgbClr val="8FA3C7"/>
                 </a:solidFill>
               </a:rPr>
-              <a:t>ABAP Moderno · Módulo 04 — Programação ABAP Intermediária · Design System SAP Horizon</a:t>
+              <a:t>ABAP Moderno · Módulo 02 — Programação ABAP Intermediária · Design System SAP Horizon</a:t>
             </a:r>
             <a:endParaRPr lang="en-US" sz="1100" dirty="0"/>
           </a:p>
@@ -2709,7 +2709,7 @@
                   <a:srgbClr val="89D1FF"/>
                 </a:solidFill>
               </a:rPr>
-              <a:t>AULA 04.07 · SEÇÃO 3</a:t>
+              <a:t>AULA 02.07 · SEÇÃO 3</a:t>
             </a:r>
             <a:endParaRPr lang="en-US" sz="1300" dirty="0"/>
           </a:p>
@@ -3267,7 +3267,7 @@
         <p:spPr>
           <a:xfrm>
             <a:off x="640080" y="1700784"/>
-            <a:ext cx="3086100" cy="292608"/>
+            <a:ext cx="3474720" cy="292608"/>
           </a:xfrm>
           <a:prstGeom prst="rect">
             <a:avLst/>
@@ -3287,7 +3287,7 @@
         <p:spPr>
           <a:xfrm>
             <a:off x="640080" y="1700784"/>
-            <a:ext cx="3086100" cy="27432"/>
+            <a:ext cx="3474720" cy="27432"/>
           </a:xfrm>
           <a:prstGeom prst="rect">
             <a:avLst/>
@@ -3307,7 +3307,7 @@
         <p:spPr>
           <a:xfrm>
             <a:off x="731520" y="1719072"/>
-            <a:ext cx="2903220" cy="274320"/>
+            <a:ext cx="3291840" cy="274320"/>
           </a:xfrm>
           <a:prstGeom prst="rect">
             <a:avLst/>
@@ -3328,7 +3328,7 @@
                   <a:srgbClr val="FFFFFF"/>
                 </a:solidFill>
               </a:rPr>
-              <a:t>zcl_07_factory.clas.locals_imp.abap</a:t>
+              <a:t>zcl_pc_estoque_demo.clas.locals_imp.abap</a:t>
             </a:r>
             <a:endParaRPr lang="en-US" sz="950" dirty="0"/>
           </a:p>
@@ -3364,7 +3364,7 @@
                   <a:srgbClr val="9DA5B4"/>
                 </a:solidFill>
               </a:rPr>
-              <a:t>ZCL_07_FACTORY › Local Types</a:t>
+              <a:t>Exemplo sobre ZR_PC_ITEM › Local Types</a:t>
             </a:r>
             <a:endParaRPr lang="en-US" sz="850" dirty="0"/>
           </a:p>
@@ -3870,26 +3870,6 @@
             </a:r>
             <a:endParaRPr lang="en-US" sz="850" dirty="0"/>
           </a:p>
-          <a:p>
-            <a:pPr algn="r" indent="0" marL="0">
-              <a:lnSpc>
-                <a:spcPct val="105000"/>
-              </a:lnSpc>
-              <a:buNone/>
-            </a:pPr>
-            <a:r>
-              <a:rPr lang="en-US" sz="850" dirty="0">
-                <a:solidFill>
-                  <a:srgbClr val="6E7681"/>
-                </a:solidFill>
-                <a:latin typeface="Courier New" pitchFamily="34" charset="0"/>
-                <a:ea typeface="Courier New" pitchFamily="34" charset="-122"/>
-                <a:cs typeface="Courier New" pitchFamily="34" charset="-120"/>
-              </a:rPr>
-              <a:t>25</a:t>
-            </a:r>
-            <a:endParaRPr lang="en-US" sz="850" dirty="0"/>
-          </a:p>
         </p:txBody>
       </p:sp>
       <p:sp>
@@ -3950,7 +3930,7 @@
                 <a:ea typeface="Courier New" pitchFamily="34" charset="-122"/>
                 <a:cs typeface="Courier New" pitchFamily="34" charset="-120"/>
               </a:rPr>
-              <a:t>lcl_connection</a:t>
+              <a:t>lcl_item</a:t>
             </a:r>
             <a:r>
               <a:rPr lang="en-US" sz="850" dirty="0">
@@ -4144,7 +4124,7 @@
                 <a:ea typeface="Courier New" pitchFamily="34" charset="-122"/>
                 <a:cs typeface="Courier New" pitchFamily="34" charset="-120"/>
               </a:rPr>
-              <a:t>get_connection</a:t>
+              <a:t>get_item</a:t>
             </a:r>
             <a:endParaRPr lang="en-US" sz="850" dirty="0"/>
           </a:p>
@@ -4197,18 +4177,18 @@
                 <a:ea typeface="Courier New" pitchFamily="34" charset="-122"/>
                 <a:cs typeface="Courier New" pitchFamily="34" charset="-120"/>
               </a:rPr>
-              <a:t>i_carrier_id</a:t>
-            </a:r>
-            <a:r>
-              <a:rPr lang="en-US" sz="850" dirty="0">
-                <a:solidFill>
-                  <a:srgbClr val="CCCCCC"/>
-                </a:solidFill>
-                <a:latin typeface="Courier New" pitchFamily="34" charset="0"/>
-                <a:ea typeface="Courier New" pitchFamily="34" charset="-122"/>
-                <a:cs typeface="Courier New" pitchFamily="34" charset="-120"/>
-              </a:rPr>
-              <a:t>    </a:t>
+              <a:t>i_sku</a:t>
+            </a:r>
+            <a:r>
+              <a:rPr lang="en-US" sz="850" dirty="0">
+                <a:solidFill>
+                  <a:srgbClr val="CCCCCC"/>
+                </a:solidFill>
+                <a:latin typeface="Courier New" pitchFamily="34" charset="0"/>
+                <a:ea typeface="Courier New" pitchFamily="34" charset="-122"/>
+                <a:cs typeface="Courier New" pitchFamily="34" charset="-120"/>
+              </a:rPr>
+              <a:t>         </a:t>
             </a:r>
             <a:r>
               <a:rPr lang="en-US" sz="850" dirty="0">
@@ -4235,13 +4215,13 @@
             <a:r>
               <a:rPr lang="en-US" sz="850" dirty="0">
                 <a:solidFill>
-                  <a:srgbClr val="4EC9B0"/>
-                </a:solidFill>
-                <a:latin typeface="Courier New" pitchFamily="34" charset="0"/>
-                <a:ea typeface="Courier New" pitchFamily="34" charset="-122"/>
-                <a:cs typeface="Courier New" pitchFamily="34" charset="-120"/>
-              </a:rPr>
-              <a:t>/dmo/carrier_id</a:t>
+                  <a:srgbClr val="CCCCCC"/>
+                </a:solidFill>
+                <a:latin typeface="Courier New" pitchFamily="34" charset="0"/>
+                <a:ea typeface="Courier New" pitchFamily="34" charset="-122"/>
+                <a:cs typeface="Courier New" pitchFamily="34" charset="-120"/>
+              </a:rPr>
+              <a:t>zta_pc_item-sku</a:t>
             </a:r>
             <a:endParaRPr lang="en-US" sz="850" dirty="0"/>
           </a:p>
@@ -4261,18 +4241,18 @@
                 <a:ea typeface="Courier New" pitchFamily="34" charset="-122"/>
                 <a:cs typeface="Courier New" pitchFamily="34" charset="-120"/>
               </a:rPr>
-              <a:t>                </a:t>
-            </a:r>
-            <a:r>
-              <a:rPr lang="en-US" sz="850" dirty="0">
-                <a:solidFill>
-                  <a:srgbClr val="CCCCCC"/>
-                </a:solidFill>
-                <a:latin typeface="Courier New" pitchFamily="34" charset="0"/>
-                <a:ea typeface="Courier New" pitchFamily="34" charset="-122"/>
-                <a:cs typeface="Courier New" pitchFamily="34" charset="-120"/>
-              </a:rPr>
-              <a:t>i_connection_id</a:t>
+              <a:t>      </a:t>
+            </a:r>
+            <a:r>
+              <a:rPr lang="en-US" sz="850" dirty="0">
+                <a:solidFill>
+                  <a:srgbClr val="569CD6"/>
+                </a:solidFill>
+                <a:latin typeface="Courier New" pitchFamily="34" charset="0"/>
+                <a:ea typeface="Courier New" pitchFamily="34" charset="-122"/>
+                <a:cs typeface="Courier New" pitchFamily="34" charset="-120"/>
+              </a:rPr>
+              <a:t>RETURNING</a:t>
             </a:r>
             <a:r>
               <a:rPr lang="en-US" sz="850" dirty="0">
@@ -4294,6 +4274,61 @@
                 <a:ea typeface="Courier New" pitchFamily="34" charset="-122"/>
                 <a:cs typeface="Courier New" pitchFamily="34" charset="-120"/>
               </a:rPr>
+              <a:t>VALUE</a:t>
+            </a:r>
+            <a:r>
+              <a:rPr lang="en-US" sz="850" dirty="0">
+                <a:solidFill>
+                  <a:srgbClr val="CCCCCC"/>
+                </a:solidFill>
+                <a:latin typeface="Courier New" pitchFamily="34" charset="0"/>
+                <a:ea typeface="Courier New" pitchFamily="34" charset="-122"/>
+                <a:cs typeface="Courier New" pitchFamily="34" charset="-120"/>
+              </a:rPr>
+              <a:t>(</a:t>
+            </a:r>
+            <a:r>
+              <a:rPr lang="en-US" sz="850" dirty="0">
+                <a:solidFill>
+                  <a:srgbClr val="CCCCCC"/>
+                </a:solidFill>
+                <a:latin typeface="Courier New" pitchFamily="34" charset="0"/>
+                <a:ea typeface="Courier New" pitchFamily="34" charset="-122"/>
+                <a:cs typeface="Courier New" pitchFamily="34" charset="-120"/>
+              </a:rPr>
+              <a:t>r_item</a:t>
+            </a:r>
+            <a:r>
+              <a:rPr lang="en-US" sz="850" dirty="0">
+                <a:solidFill>
+                  <a:srgbClr val="CCCCCC"/>
+                </a:solidFill>
+                <a:latin typeface="Courier New" pitchFamily="34" charset="0"/>
+                <a:ea typeface="Courier New" pitchFamily="34" charset="-122"/>
+                <a:cs typeface="Courier New" pitchFamily="34" charset="-120"/>
+              </a:rPr>
+              <a:t>)</a:t>
+            </a:r>
+            <a:r>
+              <a:rPr lang="en-US" sz="850" dirty="0">
+                <a:solidFill>
+                  <a:srgbClr val="CCCCCC"/>
+                </a:solidFill>
+                <a:latin typeface="Courier New" pitchFamily="34" charset="0"/>
+                <a:ea typeface="Courier New" pitchFamily="34" charset="-122"/>
+                <a:cs typeface="Courier New" pitchFamily="34" charset="-120"/>
+              </a:rPr>
+              <a:t> </a:t>
+            </a:r>
+            <a:r>
+              <a:rPr lang="en-US" sz="850" dirty="0">
+                <a:solidFill>
+                  <a:srgbClr val="569CD6"/>
+                </a:solidFill>
+                <a:latin typeface="Courier New" pitchFamily="34" charset="0"/>
+                <a:ea typeface="Courier New" pitchFamily="34" charset="-122"/>
+                <a:cs typeface="Courier New" pitchFamily="34" charset="-120"/>
+              </a:rPr>
               <a:t>TYPE</a:t>
             </a:r>
             <a:r>
@@ -4310,13 +4345,68 @@
             <a:r>
               <a:rPr lang="en-US" sz="850" dirty="0">
                 <a:solidFill>
+                  <a:srgbClr val="569CD6"/>
+                </a:solidFill>
+                <a:latin typeface="Courier New" pitchFamily="34" charset="0"/>
+                <a:ea typeface="Courier New" pitchFamily="34" charset="-122"/>
+                <a:cs typeface="Courier New" pitchFamily="34" charset="-120"/>
+              </a:rPr>
+              <a:t>REF</a:t>
+            </a:r>
+            <a:r>
+              <a:rPr lang="en-US" sz="850" dirty="0">
+                <a:solidFill>
+                  <a:srgbClr val="CCCCCC"/>
+                </a:solidFill>
+                <a:latin typeface="Courier New" pitchFamily="34" charset="0"/>
+                <a:ea typeface="Courier New" pitchFamily="34" charset="-122"/>
+                <a:cs typeface="Courier New" pitchFamily="34" charset="-120"/>
+              </a:rPr>
+              <a:t> </a:t>
+            </a:r>
+            <a:r>
+              <a:rPr lang="en-US" sz="850" dirty="0">
+                <a:solidFill>
+                  <a:srgbClr val="569CD6"/>
+                </a:solidFill>
+                <a:latin typeface="Courier New" pitchFamily="34" charset="0"/>
+                <a:ea typeface="Courier New" pitchFamily="34" charset="-122"/>
+                <a:cs typeface="Courier New" pitchFamily="34" charset="-120"/>
+              </a:rPr>
+              <a:t>TO</a:t>
+            </a:r>
+            <a:r>
+              <a:rPr lang="en-US" sz="850" dirty="0">
+                <a:solidFill>
+                  <a:srgbClr val="CCCCCC"/>
+                </a:solidFill>
+                <a:latin typeface="Courier New" pitchFamily="34" charset="0"/>
+                <a:ea typeface="Courier New" pitchFamily="34" charset="-122"/>
+                <a:cs typeface="Courier New" pitchFamily="34" charset="-120"/>
+              </a:rPr>
+              <a:t> </a:t>
+            </a:r>
+            <a:r>
+              <a:rPr lang="en-US" sz="850" dirty="0">
+                <a:solidFill>
                   <a:srgbClr val="4EC9B0"/>
                 </a:solidFill>
                 <a:latin typeface="Courier New" pitchFamily="34" charset="0"/>
                 <a:ea typeface="Courier New" pitchFamily="34" charset="-122"/>
                 <a:cs typeface="Courier New" pitchFamily="34" charset="-120"/>
               </a:rPr>
-              <a:t>/dmo/connection_id</a:t>
+              <a:t>lcl_item</a:t>
+            </a:r>
+            <a:r>
+              <a:rPr lang="en-US" sz="850" dirty="0">
+                <a:solidFill>
+                  <a:srgbClr val="CCCCCC"/>
+                </a:solidFill>
+                <a:latin typeface="Courier New" pitchFamily="34" charset="0"/>
+                <a:ea typeface="Courier New" pitchFamily="34" charset="-122"/>
+                <a:cs typeface="Courier New" pitchFamily="34" charset="-120"/>
+              </a:rPr>
+              <a:t>.</a:t>
             </a:r>
             <a:endParaRPr lang="en-US" sz="850" dirty="0"/>
           </a:p>
@@ -4336,7 +4426,7 @@
                 <a:ea typeface="Courier New" pitchFamily="34" charset="-122"/>
                 <a:cs typeface="Courier New" pitchFamily="34" charset="-120"/>
               </a:rPr>
-              <a:t>      </a:t>
+              <a:t>  </a:t>
             </a:r>
             <a:r>
               <a:rPr lang="en-US" sz="850" dirty="0">
@@ -4347,7 +4437,7 @@
                 <a:ea typeface="Courier New" pitchFamily="34" charset="-122"/>
                 <a:cs typeface="Courier New" pitchFamily="34" charset="-120"/>
               </a:rPr>
-              <a:t>RETURNING</a:t>
+              <a:t>PRIVATE</a:t>
             </a:r>
             <a:r>
               <a:rPr lang="en-US" sz="850" dirty="0">
@@ -4369,128 +4459,7 @@
                 <a:ea typeface="Courier New" pitchFamily="34" charset="-122"/>
                 <a:cs typeface="Courier New" pitchFamily="34" charset="-120"/>
               </a:rPr>
-              <a:t>VALUE</a:t>
-            </a:r>
-            <a:r>
-              <a:rPr lang="en-US" sz="850" dirty="0">
-                <a:solidFill>
-                  <a:srgbClr val="CCCCCC"/>
-                </a:solidFill>
-                <a:latin typeface="Courier New" pitchFamily="34" charset="0"/>
-                <a:ea typeface="Courier New" pitchFamily="34" charset="-122"/>
-                <a:cs typeface="Courier New" pitchFamily="34" charset="-120"/>
-              </a:rPr>
-              <a:t>(</a:t>
-            </a:r>
-            <a:r>
-              <a:rPr lang="en-US" sz="850" dirty="0">
-                <a:solidFill>
-                  <a:srgbClr val="CCCCCC"/>
-                </a:solidFill>
-                <a:latin typeface="Courier New" pitchFamily="34" charset="0"/>
-                <a:ea typeface="Courier New" pitchFamily="34" charset="-122"/>
-                <a:cs typeface="Courier New" pitchFamily="34" charset="-120"/>
-              </a:rPr>
-              <a:t>r_connection</a:t>
-            </a:r>
-            <a:r>
-              <a:rPr lang="en-US" sz="850" dirty="0">
-                <a:solidFill>
-                  <a:srgbClr val="CCCCCC"/>
-                </a:solidFill>
-                <a:latin typeface="Courier New" pitchFamily="34" charset="0"/>
-                <a:ea typeface="Courier New" pitchFamily="34" charset="-122"/>
-                <a:cs typeface="Courier New" pitchFamily="34" charset="-120"/>
-              </a:rPr>
-              <a:t>)</a:t>
-            </a:r>
-            <a:r>
-              <a:rPr lang="en-US" sz="850" dirty="0">
-                <a:solidFill>
-                  <a:srgbClr val="CCCCCC"/>
-                </a:solidFill>
-                <a:latin typeface="Courier New" pitchFamily="34" charset="0"/>
-                <a:ea typeface="Courier New" pitchFamily="34" charset="-122"/>
-                <a:cs typeface="Courier New" pitchFamily="34" charset="-120"/>
-              </a:rPr>
-              <a:t> </a:t>
-            </a:r>
-            <a:r>
-              <a:rPr lang="en-US" sz="850" dirty="0">
-                <a:solidFill>
-                  <a:srgbClr val="569CD6"/>
-                </a:solidFill>
-                <a:latin typeface="Courier New" pitchFamily="34" charset="0"/>
-                <a:ea typeface="Courier New" pitchFamily="34" charset="-122"/>
-                <a:cs typeface="Courier New" pitchFamily="34" charset="-120"/>
-              </a:rPr>
-              <a:t>TYPE</a:t>
-            </a:r>
-            <a:r>
-              <a:rPr lang="en-US" sz="850" dirty="0">
-                <a:solidFill>
-                  <a:srgbClr val="CCCCCC"/>
-                </a:solidFill>
-                <a:latin typeface="Courier New" pitchFamily="34" charset="0"/>
-                <a:ea typeface="Courier New" pitchFamily="34" charset="-122"/>
-                <a:cs typeface="Courier New" pitchFamily="34" charset="-120"/>
-              </a:rPr>
-              <a:t> </a:t>
-            </a:r>
-            <a:r>
-              <a:rPr lang="en-US" sz="850" dirty="0">
-                <a:solidFill>
-                  <a:srgbClr val="569CD6"/>
-                </a:solidFill>
-                <a:latin typeface="Courier New" pitchFamily="34" charset="0"/>
-                <a:ea typeface="Courier New" pitchFamily="34" charset="-122"/>
-                <a:cs typeface="Courier New" pitchFamily="34" charset="-120"/>
-              </a:rPr>
-              <a:t>REF</a:t>
-            </a:r>
-            <a:r>
-              <a:rPr lang="en-US" sz="850" dirty="0">
-                <a:solidFill>
-                  <a:srgbClr val="CCCCCC"/>
-                </a:solidFill>
-                <a:latin typeface="Courier New" pitchFamily="34" charset="0"/>
-                <a:ea typeface="Courier New" pitchFamily="34" charset="-122"/>
-                <a:cs typeface="Courier New" pitchFamily="34" charset="-120"/>
-              </a:rPr>
-              <a:t> </a:t>
-            </a:r>
-            <a:r>
-              <a:rPr lang="en-US" sz="850" dirty="0">
-                <a:solidFill>
-                  <a:srgbClr val="569CD6"/>
-                </a:solidFill>
-                <a:latin typeface="Courier New" pitchFamily="34" charset="0"/>
-                <a:ea typeface="Courier New" pitchFamily="34" charset="-122"/>
-                <a:cs typeface="Courier New" pitchFamily="34" charset="-120"/>
-              </a:rPr>
-              <a:t>TO</a:t>
-            </a:r>
-            <a:r>
-              <a:rPr lang="en-US" sz="850" dirty="0">
-                <a:solidFill>
-                  <a:srgbClr val="CCCCCC"/>
-                </a:solidFill>
-                <a:latin typeface="Courier New" pitchFamily="34" charset="0"/>
-                <a:ea typeface="Courier New" pitchFamily="34" charset="-122"/>
-                <a:cs typeface="Courier New" pitchFamily="34" charset="-120"/>
-              </a:rPr>
-              <a:t> </a:t>
-            </a:r>
-            <a:r>
-              <a:rPr lang="en-US" sz="850" dirty="0">
-                <a:solidFill>
-                  <a:srgbClr val="4EC9B0"/>
-                </a:solidFill>
-                <a:latin typeface="Courier New" pitchFamily="34" charset="0"/>
-                <a:ea typeface="Courier New" pitchFamily="34" charset="-122"/>
-                <a:cs typeface="Courier New" pitchFamily="34" charset="-120"/>
-              </a:rPr>
-              <a:t>lcl_connection</a:t>
+              <a:t>SECTION</a:t>
             </a:r>
             <a:r>
               <a:rPr lang="en-US" sz="850" dirty="0">
@@ -4521,7 +4490,7 @@
                 <a:ea typeface="Courier New" pitchFamily="34" charset="-122"/>
                 <a:cs typeface="Courier New" pitchFamily="34" charset="-120"/>
               </a:rPr>
-              <a:t>  </a:t>
+              <a:t>    </a:t>
             </a:r>
             <a:r>
               <a:rPr lang="en-US" sz="850" dirty="0">
@@ -4532,7 +4501,7 @@
                 <a:ea typeface="Courier New" pitchFamily="34" charset="-122"/>
                 <a:cs typeface="Courier New" pitchFamily="34" charset="-120"/>
               </a:rPr>
-              <a:t>PRIVATE</a:t>
+              <a:t>CLASS-DATA</a:t>
             </a:r>
             <a:r>
               <a:rPr lang="en-US" sz="850" dirty="0">
@@ -4548,13 +4517,145 @@
             <a:r>
               <a:rPr lang="en-US" sz="850" dirty="0">
                 <a:solidFill>
+                  <a:srgbClr val="CCCCCC"/>
+                </a:solidFill>
+                <a:latin typeface="Courier New" pitchFamily="34" charset="0"/>
+                <a:ea typeface="Courier New" pitchFamily="34" charset="-122"/>
+                <a:cs typeface="Courier New" pitchFamily="34" charset="-120"/>
+              </a:rPr>
+              <a:t>buffer</a:t>
+            </a:r>
+            <a:r>
+              <a:rPr lang="en-US" sz="850" dirty="0">
+                <a:solidFill>
+                  <a:srgbClr val="CCCCCC"/>
+                </a:solidFill>
+                <a:latin typeface="Courier New" pitchFamily="34" charset="0"/>
+                <a:ea typeface="Courier New" pitchFamily="34" charset="-122"/>
+                <a:cs typeface="Courier New" pitchFamily="34" charset="-120"/>
+              </a:rPr>
+              <a:t> </a:t>
+            </a:r>
+            <a:r>
+              <a:rPr lang="en-US" sz="850" dirty="0">
+                <a:solidFill>
                   <a:srgbClr val="569CD6"/>
                 </a:solidFill>
                 <a:latin typeface="Courier New" pitchFamily="34" charset="0"/>
                 <a:ea typeface="Courier New" pitchFamily="34" charset="-122"/>
                 <a:cs typeface="Courier New" pitchFamily="34" charset="-120"/>
               </a:rPr>
-              <a:t>SECTION</a:t>
+              <a:t>TYPE</a:t>
+            </a:r>
+            <a:r>
+              <a:rPr lang="en-US" sz="850" dirty="0">
+                <a:solidFill>
+                  <a:srgbClr val="CCCCCC"/>
+                </a:solidFill>
+                <a:latin typeface="Courier New" pitchFamily="34" charset="0"/>
+                <a:ea typeface="Courier New" pitchFamily="34" charset="-122"/>
+                <a:cs typeface="Courier New" pitchFamily="34" charset="-120"/>
+              </a:rPr>
+              <a:t> </a:t>
+            </a:r>
+            <a:r>
+              <a:rPr lang="en-US" sz="850" dirty="0">
+                <a:solidFill>
+                  <a:srgbClr val="569CD6"/>
+                </a:solidFill>
+                <a:latin typeface="Courier New" pitchFamily="34" charset="0"/>
+                <a:ea typeface="Courier New" pitchFamily="34" charset="-122"/>
+                <a:cs typeface="Courier New" pitchFamily="34" charset="-120"/>
+              </a:rPr>
+              <a:t>TABLE</a:t>
+            </a:r>
+            <a:r>
+              <a:rPr lang="en-US" sz="850" dirty="0">
+                <a:solidFill>
+                  <a:srgbClr val="CCCCCC"/>
+                </a:solidFill>
+                <a:latin typeface="Courier New" pitchFamily="34" charset="0"/>
+                <a:ea typeface="Courier New" pitchFamily="34" charset="-122"/>
+                <a:cs typeface="Courier New" pitchFamily="34" charset="-120"/>
+              </a:rPr>
+              <a:t> </a:t>
+            </a:r>
+            <a:r>
+              <a:rPr lang="en-US" sz="850" dirty="0">
+                <a:solidFill>
+                  <a:srgbClr val="569CD6"/>
+                </a:solidFill>
+                <a:latin typeface="Courier New" pitchFamily="34" charset="0"/>
+                <a:ea typeface="Courier New" pitchFamily="34" charset="-122"/>
+                <a:cs typeface="Courier New" pitchFamily="34" charset="-120"/>
+              </a:rPr>
+              <a:t>OF</a:t>
+            </a:r>
+            <a:r>
+              <a:rPr lang="en-US" sz="850" dirty="0">
+                <a:solidFill>
+                  <a:srgbClr val="CCCCCC"/>
+                </a:solidFill>
+                <a:latin typeface="Courier New" pitchFamily="34" charset="0"/>
+                <a:ea typeface="Courier New" pitchFamily="34" charset="-122"/>
+                <a:cs typeface="Courier New" pitchFamily="34" charset="-120"/>
+              </a:rPr>
+              <a:t> </a:t>
+            </a:r>
+            <a:r>
+              <a:rPr lang="en-US" sz="850" dirty="0">
+                <a:solidFill>
+                  <a:srgbClr val="569CD6"/>
+                </a:solidFill>
+                <a:latin typeface="Courier New" pitchFamily="34" charset="0"/>
+                <a:ea typeface="Courier New" pitchFamily="34" charset="-122"/>
+                <a:cs typeface="Courier New" pitchFamily="34" charset="-120"/>
+              </a:rPr>
+              <a:t>REF</a:t>
+            </a:r>
+            <a:r>
+              <a:rPr lang="en-US" sz="850" dirty="0">
+                <a:solidFill>
+                  <a:srgbClr val="CCCCCC"/>
+                </a:solidFill>
+                <a:latin typeface="Courier New" pitchFamily="34" charset="0"/>
+                <a:ea typeface="Courier New" pitchFamily="34" charset="-122"/>
+                <a:cs typeface="Courier New" pitchFamily="34" charset="-120"/>
+              </a:rPr>
+              <a:t> </a:t>
+            </a:r>
+            <a:r>
+              <a:rPr lang="en-US" sz="850" dirty="0">
+                <a:solidFill>
+                  <a:srgbClr val="569CD6"/>
+                </a:solidFill>
+                <a:latin typeface="Courier New" pitchFamily="34" charset="0"/>
+                <a:ea typeface="Courier New" pitchFamily="34" charset="-122"/>
+                <a:cs typeface="Courier New" pitchFamily="34" charset="-120"/>
+              </a:rPr>
+              <a:t>TO</a:t>
+            </a:r>
+            <a:r>
+              <a:rPr lang="en-US" sz="850" dirty="0">
+                <a:solidFill>
+                  <a:srgbClr val="CCCCCC"/>
+                </a:solidFill>
+                <a:latin typeface="Courier New" pitchFamily="34" charset="0"/>
+                <a:ea typeface="Courier New" pitchFamily="34" charset="-122"/>
+                <a:cs typeface="Courier New" pitchFamily="34" charset="-120"/>
+              </a:rPr>
+              <a:t> </a:t>
+            </a:r>
+            <a:r>
+              <a:rPr lang="en-US" sz="850" dirty="0">
+                <a:solidFill>
+                  <a:srgbClr val="4EC9B0"/>
+                </a:solidFill>
+                <a:latin typeface="Courier New" pitchFamily="34" charset="0"/>
+                <a:ea typeface="Courier New" pitchFamily="34" charset="-122"/>
+                <a:cs typeface="Courier New" pitchFamily="34" charset="-120"/>
+              </a:rPr>
+              <a:t>lcl_item</a:t>
             </a:r>
             <a:r>
               <a:rPr lang="en-US" sz="850" dirty="0">
@@ -4596,7 +4697,7 @@
                 <a:ea typeface="Courier New" pitchFamily="34" charset="-122"/>
                 <a:cs typeface="Courier New" pitchFamily="34" charset="-120"/>
               </a:rPr>
-              <a:t>CLASS-DATA</a:t>
+              <a:t>DATA</a:t>
             </a:r>
             <a:r>
               <a:rPr lang="en-US" sz="850" dirty="0">
@@ -4618,7 +4719,29 @@
                 <a:ea typeface="Courier New" pitchFamily="34" charset="-122"/>
                 <a:cs typeface="Courier New" pitchFamily="34" charset="-120"/>
               </a:rPr>
-              <a:t>buffer</a:t>
+              <a:t>sku</a:t>
+            </a:r>
+            <a:r>
+              <a:rPr lang="en-US" sz="850" dirty="0">
+                <a:solidFill>
+                  <a:srgbClr val="CCCCCC"/>
+                </a:solidFill>
+                <a:latin typeface="Courier New" pitchFamily="34" charset="0"/>
+                <a:ea typeface="Courier New" pitchFamily="34" charset="-122"/>
+                <a:cs typeface="Courier New" pitchFamily="34" charset="-120"/>
+              </a:rPr>
+              <a:t>  </a:t>
+            </a:r>
+            <a:r>
+              <a:rPr lang="en-US" sz="850" dirty="0">
+                <a:solidFill>
+                  <a:srgbClr val="569CD6"/>
+                </a:solidFill>
+                <a:latin typeface="Courier New" pitchFamily="34" charset="0"/>
+                <a:ea typeface="Courier New" pitchFamily="34" charset="-122"/>
+                <a:cs typeface="Courier New" pitchFamily="34" charset="-120"/>
+              </a:rPr>
+              <a:t>TYPE</a:t>
             </a:r>
             <a:r>
               <a:rPr lang="en-US" sz="850" dirty="0">
@@ -4634,123 +4757,13 @@
             <a:r>
               <a:rPr lang="en-US" sz="850" dirty="0">
                 <a:solidFill>
-                  <a:srgbClr val="569CD6"/>
-                </a:solidFill>
-                <a:latin typeface="Courier New" pitchFamily="34" charset="0"/>
-                <a:ea typeface="Courier New" pitchFamily="34" charset="-122"/>
-                <a:cs typeface="Courier New" pitchFamily="34" charset="-120"/>
-              </a:rPr>
-              <a:t>TYPE</a:t>
-            </a:r>
-            <a:r>
-              <a:rPr lang="en-US" sz="850" dirty="0">
-                <a:solidFill>
-                  <a:srgbClr val="CCCCCC"/>
-                </a:solidFill>
-                <a:latin typeface="Courier New" pitchFamily="34" charset="0"/>
-                <a:ea typeface="Courier New" pitchFamily="34" charset="-122"/>
-                <a:cs typeface="Courier New" pitchFamily="34" charset="-120"/>
-              </a:rPr>
-              <a:t> </a:t>
-            </a:r>
-            <a:r>
-              <a:rPr lang="en-US" sz="850" dirty="0">
-                <a:solidFill>
-                  <a:srgbClr val="569CD6"/>
-                </a:solidFill>
-                <a:latin typeface="Courier New" pitchFamily="34" charset="0"/>
-                <a:ea typeface="Courier New" pitchFamily="34" charset="-122"/>
-                <a:cs typeface="Courier New" pitchFamily="34" charset="-120"/>
-              </a:rPr>
-              <a:t>TABLE</a:t>
-            </a:r>
-            <a:r>
-              <a:rPr lang="en-US" sz="850" dirty="0">
-                <a:solidFill>
-                  <a:srgbClr val="CCCCCC"/>
-                </a:solidFill>
-                <a:latin typeface="Courier New" pitchFamily="34" charset="0"/>
-                <a:ea typeface="Courier New" pitchFamily="34" charset="-122"/>
-                <a:cs typeface="Courier New" pitchFamily="34" charset="-120"/>
-              </a:rPr>
-              <a:t> </a:t>
-            </a:r>
-            <a:r>
-              <a:rPr lang="en-US" sz="850" dirty="0">
-                <a:solidFill>
-                  <a:srgbClr val="569CD6"/>
-                </a:solidFill>
-                <a:latin typeface="Courier New" pitchFamily="34" charset="0"/>
-                <a:ea typeface="Courier New" pitchFamily="34" charset="-122"/>
-                <a:cs typeface="Courier New" pitchFamily="34" charset="-120"/>
-              </a:rPr>
-              <a:t>OF</a:t>
-            </a:r>
-            <a:r>
-              <a:rPr lang="en-US" sz="850" dirty="0">
-                <a:solidFill>
-                  <a:srgbClr val="CCCCCC"/>
-                </a:solidFill>
-                <a:latin typeface="Courier New" pitchFamily="34" charset="0"/>
-                <a:ea typeface="Courier New" pitchFamily="34" charset="-122"/>
-                <a:cs typeface="Courier New" pitchFamily="34" charset="-120"/>
-              </a:rPr>
-              <a:t> </a:t>
-            </a:r>
-            <a:r>
-              <a:rPr lang="en-US" sz="850" dirty="0">
-                <a:solidFill>
-                  <a:srgbClr val="569CD6"/>
-                </a:solidFill>
-                <a:latin typeface="Courier New" pitchFamily="34" charset="0"/>
-                <a:ea typeface="Courier New" pitchFamily="34" charset="-122"/>
-                <a:cs typeface="Courier New" pitchFamily="34" charset="-120"/>
-              </a:rPr>
-              <a:t>REF</a:t>
-            </a:r>
-            <a:r>
-              <a:rPr lang="en-US" sz="850" dirty="0">
-                <a:solidFill>
-                  <a:srgbClr val="CCCCCC"/>
-                </a:solidFill>
-                <a:latin typeface="Courier New" pitchFamily="34" charset="0"/>
-                <a:ea typeface="Courier New" pitchFamily="34" charset="-122"/>
-                <a:cs typeface="Courier New" pitchFamily="34" charset="-120"/>
-              </a:rPr>
-              <a:t> </a:t>
-            </a:r>
-            <a:r>
-              <a:rPr lang="en-US" sz="850" dirty="0">
-                <a:solidFill>
-                  <a:srgbClr val="569CD6"/>
-                </a:solidFill>
-                <a:latin typeface="Courier New" pitchFamily="34" charset="0"/>
-                <a:ea typeface="Courier New" pitchFamily="34" charset="-122"/>
-                <a:cs typeface="Courier New" pitchFamily="34" charset="-120"/>
-              </a:rPr>
-              <a:t>TO</a:t>
-            </a:r>
-            <a:r>
-              <a:rPr lang="en-US" sz="850" dirty="0">
-                <a:solidFill>
-                  <a:srgbClr val="CCCCCC"/>
-                </a:solidFill>
-                <a:latin typeface="Courier New" pitchFamily="34" charset="0"/>
-                <a:ea typeface="Courier New" pitchFamily="34" charset="-122"/>
-                <a:cs typeface="Courier New" pitchFamily="34" charset="-120"/>
-              </a:rPr>
-              <a:t> </a:t>
-            </a:r>
-            <a:r>
-              <a:rPr lang="en-US" sz="850" dirty="0">
-                <a:solidFill>
-                  <a:srgbClr val="4EC9B0"/>
-                </a:solidFill>
-                <a:latin typeface="Courier New" pitchFamily="34" charset="0"/>
-                <a:ea typeface="Courier New" pitchFamily="34" charset="-122"/>
-                <a:cs typeface="Courier New" pitchFamily="34" charset="-120"/>
-              </a:rPr>
-              <a:t>lcl_connection</a:t>
+                  <a:srgbClr val="CCCCCC"/>
+                </a:solidFill>
+                <a:latin typeface="Courier New" pitchFamily="34" charset="0"/>
+                <a:ea typeface="Courier New" pitchFamily="34" charset="-122"/>
+                <a:cs typeface="Courier New" pitchFamily="34" charset="-120"/>
+              </a:rPr>
+              <a:t>zta_pc_item-sku</a:t>
             </a:r>
             <a:r>
               <a:rPr lang="en-US" sz="850" dirty="0">
@@ -4814,18 +4827,18 @@
                 <a:ea typeface="Courier New" pitchFamily="34" charset="-122"/>
                 <a:cs typeface="Courier New" pitchFamily="34" charset="-120"/>
               </a:rPr>
-              <a:t>carrier_id</a:t>
-            </a:r>
-            <a:r>
-              <a:rPr lang="en-US" sz="850" dirty="0">
-                <a:solidFill>
-                  <a:srgbClr val="CCCCCC"/>
-                </a:solidFill>
-                <a:latin typeface="Courier New" pitchFamily="34" charset="0"/>
-                <a:ea typeface="Courier New" pitchFamily="34" charset="-122"/>
-                <a:cs typeface="Courier New" pitchFamily="34" charset="-120"/>
-              </a:rPr>
-              <a:t>    </a:t>
+              <a:t>nome</a:t>
+            </a:r>
+            <a:r>
+              <a:rPr lang="en-US" sz="850" dirty="0">
+                <a:solidFill>
+                  <a:srgbClr val="CCCCCC"/>
+                </a:solidFill>
+                <a:latin typeface="Courier New" pitchFamily="34" charset="0"/>
+                <a:ea typeface="Courier New" pitchFamily="34" charset="-122"/>
+                <a:cs typeface="Courier New" pitchFamily="34" charset="-120"/>
+              </a:rPr>
+              <a:t> </a:t>
             </a:r>
             <a:r>
               <a:rPr lang="en-US" sz="850" dirty="0">
@@ -4852,13 +4865,13 @@
             <a:r>
               <a:rPr lang="en-US" sz="850" dirty="0">
                 <a:solidFill>
-                  <a:srgbClr val="4EC9B0"/>
-                </a:solidFill>
-                <a:latin typeface="Courier New" pitchFamily="34" charset="0"/>
-                <a:ea typeface="Courier New" pitchFamily="34" charset="-122"/>
-                <a:cs typeface="Courier New" pitchFamily="34" charset="-120"/>
-              </a:rPr>
-              <a:t>/dmo/carrier_id</a:t>
+                  <a:srgbClr val="CCCCCC"/>
+                </a:solidFill>
+                <a:latin typeface="Courier New" pitchFamily="34" charset="0"/>
+                <a:ea typeface="Courier New" pitchFamily="34" charset="-122"/>
+                <a:cs typeface="Courier New" pitchFamily="34" charset="-120"/>
+              </a:rPr>
+              <a:t>zta_pc_item-nome</a:t>
             </a:r>
             <a:r>
               <a:rPr lang="en-US" sz="850" dirty="0">
@@ -4883,90 +4896,13 @@
             <a:r>
               <a:rPr lang="en-US" sz="850" dirty="0">
                 <a:solidFill>
-                  <a:srgbClr val="CCCCCC"/>
-                </a:solidFill>
-                <a:latin typeface="Courier New" pitchFamily="34" charset="0"/>
-                <a:ea typeface="Courier New" pitchFamily="34" charset="-122"/>
-                <a:cs typeface="Courier New" pitchFamily="34" charset="-120"/>
-              </a:rPr>
-              <a:t>    </a:t>
-            </a:r>
-            <a:r>
-              <a:rPr lang="en-US" sz="850" dirty="0">
-                <a:solidFill>
                   <a:srgbClr val="569CD6"/>
                 </a:solidFill>
                 <a:latin typeface="Courier New" pitchFamily="34" charset="0"/>
                 <a:ea typeface="Courier New" pitchFamily="34" charset="-122"/>
                 <a:cs typeface="Courier New" pitchFamily="34" charset="-120"/>
               </a:rPr>
-              <a:t>DATA</a:t>
-            </a:r>
-            <a:r>
-              <a:rPr lang="en-US" sz="850" dirty="0">
-                <a:solidFill>
-                  <a:srgbClr val="CCCCCC"/>
-                </a:solidFill>
-                <a:latin typeface="Courier New" pitchFamily="34" charset="0"/>
-                <a:ea typeface="Courier New" pitchFamily="34" charset="-122"/>
-                <a:cs typeface="Courier New" pitchFamily="34" charset="-120"/>
-              </a:rPr>
-              <a:t> </a:t>
-            </a:r>
-            <a:r>
-              <a:rPr lang="en-US" sz="850" dirty="0">
-                <a:solidFill>
-                  <a:srgbClr val="CCCCCC"/>
-                </a:solidFill>
-                <a:latin typeface="Courier New" pitchFamily="34" charset="0"/>
-                <a:ea typeface="Courier New" pitchFamily="34" charset="-122"/>
-                <a:cs typeface="Courier New" pitchFamily="34" charset="-120"/>
-              </a:rPr>
-              <a:t>connection_id</a:t>
-            </a:r>
-            <a:r>
-              <a:rPr lang="en-US" sz="850" dirty="0">
-                <a:solidFill>
-                  <a:srgbClr val="CCCCCC"/>
-                </a:solidFill>
-                <a:latin typeface="Courier New" pitchFamily="34" charset="0"/>
-                <a:ea typeface="Courier New" pitchFamily="34" charset="-122"/>
-                <a:cs typeface="Courier New" pitchFamily="34" charset="-120"/>
-              </a:rPr>
-              <a:t> </a:t>
-            </a:r>
-            <a:r>
-              <a:rPr lang="en-US" sz="850" dirty="0">
-                <a:solidFill>
-                  <a:srgbClr val="569CD6"/>
-                </a:solidFill>
-                <a:latin typeface="Courier New" pitchFamily="34" charset="0"/>
-                <a:ea typeface="Courier New" pitchFamily="34" charset="-122"/>
-                <a:cs typeface="Courier New" pitchFamily="34" charset="-120"/>
-              </a:rPr>
-              <a:t>TYPE</a:t>
-            </a:r>
-            <a:r>
-              <a:rPr lang="en-US" sz="850" dirty="0">
-                <a:solidFill>
-                  <a:srgbClr val="CCCCCC"/>
-                </a:solidFill>
-                <a:latin typeface="Courier New" pitchFamily="34" charset="0"/>
-                <a:ea typeface="Courier New" pitchFamily="34" charset="-122"/>
-                <a:cs typeface="Courier New" pitchFamily="34" charset="-120"/>
-              </a:rPr>
-              <a:t> </a:t>
-            </a:r>
-            <a:r>
-              <a:rPr lang="en-US" sz="850" dirty="0">
-                <a:solidFill>
-                  <a:srgbClr val="4EC9B0"/>
-                </a:solidFill>
-                <a:latin typeface="Courier New" pitchFamily="34" charset="0"/>
-                <a:ea typeface="Courier New" pitchFamily="34" charset="-122"/>
-                <a:cs typeface="Courier New" pitchFamily="34" charset="-120"/>
-              </a:rPr>
-              <a:t>/dmo/connection_id</a:t>
+              <a:t>ENDCLASS</a:t>
             </a:r>
             <a:r>
               <a:rPr lang="en-US" sz="850" dirty="0">
@@ -4991,24 +4927,13 @@
             <a:r>
               <a:rPr lang="en-US" sz="850" dirty="0">
                 <a:solidFill>
-                  <a:srgbClr val="569CD6"/>
-                </a:solidFill>
-                <a:latin typeface="Courier New" pitchFamily="34" charset="0"/>
-                <a:ea typeface="Courier New" pitchFamily="34" charset="-122"/>
-                <a:cs typeface="Courier New" pitchFamily="34" charset="-120"/>
-              </a:rPr>
-              <a:t>ENDCLASS</a:t>
-            </a:r>
-            <a:r>
-              <a:rPr lang="en-US" sz="850" dirty="0">
-                <a:solidFill>
-                  <a:srgbClr val="CCCCCC"/>
-                </a:solidFill>
-                <a:latin typeface="Courier New" pitchFamily="34" charset="0"/>
-                <a:ea typeface="Courier New" pitchFamily="34" charset="-122"/>
-                <a:cs typeface="Courier New" pitchFamily="34" charset="-120"/>
-              </a:rPr>
-              <a:t>.</a:t>
+                  <a:srgbClr val="000000"/>
+                </a:solidFill>
+                <a:latin typeface="Courier New" pitchFamily="34" charset="0"/>
+                <a:ea typeface="Courier New" pitchFamily="34" charset="-122"/>
+                <a:cs typeface="Courier New" pitchFamily="34" charset="-120"/>
+              </a:rPr>
+              <a:t> </a:t>
             </a:r>
             <a:endParaRPr lang="en-US" sz="850" dirty="0"/>
           </a:p>
@@ -5022,13 +4947,68 @@
             <a:r>
               <a:rPr lang="en-US" sz="850" dirty="0">
                 <a:solidFill>
-                  <a:srgbClr val="000000"/>
+                  <a:srgbClr val="569CD6"/>
+                </a:solidFill>
+                <a:latin typeface="Courier New" pitchFamily="34" charset="0"/>
+                <a:ea typeface="Courier New" pitchFamily="34" charset="-122"/>
+                <a:cs typeface="Courier New" pitchFamily="34" charset="-120"/>
+              </a:rPr>
+              <a:t>CLASS</a:t>
+            </a:r>
+            <a:r>
+              <a:rPr lang="en-US" sz="850" dirty="0">
+                <a:solidFill>
+                  <a:srgbClr val="CCCCCC"/>
                 </a:solidFill>
                 <a:latin typeface="Courier New" pitchFamily="34" charset="0"/>
                 <a:ea typeface="Courier New" pitchFamily="34" charset="-122"/>
                 <a:cs typeface="Courier New" pitchFamily="34" charset="-120"/>
               </a:rPr>
               <a:t> </a:t>
+            </a:r>
+            <a:r>
+              <a:rPr lang="en-US" sz="850" dirty="0">
+                <a:solidFill>
+                  <a:srgbClr val="4EC9B0"/>
+                </a:solidFill>
+                <a:latin typeface="Courier New" pitchFamily="34" charset="0"/>
+                <a:ea typeface="Courier New" pitchFamily="34" charset="-122"/>
+                <a:cs typeface="Courier New" pitchFamily="34" charset="-120"/>
+              </a:rPr>
+              <a:t>lcl_item</a:t>
+            </a:r>
+            <a:r>
+              <a:rPr lang="en-US" sz="850" dirty="0">
+                <a:solidFill>
+                  <a:srgbClr val="CCCCCC"/>
+                </a:solidFill>
+                <a:latin typeface="Courier New" pitchFamily="34" charset="0"/>
+                <a:ea typeface="Courier New" pitchFamily="34" charset="-122"/>
+                <a:cs typeface="Courier New" pitchFamily="34" charset="-120"/>
+              </a:rPr>
+              <a:t> </a:t>
+            </a:r>
+            <a:r>
+              <a:rPr lang="en-US" sz="850" dirty="0">
+                <a:solidFill>
+                  <a:srgbClr val="569CD6"/>
+                </a:solidFill>
+                <a:latin typeface="Courier New" pitchFamily="34" charset="0"/>
+                <a:ea typeface="Courier New" pitchFamily="34" charset="-122"/>
+                <a:cs typeface="Courier New" pitchFamily="34" charset="-120"/>
+              </a:rPr>
+              <a:t>IMPLEMENTATION</a:t>
+            </a:r>
+            <a:r>
+              <a:rPr lang="en-US" sz="850" dirty="0">
+                <a:solidFill>
+                  <a:srgbClr val="CCCCCC"/>
+                </a:solidFill>
+                <a:latin typeface="Courier New" pitchFamily="34" charset="0"/>
+                <a:ea typeface="Courier New" pitchFamily="34" charset="-122"/>
+                <a:cs typeface="Courier New" pitchFamily="34" charset="-120"/>
+              </a:rPr>
+              <a:t>.</a:t>
             </a:r>
             <a:endParaRPr lang="en-US" sz="850" dirty="0"/>
           </a:p>
@@ -5042,13 +5022,24 @@
             <a:r>
               <a:rPr lang="en-US" sz="850" dirty="0">
                 <a:solidFill>
+                  <a:srgbClr val="CCCCCC"/>
+                </a:solidFill>
+                <a:latin typeface="Courier New" pitchFamily="34" charset="0"/>
+                <a:ea typeface="Courier New" pitchFamily="34" charset="-122"/>
+                <a:cs typeface="Courier New" pitchFamily="34" charset="-120"/>
+              </a:rPr>
+              <a:t>  </a:t>
+            </a:r>
+            <a:r>
+              <a:rPr lang="en-US" sz="850" dirty="0">
+                <a:solidFill>
                   <a:srgbClr val="569CD6"/>
                 </a:solidFill>
                 <a:latin typeface="Courier New" pitchFamily="34" charset="0"/>
                 <a:ea typeface="Courier New" pitchFamily="34" charset="-122"/>
                 <a:cs typeface="Courier New" pitchFamily="34" charset="-120"/>
               </a:rPr>
-              <a:t>CLASS</a:t>
+              <a:t>METHOD</a:t>
             </a:r>
             <a:r>
               <a:rPr lang="en-US" sz="850" dirty="0">
@@ -5064,35 +5055,13 @@
             <a:r>
               <a:rPr lang="en-US" sz="850" dirty="0">
                 <a:solidFill>
-                  <a:srgbClr val="4EC9B0"/>
-                </a:solidFill>
-                <a:latin typeface="Courier New" pitchFamily="34" charset="0"/>
-                <a:ea typeface="Courier New" pitchFamily="34" charset="-122"/>
-                <a:cs typeface="Courier New" pitchFamily="34" charset="-120"/>
-              </a:rPr>
-              <a:t>lcl_connection</a:t>
-            </a:r>
-            <a:r>
-              <a:rPr lang="en-US" sz="850" dirty="0">
-                <a:solidFill>
-                  <a:srgbClr val="CCCCCC"/>
-                </a:solidFill>
-                <a:latin typeface="Courier New" pitchFamily="34" charset="0"/>
-                <a:ea typeface="Courier New" pitchFamily="34" charset="-122"/>
-                <a:cs typeface="Courier New" pitchFamily="34" charset="-120"/>
-              </a:rPr>
-              <a:t> </a:t>
-            </a:r>
-            <a:r>
-              <a:rPr lang="en-US" sz="850" dirty="0">
-                <a:solidFill>
-                  <a:srgbClr val="569CD6"/>
-                </a:solidFill>
-                <a:latin typeface="Courier New" pitchFamily="34" charset="0"/>
-                <a:ea typeface="Courier New" pitchFamily="34" charset="-122"/>
-                <a:cs typeface="Courier New" pitchFamily="34" charset="-120"/>
-              </a:rPr>
-              <a:t>IMPLEMENTATION</a:t>
+                  <a:srgbClr val="CCCCCC"/>
+                </a:solidFill>
+                <a:latin typeface="Courier New" pitchFamily="34" charset="0"/>
+                <a:ea typeface="Courier New" pitchFamily="34" charset="-122"/>
+                <a:cs typeface="Courier New" pitchFamily="34" charset="-120"/>
+              </a:rPr>
+              <a:t>get_item</a:t>
             </a:r>
             <a:r>
               <a:rPr lang="en-US" sz="850" dirty="0">
@@ -5123,7 +5092,51 @@
                 <a:ea typeface="Courier New" pitchFamily="34" charset="-122"/>
                 <a:cs typeface="Courier New" pitchFamily="34" charset="-120"/>
               </a:rPr>
-              <a:t>  </a:t>
+              <a:t>    </a:t>
+            </a:r>
+            <a:r>
+              <a:rPr lang="en-US" sz="850" dirty="0">
+                <a:solidFill>
+                  <a:srgbClr val="CCCCCC"/>
+                </a:solidFill>
+                <a:latin typeface="Courier New" pitchFamily="34" charset="0"/>
+                <a:ea typeface="Courier New" pitchFamily="34" charset="-122"/>
+                <a:cs typeface="Courier New" pitchFamily="34" charset="-120"/>
+              </a:rPr>
+              <a:t>r_item</a:t>
+            </a:r>
+            <a:r>
+              <a:rPr lang="en-US" sz="850" dirty="0">
+                <a:solidFill>
+                  <a:srgbClr val="CCCCCC"/>
+                </a:solidFill>
+                <a:latin typeface="Courier New" pitchFamily="34" charset="0"/>
+                <a:ea typeface="Courier New" pitchFamily="34" charset="-122"/>
+                <a:cs typeface="Courier New" pitchFamily="34" charset="-120"/>
+              </a:rPr>
+              <a:t> </a:t>
+            </a:r>
+            <a:r>
+              <a:rPr lang="en-US" sz="850" dirty="0">
+                <a:solidFill>
+                  <a:srgbClr val="CCCCCC"/>
+                </a:solidFill>
+                <a:latin typeface="Courier New" pitchFamily="34" charset="0"/>
+                <a:ea typeface="Courier New" pitchFamily="34" charset="-122"/>
+                <a:cs typeface="Courier New" pitchFamily="34" charset="-120"/>
+              </a:rPr>
+              <a:t>=</a:t>
+            </a:r>
+            <a:r>
+              <a:rPr lang="en-US" sz="850" dirty="0">
+                <a:solidFill>
+                  <a:srgbClr val="CCCCCC"/>
+                </a:solidFill>
+                <a:latin typeface="Courier New" pitchFamily="34" charset="0"/>
+                <a:ea typeface="Courier New" pitchFamily="34" charset="-122"/>
+                <a:cs typeface="Courier New" pitchFamily="34" charset="-120"/>
+              </a:rPr>
+              <a:t> </a:t>
             </a:r>
             <a:r>
               <a:rPr lang="en-US" sz="850" dirty="0">
@@ -5134,7 +5147,7 @@
                 <a:ea typeface="Courier New" pitchFamily="34" charset="-122"/>
                 <a:cs typeface="Courier New" pitchFamily="34" charset="-120"/>
               </a:rPr>
-              <a:t>METHOD</a:t>
+              <a:t>VALUE</a:t>
             </a:r>
             <a:r>
               <a:rPr lang="en-US" sz="850" dirty="0">
@@ -5156,7 +5169,205 @@
                 <a:ea typeface="Courier New" pitchFamily="34" charset="-122"/>
                 <a:cs typeface="Courier New" pitchFamily="34" charset="-120"/>
               </a:rPr>
-              <a:t>get_connection</a:t>
+              <a:t>#</a:t>
+            </a:r>
+            <a:r>
+              <a:rPr lang="en-US" sz="850" dirty="0">
+                <a:solidFill>
+                  <a:srgbClr val="CCCCCC"/>
+                </a:solidFill>
+                <a:latin typeface="Courier New" pitchFamily="34" charset="0"/>
+                <a:ea typeface="Courier New" pitchFamily="34" charset="-122"/>
+                <a:cs typeface="Courier New" pitchFamily="34" charset="-120"/>
+              </a:rPr>
+              <a:t>(</a:t>
+            </a:r>
+            <a:r>
+              <a:rPr lang="en-US" sz="850" dirty="0">
+                <a:solidFill>
+                  <a:srgbClr val="CCCCCC"/>
+                </a:solidFill>
+                <a:latin typeface="Courier New" pitchFamily="34" charset="0"/>
+                <a:ea typeface="Courier New" pitchFamily="34" charset="-122"/>
+                <a:cs typeface="Courier New" pitchFamily="34" charset="-120"/>
+              </a:rPr>
+              <a:t> </a:t>
+            </a:r>
+            <a:r>
+              <a:rPr lang="en-US" sz="850" dirty="0">
+                <a:solidFill>
+                  <a:srgbClr val="CCCCCC"/>
+                </a:solidFill>
+                <a:latin typeface="Courier New" pitchFamily="34" charset="0"/>
+                <a:ea typeface="Courier New" pitchFamily="34" charset="-122"/>
+                <a:cs typeface="Courier New" pitchFamily="34" charset="-120"/>
+              </a:rPr>
+              <a:t>buffer</a:t>
+            </a:r>
+            <a:r>
+              <a:rPr lang="en-US" sz="850" dirty="0">
+                <a:solidFill>
+                  <a:srgbClr val="CCCCCC"/>
+                </a:solidFill>
+                <a:latin typeface="Courier New" pitchFamily="34" charset="0"/>
+                <a:ea typeface="Courier New" pitchFamily="34" charset="-122"/>
+                <a:cs typeface="Courier New" pitchFamily="34" charset="-120"/>
+              </a:rPr>
+              <a:t>[</a:t>
+            </a:r>
+            <a:r>
+              <a:rPr lang="en-US" sz="850" dirty="0">
+                <a:solidFill>
+                  <a:srgbClr val="CCCCCC"/>
+                </a:solidFill>
+                <a:latin typeface="Courier New" pitchFamily="34" charset="0"/>
+                <a:ea typeface="Courier New" pitchFamily="34" charset="-122"/>
+                <a:cs typeface="Courier New" pitchFamily="34" charset="-120"/>
+              </a:rPr>
+              <a:t> </a:t>
+            </a:r>
+            <a:r>
+              <a:rPr lang="en-US" sz="850" dirty="0">
+                <a:solidFill>
+                  <a:srgbClr val="CCCCCC"/>
+                </a:solidFill>
+                <a:latin typeface="Courier New" pitchFamily="34" charset="0"/>
+                <a:ea typeface="Courier New" pitchFamily="34" charset="-122"/>
+                <a:cs typeface="Courier New" pitchFamily="34" charset="-120"/>
+              </a:rPr>
+              <a:t>table_line-</a:t>
+            </a:r>
+            <a:r>
+              <a:rPr lang="en-US" sz="850" dirty="0">
+                <a:solidFill>
+                  <a:srgbClr val="CCCCCC"/>
+                </a:solidFill>
+                <a:latin typeface="Courier New" pitchFamily="34" charset="0"/>
+                <a:ea typeface="Courier New" pitchFamily="34" charset="-122"/>
+                <a:cs typeface="Courier New" pitchFamily="34" charset="-120"/>
+              </a:rPr>
+              <a:t>&gt;</a:t>
+            </a:r>
+            <a:r>
+              <a:rPr lang="en-US" sz="850" dirty="0">
+                <a:solidFill>
+                  <a:srgbClr val="CCCCCC"/>
+                </a:solidFill>
+                <a:latin typeface="Courier New" pitchFamily="34" charset="0"/>
+                <a:ea typeface="Courier New" pitchFamily="34" charset="-122"/>
+                <a:cs typeface="Courier New" pitchFamily="34" charset="-120"/>
+              </a:rPr>
+              <a:t>sku</a:t>
+            </a:r>
+            <a:r>
+              <a:rPr lang="en-US" sz="850" dirty="0">
+                <a:solidFill>
+                  <a:srgbClr val="CCCCCC"/>
+                </a:solidFill>
+                <a:latin typeface="Courier New" pitchFamily="34" charset="0"/>
+                <a:ea typeface="Courier New" pitchFamily="34" charset="-122"/>
+                <a:cs typeface="Courier New" pitchFamily="34" charset="-120"/>
+              </a:rPr>
+              <a:t> </a:t>
+            </a:r>
+            <a:r>
+              <a:rPr lang="en-US" sz="850" dirty="0">
+                <a:solidFill>
+                  <a:srgbClr val="CCCCCC"/>
+                </a:solidFill>
+                <a:latin typeface="Courier New" pitchFamily="34" charset="0"/>
+                <a:ea typeface="Courier New" pitchFamily="34" charset="-122"/>
+                <a:cs typeface="Courier New" pitchFamily="34" charset="-120"/>
+              </a:rPr>
+              <a:t>=</a:t>
+            </a:r>
+            <a:r>
+              <a:rPr lang="en-US" sz="850" dirty="0">
+                <a:solidFill>
+                  <a:srgbClr val="CCCCCC"/>
+                </a:solidFill>
+                <a:latin typeface="Courier New" pitchFamily="34" charset="0"/>
+                <a:ea typeface="Courier New" pitchFamily="34" charset="-122"/>
+                <a:cs typeface="Courier New" pitchFamily="34" charset="-120"/>
+              </a:rPr>
+              <a:t> </a:t>
+            </a:r>
+            <a:r>
+              <a:rPr lang="en-US" sz="850" dirty="0">
+                <a:solidFill>
+                  <a:srgbClr val="CCCCCC"/>
+                </a:solidFill>
+                <a:latin typeface="Courier New" pitchFamily="34" charset="0"/>
+                <a:ea typeface="Courier New" pitchFamily="34" charset="-122"/>
+                <a:cs typeface="Courier New" pitchFamily="34" charset="-120"/>
+              </a:rPr>
+              <a:t>i_sku</a:t>
+            </a:r>
+            <a:r>
+              <a:rPr lang="en-US" sz="850" dirty="0">
+                <a:solidFill>
+                  <a:srgbClr val="CCCCCC"/>
+                </a:solidFill>
+                <a:latin typeface="Courier New" pitchFamily="34" charset="0"/>
+                <a:ea typeface="Courier New" pitchFamily="34" charset="-122"/>
+                <a:cs typeface="Courier New" pitchFamily="34" charset="-120"/>
+              </a:rPr>
+              <a:t> </a:t>
+            </a:r>
+            <a:r>
+              <a:rPr lang="en-US" sz="850" dirty="0">
+                <a:solidFill>
+                  <a:srgbClr val="CCCCCC"/>
+                </a:solidFill>
+                <a:latin typeface="Courier New" pitchFamily="34" charset="0"/>
+                <a:ea typeface="Courier New" pitchFamily="34" charset="-122"/>
+                <a:cs typeface="Courier New" pitchFamily="34" charset="-120"/>
+              </a:rPr>
+              <a:t>]</a:t>
+            </a:r>
+            <a:r>
+              <a:rPr lang="en-US" sz="850" dirty="0">
+                <a:solidFill>
+                  <a:srgbClr val="CCCCCC"/>
+                </a:solidFill>
+                <a:latin typeface="Courier New" pitchFamily="34" charset="0"/>
+                <a:ea typeface="Courier New" pitchFamily="34" charset="-122"/>
+                <a:cs typeface="Courier New" pitchFamily="34" charset="-120"/>
+              </a:rPr>
+              <a:t> </a:t>
+            </a:r>
+            <a:r>
+              <a:rPr lang="en-US" sz="850" dirty="0">
+                <a:solidFill>
+                  <a:srgbClr val="569CD6"/>
+                </a:solidFill>
+                <a:latin typeface="Courier New" pitchFamily="34" charset="0"/>
+                <a:ea typeface="Courier New" pitchFamily="34" charset="-122"/>
+                <a:cs typeface="Courier New" pitchFamily="34" charset="-120"/>
+              </a:rPr>
+              <a:t>OPTIONAL</a:t>
+            </a:r>
+            <a:r>
+              <a:rPr lang="en-US" sz="850" dirty="0">
+                <a:solidFill>
+                  <a:srgbClr val="CCCCCC"/>
+                </a:solidFill>
+                <a:latin typeface="Courier New" pitchFamily="34" charset="0"/>
+                <a:ea typeface="Courier New" pitchFamily="34" charset="-122"/>
+                <a:cs typeface="Courier New" pitchFamily="34" charset="-120"/>
+              </a:rPr>
+              <a:t> </a:t>
+            </a:r>
+            <a:r>
+              <a:rPr lang="en-US" sz="850" dirty="0">
+                <a:solidFill>
+                  <a:srgbClr val="CCCCCC"/>
+                </a:solidFill>
+                <a:latin typeface="Courier New" pitchFamily="34" charset="0"/>
+                <a:ea typeface="Courier New" pitchFamily="34" charset="-122"/>
+                <a:cs typeface="Courier New" pitchFamily="34" charset="-120"/>
+              </a:rPr>
+              <a:t>)</a:t>
             </a:r>
             <a:r>
               <a:rPr lang="en-US" sz="850" dirty="0">
@@ -5192,13 +5403,13 @@
             <a:r>
               <a:rPr lang="en-US" sz="850" dirty="0">
                 <a:solidFill>
-                  <a:srgbClr val="CCCCCC"/>
-                </a:solidFill>
-                <a:latin typeface="Courier New" pitchFamily="34" charset="0"/>
-                <a:ea typeface="Courier New" pitchFamily="34" charset="-122"/>
-                <a:cs typeface="Courier New" pitchFamily="34" charset="-120"/>
-              </a:rPr>
-              <a:t>r_connection</a:t>
+                  <a:srgbClr val="569CD6"/>
+                </a:solidFill>
+                <a:latin typeface="Courier New" pitchFamily="34" charset="0"/>
+                <a:ea typeface="Courier New" pitchFamily="34" charset="-122"/>
+                <a:cs typeface="Courier New" pitchFamily="34" charset="-120"/>
+              </a:rPr>
+              <a:t>IF</a:t>
             </a:r>
             <a:r>
               <a:rPr lang="en-US" sz="850" dirty="0">
@@ -5220,7 +5431,7 @@
                 <a:ea typeface="Courier New" pitchFamily="34" charset="-122"/>
                 <a:cs typeface="Courier New" pitchFamily="34" charset="-120"/>
               </a:rPr>
-              <a:t>=</a:t>
+              <a:t>r_item</a:t>
             </a:r>
             <a:r>
               <a:rPr lang="en-US" sz="850" dirty="0">
@@ -5242,7 +5453,7 @@
                 <a:ea typeface="Courier New" pitchFamily="34" charset="-122"/>
                 <a:cs typeface="Courier New" pitchFamily="34" charset="-120"/>
               </a:rPr>
-              <a:t>VALUE</a:t>
+              <a:t>IS</a:t>
             </a:r>
             <a:r>
               <a:rPr lang="en-US" sz="850" dirty="0">
@@ -5258,24 +5469,13 @@
             <a:r>
               <a:rPr lang="en-US" sz="850" dirty="0">
                 <a:solidFill>
-                  <a:srgbClr val="CCCCCC"/>
-                </a:solidFill>
-                <a:latin typeface="Courier New" pitchFamily="34" charset="0"/>
-                <a:ea typeface="Courier New" pitchFamily="34" charset="-122"/>
-                <a:cs typeface="Courier New" pitchFamily="34" charset="-120"/>
-              </a:rPr>
-              <a:t>#</a:t>
-            </a:r>
-            <a:r>
-              <a:rPr lang="en-US" sz="850" dirty="0">
-                <a:solidFill>
-                  <a:srgbClr val="CCCCCC"/>
-                </a:solidFill>
-                <a:latin typeface="Courier New" pitchFamily="34" charset="0"/>
-                <a:ea typeface="Courier New" pitchFamily="34" charset="-122"/>
-                <a:cs typeface="Courier New" pitchFamily="34" charset="-120"/>
-              </a:rPr>
-              <a:t>(</a:t>
+                  <a:srgbClr val="569CD6"/>
+                </a:solidFill>
+                <a:latin typeface="Courier New" pitchFamily="34" charset="0"/>
+                <a:ea typeface="Courier New" pitchFamily="34" charset="-122"/>
+                <a:cs typeface="Courier New" pitchFamily="34" charset="-120"/>
+              </a:rPr>
+              <a:t>NOT</a:t>
             </a:r>
             <a:r>
               <a:rPr lang="en-US" sz="850" dirty="0">
@@ -5291,112 +5491,24 @@
             <a:r>
               <a:rPr lang="en-US" sz="850" dirty="0">
                 <a:solidFill>
-                  <a:srgbClr val="CCCCCC"/>
-                </a:solidFill>
-                <a:latin typeface="Courier New" pitchFamily="34" charset="0"/>
-                <a:ea typeface="Courier New" pitchFamily="34" charset="-122"/>
-                <a:cs typeface="Courier New" pitchFamily="34" charset="-120"/>
-              </a:rPr>
-              <a:t>buffer</a:t>
-            </a:r>
-            <a:r>
-              <a:rPr lang="en-US" sz="850" dirty="0">
-                <a:solidFill>
-                  <a:srgbClr val="CCCCCC"/>
-                </a:solidFill>
-                <a:latin typeface="Courier New" pitchFamily="34" charset="0"/>
-                <a:ea typeface="Courier New" pitchFamily="34" charset="-122"/>
-                <a:cs typeface="Courier New" pitchFamily="34" charset="-120"/>
-              </a:rPr>
-              <a:t>[</a:t>
-            </a:r>
-            <a:r>
-              <a:rPr lang="en-US" sz="850" dirty="0">
-                <a:solidFill>
-                  <a:srgbClr val="CCCCCC"/>
-                </a:solidFill>
-                <a:latin typeface="Courier New" pitchFamily="34" charset="0"/>
-                <a:ea typeface="Courier New" pitchFamily="34" charset="-122"/>
-                <a:cs typeface="Courier New" pitchFamily="34" charset="-120"/>
-              </a:rPr>
-              <a:t> </a:t>
-            </a:r>
-            <a:r>
-              <a:rPr lang="en-US" sz="850" dirty="0">
-                <a:solidFill>
-                  <a:srgbClr val="CCCCCC"/>
-                </a:solidFill>
-                <a:latin typeface="Courier New" pitchFamily="34" charset="0"/>
-                <a:ea typeface="Courier New" pitchFamily="34" charset="-122"/>
-                <a:cs typeface="Courier New" pitchFamily="34" charset="-120"/>
-              </a:rPr>
-              <a:t>table_line-</a:t>
-            </a:r>
-            <a:r>
-              <a:rPr lang="en-US" sz="850" dirty="0">
-                <a:solidFill>
-                  <a:srgbClr val="CCCCCC"/>
-                </a:solidFill>
-                <a:latin typeface="Courier New" pitchFamily="34" charset="0"/>
-                <a:ea typeface="Courier New" pitchFamily="34" charset="-122"/>
-                <a:cs typeface="Courier New" pitchFamily="34" charset="-120"/>
-              </a:rPr>
-              <a:t>&gt;</a:t>
-            </a:r>
-            <a:r>
-              <a:rPr lang="en-US" sz="850" dirty="0">
-                <a:solidFill>
-                  <a:srgbClr val="CCCCCC"/>
-                </a:solidFill>
-                <a:latin typeface="Courier New" pitchFamily="34" charset="0"/>
-                <a:ea typeface="Courier New" pitchFamily="34" charset="-122"/>
-                <a:cs typeface="Courier New" pitchFamily="34" charset="-120"/>
-              </a:rPr>
-              <a:t>carrier_id</a:t>
-            </a:r>
-            <a:r>
-              <a:rPr lang="en-US" sz="850" dirty="0">
-                <a:solidFill>
-                  <a:srgbClr val="CCCCCC"/>
-                </a:solidFill>
-                <a:latin typeface="Courier New" pitchFamily="34" charset="0"/>
-                <a:ea typeface="Courier New" pitchFamily="34" charset="-122"/>
-                <a:cs typeface="Courier New" pitchFamily="34" charset="-120"/>
-              </a:rPr>
-              <a:t>    </a:t>
-            </a:r>
-            <a:r>
-              <a:rPr lang="en-US" sz="850" dirty="0">
-                <a:solidFill>
-                  <a:srgbClr val="CCCCCC"/>
-                </a:solidFill>
-                <a:latin typeface="Courier New" pitchFamily="34" charset="0"/>
-                <a:ea typeface="Courier New" pitchFamily="34" charset="-122"/>
-                <a:cs typeface="Courier New" pitchFamily="34" charset="-120"/>
-              </a:rPr>
-              <a:t>=</a:t>
-            </a:r>
-            <a:r>
-              <a:rPr lang="en-US" sz="850" dirty="0">
-                <a:solidFill>
-                  <a:srgbClr val="CCCCCC"/>
-                </a:solidFill>
-                <a:latin typeface="Courier New" pitchFamily="34" charset="0"/>
-                <a:ea typeface="Courier New" pitchFamily="34" charset="-122"/>
-                <a:cs typeface="Courier New" pitchFamily="34" charset="-120"/>
-              </a:rPr>
-              <a:t> </a:t>
-            </a:r>
-            <a:r>
-              <a:rPr lang="en-US" sz="850" dirty="0">
-                <a:solidFill>
-                  <a:srgbClr val="CCCCCC"/>
-                </a:solidFill>
-                <a:latin typeface="Courier New" pitchFamily="34" charset="0"/>
-                <a:ea typeface="Courier New" pitchFamily="34" charset="-122"/>
-                <a:cs typeface="Courier New" pitchFamily="34" charset="-120"/>
-              </a:rPr>
-              <a:t>i_carrier_id</a:t>
+                  <a:srgbClr val="569CD6"/>
+                </a:solidFill>
+                <a:latin typeface="Courier New" pitchFamily="34" charset="0"/>
+                <a:ea typeface="Courier New" pitchFamily="34" charset="-122"/>
+                <a:cs typeface="Courier New" pitchFamily="34" charset="-120"/>
+              </a:rPr>
+              <a:t>BOUND</a:t>
+            </a:r>
+            <a:r>
+              <a:rPr lang="en-US" sz="850" dirty="0">
+                <a:solidFill>
+                  <a:srgbClr val="CCCCCC"/>
+                </a:solidFill>
+                <a:latin typeface="Courier New" pitchFamily="34" charset="0"/>
+                <a:ea typeface="Courier New" pitchFamily="34" charset="-122"/>
+                <a:cs typeface="Courier New" pitchFamily="34" charset="-120"/>
+              </a:rPr>
+              <a:t>.</a:t>
             </a:r>
             <a:endParaRPr lang="en-US" sz="850" dirty="0"/>
           </a:p>
@@ -5416,40 +5528,18 @@
                 <a:ea typeface="Courier New" pitchFamily="34" charset="-122"/>
                 <a:cs typeface="Courier New" pitchFamily="34" charset="-120"/>
               </a:rPr>
-              <a:t>                                    </a:t>
-            </a:r>
-            <a:r>
-              <a:rPr lang="en-US" sz="850" dirty="0">
-                <a:solidFill>
-                  <a:srgbClr val="CCCCCC"/>
-                </a:solidFill>
-                <a:latin typeface="Courier New" pitchFamily="34" charset="0"/>
-                <a:ea typeface="Courier New" pitchFamily="34" charset="-122"/>
-                <a:cs typeface="Courier New" pitchFamily="34" charset="-120"/>
-              </a:rPr>
-              <a:t>table_line-</a:t>
-            </a:r>
-            <a:r>
-              <a:rPr lang="en-US" sz="850" dirty="0">
-                <a:solidFill>
-                  <a:srgbClr val="CCCCCC"/>
-                </a:solidFill>
-                <a:latin typeface="Courier New" pitchFamily="34" charset="0"/>
-                <a:ea typeface="Courier New" pitchFamily="34" charset="-122"/>
-                <a:cs typeface="Courier New" pitchFamily="34" charset="-120"/>
-              </a:rPr>
-              <a:t>&gt;</a:t>
-            </a:r>
-            <a:r>
-              <a:rPr lang="en-US" sz="850" dirty="0">
-                <a:solidFill>
-                  <a:srgbClr val="CCCCCC"/>
-                </a:solidFill>
-                <a:latin typeface="Courier New" pitchFamily="34" charset="0"/>
-                <a:ea typeface="Courier New" pitchFamily="34" charset="-122"/>
-                <a:cs typeface="Courier New" pitchFamily="34" charset="-120"/>
-              </a:rPr>
-              <a:t>connection_id</a:t>
+              <a:t>      </a:t>
+            </a:r>
+            <a:r>
+              <a:rPr lang="en-US" sz="850" dirty="0">
+                <a:solidFill>
+                  <a:srgbClr val="CCCCCC"/>
+                </a:solidFill>
+                <a:latin typeface="Courier New" pitchFamily="34" charset="0"/>
+                <a:ea typeface="Courier New" pitchFamily="34" charset="-122"/>
+                <a:cs typeface="Courier New" pitchFamily="34" charset="-120"/>
+              </a:rPr>
+              <a:t>r_item</a:t>
             </a:r>
             <a:r>
               <a:rPr lang="en-US" sz="850" dirty="0">
@@ -5487,13 +5577,13 @@
             <a:r>
               <a:rPr lang="en-US" sz="850" dirty="0">
                 <a:solidFill>
-                  <a:srgbClr val="CCCCCC"/>
-                </a:solidFill>
-                <a:latin typeface="Courier New" pitchFamily="34" charset="0"/>
-                <a:ea typeface="Courier New" pitchFamily="34" charset="-122"/>
-                <a:cs typeface="Courier New" pitchFamily="34" charset="-120"/>
-              </a:rPr>
-              <a:t>i_connection_id</a:t>
+                  <a:srgbClr val="569CD6"/>
+                </a:solidFill>
+                <a:latin typeface="Courier New" pitchFamily="34" charset="0"/>
+                <a:ea typeface="Courier New" pitchFamily="34" charset="-122"/>
+                <a:cs typeface="Courier New" pitchFamily="34" charset="-120"/>
+              </a:rPr>
+              <a:t>NEW</a:t>
             </a:r>
             <a:r>
               <a:rPr lang="en-US" sz="850" dirty="0">
@@ -5515,7 +5605,51 @@
                 <a:ea typeface="Courier New" pitchFamily="34" charset="-122"/>
                 <a:cs typeface="Courier New" pitchFamily="34" charset="-120"/>
               </a:rPr>
-              <a:t>]</a:t>
+              <a:t>#</a:t>
+            </a:r>
+            <a:r>
+              <a:rPr lang="en-US" sz="850" dirty="0">
+                <a:solidFill>
+                  <a:srgbClr val="CCCCCC"/>
+                </a:solidFill>
+                <a:latin typeface="Courier New" pitchFamily="34" charset="0"/>
+                <a:ea typeface="Courier New" pitchFamily="34" charset="-122"/>
+                <a:cs typeface="Courier New" pitchFamily="34" charset="-120"/>
+              </a:rPr>
+              <a:t>(</a:t>
+            </a:r>
+            <a:r>
+              <a:rPr lang="en-US" sz="850" dirty="0">
+                <a:solidFill>
+                  <a:srgbClr val="CCCCCC"/>
+                </a:solidFill>
+                <a:latin typeface="Courier New" pitchFamily="34" charset="0"/>
+                <a:ea typeface="Courier New" pitchFamily="34" charset="-122"/>
+                <a:cs typeface="Courier New" pitchFamily="34" charset="-120"/>
+              </a:rPr>
+              <a:t> </a:t>
+            </a:r>
+            <a:r>
+              <a:rPr lang="en-US" sz="850" dirty="0">
+                <a:solidFill>
+                  <a:srgbClr val="CCCCCC"/>
+                </a:solidFill>
+                <a:latin typeface="Courier New" pitchFamily="34" charset="0"/>
+                <a:ea typeface="Courier New" pitchFamily="34" charset="-122"/>
+                <a:cs typeface="Courier New" pitchFamily="34" charset="-120"/>
+              </a:rPr>
+              <a:t>)</a:t>
+            </a:r>
+            <a:r>
+              <a:rPr lang="en-US" sz="850" dirty="0">
+                <a:solidFill>
+                  <a:srgbClr val="CCCCCC"/>
+                </a:solidFill>
+                <a:latin typeface="Courier New" pitchFamily="34" charset="0"/>
+                <a:ea typeface="Courier New" pitchFamily="34" charset="-122"/>
+                <a:cs typeface="Courier New" pitchFamily="34" charset="-120"/>
+              </a:rPr>
+              <a:t>.</a:t>
             </a:r>
             <a:endParaRPr lang="en-US" sz="850" dirty="0"/>
           </a:p>
@@ -5535,18 +5669,40 @@
                 <a:ea typeface="Courier New" pitchFamily="34" charset="-122"/>
                 <a:cs typeface="Courier New" pitchFamily="34" charset="-120"/>
               </a:rPr>
-              <a:t>                            </a:t>
-            </a:r>
-            <a:r>
-              <a:rPr lang="en-US" sz="850" dirty="0">
-                <a:solidFill>
-                  <a:srgbClr val="569CD6"/>
-                </a:solidFill>
-                <a:latin typeface="Courier New" pitchFamily="34" charset="0"/>
-                <a:ea typeface="Courier New" pitchFamily="34" charset="-122"/>
-                <a:cs typeface="Courier New" pitchFamily="34" charset="-120"/>
-              </a:rPr>
-              <a:t>OPTIONAL</a:t>
+              <a:t>      </a:t>
+            </a:r>
+            <a:r>
+              <a:rPr lang="en-US" sz="850" dirty="0">
+                <a:solidFill>
+                  <a:srgbClr val="CCCCCC"/>
+                </a:solidFill>
+                <a:latin typeface="Courier New" pitchFamily="34" charset="0"/>
+                <a:ea typeface="Courier New" pitchFamily="34" charset="-122"/>
+                <a:cs typeface="Courier New" pitchFamily="34" charset="-120"/>
+              </a:rPr>
+              <a:t>r_item-</a:t>
+            </a:r>
+            <a:r>
+              <a:rPr lang="en-US" sz="850" dirty="0">
+                <a:solidFill>
+                  <a:srgbClr val="CCCCCC"/>
+                </a:solidFill>
+                <a:latin typeface="Courier New" pitchFamily="34" charset="0"/>
+                <a:ea typeface="Courier New" pitchFamily="34" charset="-122"/>
+                <a:cs typeface="Courier New" pitchFamily="34" charset="-120"/>
+              </a:rPr>
+              <a:t>&gt;</a:t>
+            </a:r>
+            <a:r>
+              <a:rPr lang="en-US" sz="850" dirty="0">
+                <a:solidFill>
+                  <a:srgbClr val="CCCCCC"/>
+                </a:solidFill>
+                <a:latin typeface="Courier New" pitchFamily="34" charset="0"/>
+                <a:ea typeface="Courier New" pitchFamily="34" charset="-122"/>
+                <a:cs typeface="Courier New" pitchFamily="34" charset="-120"/>
+              </a:rPr>
+              <a:t>sku</a:t>
             </a:r>
             <a:r>
               <a:rPr lang="en-US" sz="850" dirty="0">
@@ -5568,7 +5724,29 @@
                 <a:ea typeface="Courier New" pitchFamily="34" charset="-122"/>
                 <a:cs typeface="Courier New" pitchFamily="34" charset="-120"/>
               </a:rPr>
-              <a:t>)</a:t>
+              <a:t>=</a:t>
+            </a:r>
+            <a:r>
+              <a:rPr lang="en-US" sz="850" dirty="0">
+                <a:solidFill>
+                  <a:srgbClr val="CCCCCC"/>
+                </a:solidFill>
+                <a:latin typeface="Courier New" pitchFamily="34" charset="0"/>
+                <a:ea typeface="Courier New" pitchFamily="34" charset="-122"/>
+                <a:cs typeface="Courier New" pitchFamily="34" charset="-120"/>
+              </a:rPr>
+              <a:t> </a:t>
+            </a:r>
+            <a:r>
+              <a:rPr lang="en-US" sz="850" dirty="0">
+                <a:solidFill>
+                  <a:srgbClr val="CCCCCC"/>
+                </a:solidFill>
+                <a:latin typeface="Courier New" pitchFamily="34" charset="0"/>
+                <a:ea typeface="Courier New" pitchFamily="34" charset="-122"/>
+                <a:cs typeface="Courier New" pitchFamily="34" charset="-120"/>
+              </a:rPr>
+              <a:t>i_sku</a:t>
             </a:r>
             <a:r>
               <a:rPr lang="en-US" sz="850" dirty="0">
@@ -5599,7 +5777,7 @@
                 <a:ea typeface="Courier New" pitchFamily="34" charset="-122"/>
                 <a:cs typeface="Courier New" pitchFamily="34" charset="-120"/>
               </a:rPr>
-              <a:t>    </a:t>
+              <a:t>      </a:t>
             </a:r>
             <a:r>
               <a:rPr lang="en-US" sz="850" dirty="0">
@@ -5610,7 +5788,7 @@
                 <a:ea typeface="Courier New" pitchFamily="34" charset="-122"/>
                 <a:cs typeface="Courier New" pitchFamily="34" charset="-120"/>
               </a:rPr>
-              <a:t>IF</a:t>
+              <a:t>SELECT</a:t>
             </a:r>
             <a:r>
               <a:rPr lang="en-US" sz="850" dirty="0">
@@ -5626,13 +5804,13 @@
             <a:r>
               <a:rPr lang="en-US" sz="850" dirty="0">
                 <a:solidFill>
-                  <a:srgbClr val="CCCCCC"/>
-                </a:solidFill>
-                <a:latin typeface="Courier New" pitchFamily="34" charset="0"/>
-                <a:ea typeface="Courier New" pitchFamily="34" charset="-122"/>
-                <a:cs typeface="Courier New" pitchFamily="34" charset="-120"/>
-              </a:rPr>
-              <a:t>r_connection</a:t>
+                  <a:srgbClr val="569CD6"/>
+                </a:solidFill>
+                <a:latin typeface="Courier New" pitchFamily="34" charset="0"/>
+                <a:ea typeface="Courier New" pitchFamily="34" charset="-122"/>
+                <a:cs typeface="Courier New" pitchFamily="34" charset="-120"/>
+              </a:rPr>
+              <a:t>SINGLE</a:t>
             </a:r>
             <a:r>
               <a:rPr lang="en-US" sz="850" dirty="0">
@@ -5654,7 +5832,7 @@
                 <a:ea typeface="Courier New" pitchFamily="34" charset="-122"/>
                 <a:cs typeface="Courier New" pitchFamily="34" charset="-120"/>
               </a:rPr>
-              <a:t>IS</a:t>
+              <a:t>FROM</a:t>
             </a:r>
             <a:r>
               <a:rPr lang="en-US" sz="850" dirty="0">
@@ -5670,13 +5848,35 @@
             <a:r>
               <a:rPr lang="en-US" sz="850" dirty="0">
                 <a:solidFill>
+                  <a:srgbClr val="CCCCCC"/>
+                </a:solidFill>
+                <a:latin typeface="Courier New" pitchFamily="34" charset="0"/>
+                <a:ea typeface="Courier New" pitchFamily="34" charset="-122"/>
+                <a:cs typeface="Courier New" pitchFamily="34" charset="-120"/>
+              </a:rPr>
+              <a:t>zr_pc_item</a:t>
+            </a:r>
+            <a:r>
+              <a:rPr lang="en-US" sz="850" dirty="0">
+                <a:solidFill>
+                  <a:srgbClr val="CCCCCC"/>
+                </a:solidFill>
+                <a:latin typeface="Courier New" pitchFamily="34" charset="0"/>
+                <a:ea typeface="Courier New" pitchFamily="34" charset="-122"/>
+                <a:cs typeface="Courier New" pitchFamily="34" charset="-120"/>
+              </a:rPr>
+              <a:t> </a:t>
+            </a:r>
+            <a:r>
+              <a:rPr lang="en-US" sz="850" dirty="0">
+                <a:solidFill>
                   <a:srgbClr val="569CD6"/>
                 </a:solidFill>
                 <a:latin typeface="Courier New" pitchFamily="34" charset="0"/>
                 <a:ea typeface="Courier New" pitchFamily="34" charset="-122"/>
                 <a:cs typeface="Courier New" pitchFamily="34" charset="-120"/>
               </a:rPr>
-              <a:t>NOT</a:t>
+              <a:t>FIELDS</a:t>
             </a:r>
             <a:r>
               <a:rPr lang="en-US" sz="850" dirty="0">
@@ -5692,24 +5892,13 @@
             <a:r>
               <a:rPr lang="en-US" sz="850" dirty="0">
                 <a:solidFill>
-                  <a:srgbClr val="569CD6"/>
-                </a:solidFill>
-                <a:latin typeface="Courier New" pitchFamily="34" charset="0"/>
-                <a:ea typeface="Courier New" pitchFamily="34" charset="-122"/>
-                <a:cs typeface="Courier New" pitchFamily="34" charset="-120"/>
-              </a:rPr>
-              <a:t>BOUND</a:t>
-            </a:r>
-            <a:r>
-              <a:rPr lang="en-US" sz="850" dirty="0">
-                <a:solidFill>
-                  <a:srgbClr val="CCCCCC"/>
-                </a:solidFill>
-                <a:latin typeface="Courier New" pitchFamily="34" charset="0"/>
-                <a:ea typeface="Courier New" pitchFamily="34" charset="-122"/>
-                <a:cs typeface="Courier New" pitchFamily="34" charset="-120"/>
-              </a:rPr>
-              <a:t>.</a:t>
+                  <a:srgbClr val="CCCCCC"/>
+                </a:solidFill>
+                <a:latin typeface="Courier New" pitchFamily="34" charset="0"/>
+                <a:ea typeface="Courier New" pitchFamily="34" charset="-122"/>
+                <a:cs typeface="Courier New" pitchFamily="34" charset="-120"/>
+              </a:rPr>
+              <a:t>Nome</a:t>
             </a:r>
             <a:endParaRPr lang="en-US" sz="850" dirty="0"/>
           </a:p>
@@ -5729,18 +5918,18 @@
                 <a:ea typeface="Courier New" pitchFamily="34" charset="-122"/>
                 <a:cs typeface="Courier New" pitchFamily="34" charset="-120"/>
               </a:rPr>
-              <a:t>      </a:t>
-            </a:r>
-            <a:r>
-              <a:rPr lang="en-US" sz="850" dirty="0">
-                <a:solidFill>
-                  <a:srgbClr val="CCCCCC"/>
-                </a:solidFill>
-                <a:latin typeface="Courier New" pitchFamily="34" charset="0"/>
-                <a:ea typeface="Courier New" pitchFamily="34" charset="-122"/>
-                <a:cs typeface="Courier New" pitchFamily="34" charset="-120"/>
-              </a:rPr>
-              <a:t>r_connection</a:t>
+              <a:t>        </a:t>
+            </a:r>
+            <a:r>
+              <a:rPr lang="en-US" sz="850" dirty="0">
+                <a:solidFill>
+                  <a:srgbClr val="569CD6"/>
+                </a:solidFill>
+                <a:latin typeface="Courier New" pitchFamily="34" charset="0"/>
+                <a:ea typeface="Courier New" pitchFamily="34" charset="-122"/>
+                <a:cs typeface="Courier New" pitchFamily="34" charset="-120"/>
+              </a:rPr>
+              <a:t>WHERE</a:t>
             </a:r>
             <a:r>
               <a:rPr lang="en-US" sz="850" dirty="0">
@@ -5762,6 +5951,28 @@
                 <a:ea typeface="Courier New" pitchFamily="34" charset="-122"/>
                 <a:cs typeface="Courier New" pitchFamily="34" charset="-120"/>
               </a:rPr>
+              <a:t>Sku</a:t>
+            </a:r>
+            <a:r>
+              <a:rPr lang="en-US" sz="850" dirty="0">
+                <a:solidFill>
+                  <a:srgbClr val="CCCCCC"/>
+                </a:solidFill>
+                <a:latin typeface="Courier New" pitchFamily="34" charset="0"/>
+                <a:ea typeface="Courier New" pitchFamily="34" charset="-122"/>
+                <a:cs typeface="Courier New" pitchFamily="34" charset="-120"/>
+              </a:rPr>
+              <a:t> </a:t>
+            </a:r>
+            <a:r>
+              <a:rPr lang="en-US" sz="850" dirty="0">
+                <a:solidFill>
+                  <a:srgbClr val="CCCCCC"/>
+                </a:solidFill>
+                <a:latin typeface="Courier New" pitchFamily="34" charset="0"/>
+                <a:ea typeface="Courier New" pitchFamily="34" charset="-122"/>
+                <a:cs typeface="Courier New" pitchFamily="34" charset="-120"/>
+              </a:rPr>
               <a:t>=</a:t>
             </a:r>
             <a:r>
@@ -5778,79 +5989,24 @@
             <a:r>
               <a:rPr lang="en-US" sz="850" dirty="0">
                 <a:solidFill>
-                  <a:srgbClr val="569CD6"/>
-                </a:solidFill>
-                <a:latin typeface="Courier New" pitchFamily="34" charset="0"/>
-                <a:ea typeface="Courier New" pitchFamily="34" charset="-122"/>
-                <a:cs typeface="Courier New" pitchFamily="34" charset="-120"/>
-              </a:rPr>
-              <a:t>NEW</a:t>
-            </a:r>
-            <a:r>
-              <a:rPr lang="en-US" sz="850" dirty="0">
-                <a:solidFill>
-                  <a:srgbClr val="CCCCCC"/>
-                </a:solidFill>
-                <a:latin typeface="Courier New" pitchFamily="34" charset="0"/>
-                <a:ea typeface="Courier New" pitchFamily="34" charset="-122"/>
-                <a:cs typeface="Courier New" pitchFamily="34" charset="-120"/>
-              </a:rPr>
-              <a:t> </a:t>
-            </a:r>
-            <a:r>
-              <a:rPr lang="en-US" sz="850" dirty="0">
-                <a:solidFill>
-                  <a:srgbClr val="CCCCCC"/>
-                </a:solidFill>
-                <a:latin typeface="Courier New" pitchFamily="34" charset="0"/>
-                <a:ea typeface="Courier New" pitchFamily="34" charset="-122"/>
-                <a:cs typeface="Courier New" pitchFamily="34" charset="-120"/>
-              </a:rPr>
-              <a:t>#</a:t>
-            </a:r>
-            <a:r>
-              <a:rPr lang="en-US" sz="850" dirty="0">
-                <a:solidFill>
-                  <a:srgbClr val="CCCCCC"/>
-                </a:solidFill>
-                <a:latin typeface="Courier New" pitchFamily="34" charset="0"/>
-                <a:ea typeface="Courier New" pitchFamily="34" charset="-122"/>
-                <a:cs typeface="Courier New" pitchFamily="34" charset="-120"/>
-              </a:rPr>
-              <a:t>(</a:t>
-            </a:r>
-            <a:r>
-              <a:rPr lang="en-US" sz="850" dirty="0">
-                <a:solidFill>
-                  <a:srgbClr val="CCCCCC"/>
-                </a:solidFill>
-                <a:latin typeface="Courier New" pitchFamily="34" charset="0"/>
-                <a:ea typeface="Courier New" pitchFamily="34" charset="-122"/>
-                <a:cs typeface="Courier New" pitchFamily="34" charset="-120"/>
-              </a:rPr>
-              <a:t> </a:t>
-            </a:r>
-            <a:r>
-              <a:rPr lang="en-US" sz="850" dirty="0">
-                <a:solidFill>
-                  <a:srgbClr val="CCCCCC"/>
-                </a:solidFill>
-                <a:latin typeface="Courier New" pitchFamily="34" charset="0"/>
-                <a:ea typeface="Courier New" pitchFamily="34" charset="-122"/>
-                <a:cs typeface="Courier New" pitchFamily="34" charset="-120"/>
-              </a:rPr>
-              <a:t>)</a:t>
-            </a:r>
-            <a:r>
-              <a:rPr lang="en-US" sz="850" dirty="0">
-                <a:solidFill>
-                  <a:srgbClr val="CCCCCC"/>
-                </a:solidFill>
-                <a:latin typeface="Courier New" pitchFamily="34" charset="0"/>
-                <a:ea typeface="Courier New" pitchFamily="34" charset="-122"/>
-                <a:cs typeface="Courier New" pitchFamily="34" charset="-120"/>
-              </a:rPr>
-              <a:t>.</a:t>
+                  <a:srgbClr val="CCCCCC"/>
+                </a:solidFill>
+                <a:latin typeface="Courier New" pitchFamily="34" charset="0"/>
+                <a:ea typeface="Courier New" pitchFamily="34" charset="-122"/>
+                <a:cs typeface="Courier New" pitchFamily="34" charset="-120"/>
+              </a:rPr>
+              <a:t>@</a:t>
+            </a:r>
+            <a:r>
+              <a:rPr lang="en-US" sz="850" dirty="0">
+                <a:solidFill>
+                  <a:srgbClr val="CCCCCC"/>
+                </a:solidFill>
+                <a:latin typeface="Courier New" pitchFamily="34" charset="0"/>
+                <a:ea typeface="Courier New" pitchFamily="34" charset="-122"/>
+                <a:cs typeface="Courier New" pitchFamily="34" charset="-120"/>
+              </a:rPr>
+              <a:t>i_sku</a:t>
             </a:r>
             <a:endParaRPr lang="en-US" sz="850" dirty="0"/>
           </a:p>
@@ -5870,18 +6026,51 @@
                 <a:ea typeface="Courier New" pitchFamily="34" charset="-122"/>
                 <a:cs typeface="Courier New" pitchFamily="34" charset="-120"/>
               </a:rPr>
-              <a:t>      </a:t>
-            </a:r>
-            <a:r>
-              <a:rPr lang="en-US" sz="850" dirty="0">
-                <a:solidFill>
-                  <a:srgbClr val="CCCCCC"/>
-                </a:solidFill>
-                <a:latin typeface="Courier New" pitchFamily="34" charset="0"/>
-                <a:ea typeface="Courier New" pitchFamily="34" charset="-122"/>
-                <a:cs typeface="Courier New" pitchFamily="34" charset="-120"/>
-              </a:rPr>
-              <a:t>r_connection-</a:t>
+              <a:t>        </a:t>
+            </a:r>
+            <a:r>
+              <a:rPr lang="en-US" sz="850" dirty="0">
+                <a:solidFill>
+                  <a:srgbClr val="569CD6"/>
+                </a:solidFill>
+                <a:latin typeface="Courier New" pitchFamily="34" charset="0"/>
+                <a:ea typeface="Courier New" pitchFamily="34" charset="-122"/>
+                <a:cs typeface="Courier New" pitchFamily="34" charset="-120"/>
+              </a:rPr>
+              <a:t>INTO</a:t>
+            </a:r>
+            <a:r>
+              <a:rPr lang="en-US" sz="850" dirty="0">
+                <a:solidFill>
+                  <a:srgbClr val="CCCCCC"/>
+                </a:solidFill>
+                <a:latin typeface="Courier New" pitchFamily="34" charset="0"/>
+                <a:ea typeface="Courier New" pitchFamily="34" charset="-122"/>
+                <a:cs typeface="Courier New" pitchFamily="34" charset="-120"/>
+              </a:rPr>
+              <a:t> </a:t>
+            </a:r>
+            <a:r>
+              <a:rPr lang="en-US" sz="850" dirty="0">
+                <a:solidFill>
+                  <a:srgbClr val="CCCCCC"/>
+                </a:solidFill>
+                <a:latin typeface="Courier New" pitchFamily="34" charset="0"/>
+                <a:ea typeface="Courier New" pitchFamily="34" charset="-122"/>
+                <a:cs typeface="Courier New" pitchFamily="34" charset="-120"/>
+              </a:rPr>
+              <a:t>@</a:t>
+            </a:r>
+            <a:r>
+              <a:rPr lang="en-US" sz="850" dirty="0">
+                <a:solidFill>
+                  <a:srgbClr val="CCCCCC"/>
+                </a:solidFill>
+                <a:latin typeface="Courier New" pitchFamily="34" charset="0"/>
+                <a:ea typeface="Courier New" pitchFamily="34" charset="-122"/>
+                <a:cs typeface="Courier New" pitchFamily="34" charset="-120"/>
+              </a:rPr>
+              <a:t>r_item-</a:t>
             </a:r>
             <a:r>
               <a:rPr lang="en-US" sz="850" dirty="0">
@@ -5903,51 +6092,7 @@
                 <a:ea typeface="Courier New" pitchFamily="34" charset="-122"/>
                 <a:cs typeface="Courier New" pitchFamily="34" charset="-120"/>
               </a:rPr>
-              <a:t>carrier_id</a:t>
-            </a:r>
-            <a:r>
-              <a:rPr lang="en-US" sz="850" dirty="0">
-                <a:solidFill>
-                  <a:srgbClr val="CCCCCC"/>
-                </a:solidFill>
-                <a:latin typeface="Courier New" pitchFamily="34" charset="0"/>
-                <a:ea typeface="Courier New" pitchFamily="34" charset="-122"/>
-                <a:cs typeface="Courier New" pitchFamily="34" charset="-120"/>
-              </a:rPr>
-              <a:t>    </a:t>
-            </a:r>
-            <a:r>
-              <a:rPr lang="en-US" sz="850" dirty="0">
-                <a:solidFill>
-                  <a:srgbClr val="CCCCCC"/>
-                </a:solidFill>
-                <a:latin typeface="Courier New" pitchFamily="34" charset="0"/>
-                <a:ea typeface="Courier New" pitchFamily="34" charset="-122"/>
-                <a:cs typeface="Courier New" pitchFamily="34" charset="-120"/>
-              </a:rPr>
-              <a:t>=</a:t>
-            </a:r>
-            <a:r>
-              <a:rPr lang="en-US" sz="850" dirty="0">
-                <a:solidFill>
-                  <a:srgbClr val="CCCCCC"/>
-                </a:solidFill>
-                <a:latin typeface="Courier New" pitchFamily="34" charset="0"/>
-                <a:ea typeface="Courier New" pitchFamily="34" charset="-122"/>
-                <a:cs typeface="Courier New" pitchFamily="34" charset="-120"/>
-              </a:rPr>
-              <a:t> </a:t>
-            </a:r>
-            <a:r>
-              <a:rPr lang="en-US" sz="850" dirty="0">
-                <a:solidFill>
-                  <a:srgbClr val="CCCCCC"/>
-                </a:solidFill>
-                <a:latin typeface="Courier New" pitchFamily="34" charset="0"/>
-                <a:ea typeface="Courier New" pitchFamily="34" charset="-122"/>
-                <a:cs typeface="Courier New" pitchFamily="34" charset="-120"/>
-              </a:rPr>
-              <a:t>i_carrier_id</a:t>
+              <a:t>nome</a:t>
             </a:r>
             <a:r>
               <a:rPr lang="en-US" sz="850" dirty="0">
@@ -5983,35 +6128,13 @@
             <a:r>
               <a:rPr lang="en-US" sz="850" dirty="0">
                 <a:solidFill>
-                  <a:srgbClr val="CCCCCC"/>
-                </a:solidFill>
-                <a:latin typeface="Courier New" pitchFamily="34" charset="0"/>
-                <a:ea typeface="Courier New" pitchFamily="34" charset="-122"/>
-                <a:cs typeface="Courier New" pitchFamily="34" charset="-120"/>
-              </a:rPr>
-              <a:t>r_connection-</a:t>
-            </a:r>
-            <a:r>
-              <a:rPr lang="en-US" sz="850" dirty="0">
-                <a:solidFill>
-                  <a:srgbClr val="CCCCCC"/>
-                </a:solidFill>
-                <a:latin typeface="Courier New" pitchFamily="34" charset="0"/>
-                <a:ea typeface="Courier New" pitchFamily="34" charset="-122"/>
-                <a:cs typeface="Courier New" pitchFamily="34" charset="-120"/>
-              </a:rPr>
-              <a:t>&gt;</a:t>
-            </a:r>
-            <a:r>
-              <a:rPr lang="en-US" sz="850" dirty="0">
-                <a:solidFill>
-                  <a:srgbClr val="CCCCCC"/>
-                </a:solidFill>
-                <a:latin typeface="Courier New" pitchFamily="34" charset="0"/>
-                <a:ea typeface="Courier New" pitchFamily="34" charset="-122"/>
-                <a:cs typeface="Courier New" pitchFamily="34" charset="-120"/>
-              </a:rPr>
-              <a:t>connection_id</a:t>
+                  <a:srgbClr val="569CD6"/>
+                </a:solidFill>
+                <a:latin typeface="Courier New" pitchFamily="34" charset="0"/>
+                <a:ea typeface="Courier New" pitchFamily="34" charset="-122"/>
+                <a:cs typeface="Courier New" pitchFamily="34" charset="-120"/>
+              </a:rPr>
+              <a:t>APPEND</a:t>
             </a:r>
             <a:r>
               <a:rPr lang="en-US" sz="850" dirty="0">
@@ -6033,93 +6156,7 @@
                 <a:ea typeface="Courier New" pitchFamily="34" charset="-122"/>
                 <a:cs typeface="Courier New" pitchFamily="34" charset="-120"/>
               </a:rPr>
-              <a:t>=</a:t>
-            </a:r>
-            <a:r>
-              <a:rPr lang="en-US" sz="850" dirty="0">
-                <a:solidFill>
-                  <a:srgbClr val="CCCCCC"/>
-                </a:solidFill>
-                <a:latin typeface="Courier New" pitchFamily="34" charset="0"/>
-                <a:ea typeface="Courier New" pitchFamily="34" charset="-122"/>
-                <a:cs typeface="Courier New" pitchFamily="34" charset="-120"/>
-              </a:rPr>
-              <a:t> </a:t>
-            </a:r>
-            <a:r>
-              <a:rPr lang="en-US" sz="850" dirty="0">
-                <a:solidFill>
-                  <a:srgbClr val="CCCCCC"/>
-                </a:solidFill>
-                <a:latin typeface="Courier New" pitchFamily="34" charset="0"/>
-                <a:ea typeface="Courier New" pitchFamily="34" charset="-122"/>
-                <a:cs typeface="Courier New" pitchFamily="34" charset="-120"/>
-              </a:rPr>
-              <a:t>i_connection_id</a:t>
-            </a:r>
-            <a:r>
-              <a:rPr lang="en-US" sz="850" dirty="0">
-                <a:solidFill>
-                  <a:srgbClr val="CCCCCC"/>
-                </a:solidFill>
-                <a:latin typeface="Courier New" pitchFamily="34" charset="0"/>
-                <a:ea typeface="Courier New" pitchFamily="34" charset="-122"/>
-                <a:cs typeface="Courier New" pitchFamily="34" charset="-120"/>
-              </a:rPr>
-              <a:t>.</a:t>
-            </a:r>
-            <a:endParaRPr lang="en-US" sz="850" dirty="0"/>
-          </a:p>
-          <a:p>
-            <a:pPr indent="0" marL="0">
-              <a:lnSpc>
-                <a:spcPct val="105000"/>
-              </a:lnSpc>
-              <a:buNone/>
-            </a:pPr>
-            <a:r>
-              <a:rPr lang="en-US" sz="850" dirty="0">
-                <a:solidFill>
-                  <a:srgbClr val="CCCCCC"/>
-                </a:solidFill>
-                <a:latin typeface="Courier New" pitchFamily="34" charset="0"/>
-                <a:ea typeface="Courier New" pitchFamily="34" charset="-122"/>
-                <a:cs typeface="Courier New" pitchFamily="34" charset="-120"/>
-              </a:rPr>
-              <a:t>      </a:t>
-            </a:r>
-            <a:r>
-              <a:rPr lang="en-US" sz="850" dirty="0">
-                <a:solidFill>
-                  <a:srgbClr val="569CD6"/>
-                </a:solidFill>
-                <a:latin typeface="Courier New" pitchFamily="34" charset="0"/>
-                <a:ea typeface="Courier New" pitchFamily="34" charset="-122"/>
-                <a:cs typeface="Courier New" pitchFamily="34" charset="-120"/>
-              </a:rPr>
-              <a:t>APPEND</a:t>
-            </a:r>
-            <a:r>
-              <a:rPr lang="en-US" sz="850" dirty="0">
-                <a:solidFill>
-                  <a:srgbClr val="CCCCCC"/>
-                </a:solidFill>
-                <a:latin typeface="Courier New" pitchFamily="34" charset="0"/>
-                <a:ea typeface="Courier New" pitchFamily="34" charset="-122"/>
-                <a:cs typeface="Courier New" pitchFamily="34" charset="-120"/>
-              </a:rPr>
-              <a:t> </a:t>
-            </a:r>
-            <a:r>
-              <a:rPr lang="en-US" sz="850" dirty="0">
-                <a:solidFill>
-                  <a:srgbClr val="CCCCCC"/>
-                </a:solidFill>
-                <a:latin typeface="Courier New" pitchFamily="34" charset="0"/>
-                <a:ea typeface="Courier New" pitchFamily="34" charset="-122"/>
-                <a:cs typeface="Courier New" pitchFamily="34" charset="-120"/>
-              </a:rPr>
-              <a:t>r_connection</a:t>
+              <a:t>r_item</a:t>
             </a:r>
             <a:r>
               <a:rPr lang="en-US" sz="850" dirty="0">
@@ -6664,7 +6701,26 @@
                   <a:srgbClr val="556B82"/>
                 </a:solidFill>
               </a:rPr>
-              <a:t>Devolve a instância já existente: uma por conexão.</a:t>
+              <a:t>Devolve a instância já existente, uma por SKU, como o cache de CEPs de </a:t>
+            </a:r>
+            <a:r>
+              <a:rPr lang="en-US" sz="1050" dirty="0">
+                <a:solidFill>
+                  <a:srgbClr val="0064D9"/>
+                </a:solidFill>
+                <a:latin typeface="Courier New" pitchFamily="34" charset="0"/>
+                <a:ea typeface="Courier New" pitchFamily="34" charset="-122"/>
+                <a:cs typeface="Courier New" pitchFamily="34" charset="-120"/>
+              </a:rPr>
+              <a:t>ZCL_PC_VIACEP</a:t>
+            </a:r>
+            <a:r>
+              <a:rPr lang="en-US" sz="1050" dirty="0">
+                <a:solidFill>
+                  <a:srgbClr val="556B82"/>
+                </a:solidFill>
+              </a:rPr>
+              <a:t>.</a:t>
             </a:r>
             <a:endParaRPr lang="en-US" sz="1400" dirty="0"/>
           </a:p>
@@ -6915,7 +6971,7 @@
                   <a:srgbClr val="FFFFFF"/>
                 </a:solidFill>
               </a:rPr>
-              <a:t>O que aprendemos na aula 04.07</a:t>
+              <a:t>O que aprendemos na aula 02.07</a:t>
             </a:r>
             <a:endParaRPr lang="en-US" sz="3200" dirty="0"/>
           </a:p>
@@ -7464,7 +7520,7 @@
                   <a:srgbClr val="89D1FF"/>
                 </a:solidFill>
               </a:rPr>
-              <a:t>Próxima aula · 04.08  </a:t>
+              <a:t>Próxima aula · 02.08  </a:t>
             </a:r>
             <a:r>
               <a:rPr lang="en-US" sz="1500" dirty="0">
@@ -7566,7 +7622,7 @@
         </p:blipFill>
         <p:spPr>
           <a:xfrm>
-            <a:off x="822960" y="3886200"/>
+            <a:off x="6355080" y="2926080"/>
             <a:ext cx="256032" cy="256032"/>
           </a:xfrm>
           <a:prstGeom prst="rect">
@@ -7590,7 +7646,7 @@
         </p:blipFill>
         <p:spPr>
           <a:xfrm>
-            <a:off x="6355080" y="2926080"/>
+            <a:off x="822960" y="3886200"/>
             <a:ext cx="256032" cy="256032"/>
           </a:xfrm>
           <a:prstGeom prst="rect">
@@ -7741,7 +7797,7 @@
                   <a:srgbClr val="1D2D3E"/>
                 </a:solidFill>
               </a:rPr>
-              <a:t>Módulo 04 em 9 aulas: ABAP intermediário</a:t>
+              <a:t>Módulo 02 em 9 aulas: ABAP intermediário</a:t>
             </a:r>
             <a:endParaRPr lang="en-US" sz="2800" dirty="0"/>
           </a:p>
@@ -9323,7 +9379,26 @@
                   <a:srgbClr val="1D2D3E"/>
                 </a:solidFill>
               </a:rPr>
-              <a:t>modelamos aviões de passageiros e de carga com herança, unificamos parceiros de negócio com uma interface e centralizamos a criação de conexões.</a:t>
+              <a:t>modelamos formas de pagamento com herança, vemos como a interface </a:t>
+            </a:r>
+            <a:r>
+              <a:rPr lang="en-US" sz="1200" dirty="0">
+                <a:solidFill>
+                  <a:srgbClr val="0064D9"/>
+                </a:solidFill>
+                <a:latin typeface="Courier New" pitchFamily="34" charset="0"/>
+                <a:ea typeface="Courier New" pitchFamily="34" charset="-122"/>
+                <a:cs typeface="Courier New" pitchFamily="34" charset="-120"/>
+              </a:rPr>
+              <a:t>ZIF_PC_VIACEP</a:t>
+            </a:r>
+            <a:r>
+              <a:rPr lang="en-US" sz="1200" dirty="0">
+                <a:solidFill>
+                  <a:srgbClr val="1D2D3E"/>
+                </a:solidFill>
+              </a:rPr>
+              <a:t> aceita duas implementações da consulta de CEP e centralizamos a criação de itens com um factory method.</a:t>
             </a:r>
             <a:endParaRPr lang="en-US" sz="1400" dirty="0"/>
           </a:p>
@@ -9345,7 +9420,7 @@
         </p:blipFill>
         <p:spPr>
           <a:xfrm>
-            <a:off x="2072579" y="1847088"/>
+            <a:off x="6583497" y="1847088"/>
             <a:ext cx="347472" cy="347472"/>
           </a:xfrm>
           <a:prstGeom prst="rect">
@@ -9369,7 +9444,7 @@
         </p:blipFill>
         <p:spPr>
           <a:xfrm>
-            <a:off x="4328038" y="1847088"/>
+            <a:off x="2072579" y="1847088"/>
             <a:ext cx="347472" cy="347472"/>
           </a:xfrm>
           <a:prstGeom prst="rect">
@@ -9393,7 +9468,7 @@
         </p:blipFill>
         <p:spPr>
           <a:xfrm>
-            <a:off x="6583497" y="1847088"/>
+            <a:off x="4328038" y="1847088"/>
             <a:ext cx="347472" cy="347472"/>
           </a:xfrm>
           <a:prstGeom prst="rect">
@@ -9441,7 +9516,7 @@
         </p:blipFill>
         <p:spPr>
           <a:xfrm>
-            <a:off x="2072579" y="3858768"/>
+            <a:off x="11094415" y="1847088"/>
             <a:ext cx="347472" cy="347472"/>
           </a:xfrm>
           <a:prstGeom prst="rect">
@@ -9465,7 +9540,7 @@
         </p:blipFill>
         <p:spPr>
           <a:xfrm>
-            <a:off x="4328038" y="3858768"/>
+            <a:off x="2072579" y="3858768"/>
             <a:ext cx="347472" cy="347472"/>
           </a:xfrm>
           <a:prstGeom prst="rect">
@@ -9489,7 +9564,7 @@
         </p:blipFill>
         <p:spPr>
           <a:xfrm>
-            <a:off x="11094415" y="1847088"/>
+            <a:off x="6583497" y="3858768"/>
             <a:ext cx="347472" cy="347472"/>
           </a:xfrm>
           <a:prstGeom prst="rect">
@@ -9513,7 +9588,7 @@
         </p:blipFill>
         <p:spPr>
           <a:xfrm>
-            <a:off x="6583497" y="3858768"/>
+            <a:off x="4328038" y="3858768"/>
             <a:ext cx="347472" cy="347472"/>
           </a:xfrm>
           <a:prstGeom prst="rect">
@@ -9537,8 +9612,8 @@
         </p:blipFill>
         <p:spPr>
           <a:xfrm>
-            <a:off x="8838956" y="3858768"/>
-            <a:ext cx="347472" cy="347472"/>
+            <a:off x="749808" y="5751576"/>
+            <a:ext cx="310896" cy="310896"/>
           </a:xfrm>
           <a:prstGeom prst="rect">
             <a:avLst/>
@@ -9561,8 +9636,8 @@
         </p:blipFill>
         <p:spPr>
           <a:xfrm>
-            <a:off x="749808" y="5751576"/>
-            <a:ext cx="310896" cy="310896"/>
+            <a:off x="8838956" y="3858768"/>
+            <a:ext cx="347472" cy="347472"/>
           </a:xfrm>
           <a:prstGeom prst="rect">
             <a:avLst/>
@@ -9861,7 +9936,7 @@
                   <a:srgbClr val="1D2D3E"/>
                 </a:solidFill>
               </a:rPr>
-              <a:t>Um avião de carga </a:t>
+              <a:t>Um pagamento no crédito </a:t>
             </a:r>
             <a:r>
               <a:rPr lang="en-US" sz="1350" b="1" dirty="0">
@@ -9877,7 +9952,7 @@
                   <a:srgbClr val="1D2D3E"/>
                 </a:solidFill>
               </a:rPr>
-              <a:t> avião: herda atributos e métodos</a:t>
+              <a:t> pagamento: herda atributos e métodos</a:t>
             </a:r>
             <a:endParaRPr lang="en-US" sz="1400" dirty="0"/>
           </a:p>
@@ -10081,7 +10156,7 @@
                   <a:srgbClr val="1D2D3E"/>
                 </a:solidFill>
               </a:rPr>
-              <a:t>Locadora e companhia aérea não têm relação, mas ambas </a:t>
+              <a:t>A consulta de CEP do BTP e a do On-Premise não têm relação, mas ambas </a:t>
             </a:r>
             <a:r>
               <a:rPr lang="en-US" sz="1350" b="1" dirty="0">
@@ -10089,7 +10164,26 @@
                   <a:srgbClr val="1D2D3E"/>
                 </a:solidFill>
               </a:rPr>
-              <a:t>são parceiras de negócio</a:t>
+              <a:t>cumprem o contrato</a:t>
+            </a:r>
+            <a:r>
+              <a:rPr lang="en-US" sz="1350" dirty="0">
+                <a:solidFill>
+                  <a:srgbClr val="1D2D3E"/>
+                </a:solidFill>
+              </a:rPr>
+              <a:t> </a:t>
+            </a:r>
+            <a:r>
+              <a:rPr lang="en-US" sz="1350" dirty="0">
+                <a:solidFill>
+                  <a:srgbClr val="0064D9"/>
+                </a:solidFill>
+                <a:latin typeface="Courier New" pitchFamily="34" charset="0"/>
+                <a:ea typeface="Courier New" pitchFamily="34" charset="-122"/>
+                <a:cs typeface="Courier New" pitchFamily="34" charset="-120"/>
+              </a:rPr>
+              <a:t>ZIF_PC_VIACEP</a:t>
             </a:r>
             <a:endParaRPr lang="en-US" sz="1400" dirty="0"/>
           </a:p>
@@ -10213,8 +10307,8 @@
         </p:blipFill>
         <p:spPr>
           <a:xfrm>
-            <a:off x="877824" y="2684907"/>
-            <a:ext cx="256032" cy="256032"/>
+            <a:off x="749808" y="5069205"/>
+            <a:ext cx="310896" cy="310896"/>
           </a:xfrm>
           <a:prstGeom prst="rect">
             <a:avLst/>
@@ -10237,8 +10331,8 @@
         </p:blipFill>
         <p:spPr>
           <a:xfrm>
-            <a:off x="749808" y="5069205"/>
-            <a:ext cx="310896" cy="310896"/>
+            <a:off x="6562192" y="2684907"/>
+            <a:ext cx="256032" cy="256032"/>
           </a:xfrm>
           <a:prstGeom prst="rect">
             <a:avLst/>
@@ -10261,7 +10355,7 @@
         </p:blipFill>
         <p:spPr>
           <a:xfrm>
-            <a:off x="6562192" y="2684907"/>
+            <a:off x="877824" y="2684907"/>
             <a:ext cx="256032" cy="256032"/>
           </a:xfrm>
           <a:prstGeom prst="rect">
@@ -10391,7 +10485,7 @@
                   <a:srgbClr val="89D1FF"/>
                 </a:solidFill>
               </a:rPr>
-              <a:t>AULA 04.07 · SEÇÃO 1</a:t>
+              <a:t>AULA 02.07 · SEÇÃO 1</a:t>
             </a:r>
             <a:endParaRPr lang="en-US" sz="1300" dirty="0"/>
           </a:p>
@@ -10930,7 +11024,7 @@
         <p:spPr>
           <a:xfrm>
             <a:off x="640080" y="1700784"/>
-            <a:ext cx="3008376" cy="292608"/>
+            <a:ext cx="3630168" cy="292608"/>
           </a:xfrm>
           <a:prstGeom prst="rect">
             <a:avLst/>
@@ -10950,7 +11044,7 @@
         <p:spPr>
           <a:xfrm>
             <a:off x="640080" y="1700784"/>
-            <a:ext cx="3008376" cy="27432"/>
+            <a:ext cx="3630168" cy="27432"/>
           </a:xfrm>
           <a:prstGeom prst="rect">
             <a:avLst/>
@@ -10970,7 +11064,7 @@
         <p:spPr>
           <a:xfrm>
             <a:off x="731520" y="1719072"/>
-            <a:ext cx="2825496" cy="274320"/>
+            <a:ext cx="3447288" cy="274320"/>
           </a:xfrm>
           <a:prstGeom prst="rect">
             <a:avLst/>
@@ -10991,7 +11085,7 @@
                   <a:srgbClr val="FFFFFF"/>
                 </a:solidFill>
               </a:rPr>
-              <a:t>zcl_07_planes.clas.locals_imp.abap</a:t>
+              <a:t>zcl_pc_pagamento_demo.clas.locals_imp.abap</a:t>
             </a:r>
             <a:endParaRPr lang="en-US" sz="950" dirty="0"/>
           </a:p>
@@ -11027,7 +11121,7 @@
                   <a:srgbClr val="9DA5B4"/>
                 </a:solidFill>
               </a:rPr>
-              <a:t>ZCL_07_PLANES › Local Types</a:t>
+              <a:t>Exemplo inspirado no pagamento simulado (ZCL_PC_PAGAMENTO_SIM)</a:t>
             </a:r>
             <a:endParaRPr lang="en-US" sz="850" dirty="0"/>
           </a:p>
@@ -11673,7 +11767,7 @@
                 <a:ea typeface="Courier New" pitchFamily="34" charset="-122"/>
                 <a:cs typeface="Courier New" pitchFamily="34" charset="-120"/>
               </a:rPr>
-              <a:t>lcl_plane</a:t>
+              <a:t>lcl_pagamento</a:t>
             </a:r>
             <a:r>
               <a:rPr lang="en-US" sz="800" dirty="0">
@@ -11867,7 +11961,7 @@
                 <a:ea typeface="Courier New" pitchFamily="34" charset="-122"/>
                 <a:cs typeface="Courier New" pitchFamily="34" charset="-120"/>
               </a:rPr>
-              <a:t>i_manufacturer</a:t>
+              <a:t>i_bandeira</a:t>
             </a:r>
             <a:r>
               <a:rPr lang="en-US" sz="800" dirty="0">
@@ -11933,7 +12027,7 @@
                 <a:ea typeface="Courier New" pitchFamily="34" charset="-122"/>
                 <a:cs typeface="Courier New" pitchFamily="34" charset="-120"/>
               </a:rPr>
-              <a:t>i_type</a:t>
+              <a:t>i_ultimos4</a:t>
             </a:r>
             <a:r>
               <a:rPr lang="en-US" sz="800" dirty="0">
@@ -12041,7 +12135,7 @@
                 <a:ea typeface="Courier New" pitchFamily="34" charset="-122"/>
                 <a:cs typeface="Courier New" pitchFamily="34" charset="-120"/>
               </a:rPr>
-              <a:t>get_attributes</a:t>
+              <a:t>get_resumo</a:t>
             </a:r>
             <a:r>
               <a:rPr lang="en-US" sz="800" dirty="0">
@@ -12290,7 +12384,7 @@
                 <a:ea typeface="Courier New" pitchFamily="34" charset="-122"/>
                 <a:cs typeface="Courier New" pitchFamily="34" charset="-120"/>
               </a:rPr>
-              <a:t>manufacturer</a:t>
+              <a:t>bandeira</a:t>
             </a:r>
             <a:r>
               <a:rPr lang="en-US" sz="800" dirty="0">
@@ -12398,18 +12492,18 @@
                 <a:ea typeface="Courier New" pitchFamily="34" charset="-122"/>
                 <a:cs typeface="Courier New" pitchFamily="34" charset="-120"/>
               </a:rPr>
-              <a:t>type</a:t>
-            </a:r>
-            <a:r>
-              <a:rPr lang="en-US" sz="800" dirty="0">
-                <a:solidFill>
-                  <a:srgbClr val="CCCCCC"/>
-                </a:solidFill>
-                <a:latin typeface="Courier New" pitchFamily="34" charset="0"/>
-                <a:ea typeface="Courier New" pitchFamily="34" charset="-122"/>
-                <a:cs typeface="Courier New" pitchFamily="34" charset="-120"/>
-              </a:rPr>
-              <a:t>         </a:t>
+              <a:t>ultimos4</a:t>
+            </a:r>
+            <a:r>
+              <a:rPr lang="en-US" sz="800" dirty="0">
+                <a:solidFill>
+                  <a:srgbClr val="CCCCCC"/>
+                </a:solidFill>
+                <a:latin typeface="Courier New" pitchFamily="34" charset="0"/>
+                <a:ea typeface="Courier New" pitchFamily="34" charset="-122"/>
+                <a:cs typeface="Courier New" pitchFamily="34" charset="-120"/>
+              </a:rPr>
+              <a:t> </a:t>
             </a:r>
             <a:r>
               <a:rPr lang="en-US" sz="800" dirty="0">
@@ -12546,7 +12640,7 @@
                 <a:ea typeface="Courier New" pitchFamily="34" charset="-122"/>
                 <a:cs typeface="Courier New" pitchFamily="34" charset="-120"/>
               </a:rPr>
-              <a:t>lcl_cargo_plane</a:t>
+              <a:t>lcl_pagamento_credito</a:t>
             </a:r>
             <a:r>
               <a:rPr lang="en-US" sz="800" dirty="0">
@@ -12634,7 +12728,7 @@
                 <a:ea typeface="Courier New" pitchFamily="34" charset="-122"/>
                 <a:cs typeface="Courier New" pitchFamily="34" charset="-120"/>
               </a:rPr>
-              <a:t>lcl_plane</a:t>
+              <a:t>lcl_pagamento</a:t>
             </a:r>
             <a:r>
               <a:rPr lang="en-US" sz="800" dirty="0">
@@ -12806,7 +12900,7 @@
                 <a:ea typeface="Courier New" pitchFamily="34" charset="-122"/>
                 <a:cs typeface="Courier New" pitchFamily="34" charset="-120"/>
               </a:rPr>
-              <a:t>i_manufacturer</a:t>
+              <a:t>i_bandeira</a:t>
             </a:r>
             <a:r>
               <a:rPr lang="en-US" sz="800" dirty="0">
@@ -12881,7 +12975,7 @@
                 <a:ea typeface="Courier New" pitchFamily="34" charset="-122"/>
                 <a:cs typeface="Courier New" pitchFamily="34" charset="-120"/>
               </a:rPr>
-              <a:t>i_type</a:t>
+              <a:t>i_ultimos4</a:t>
             </a:r>
             <a:r>
               <a:rPr lang="en-US" sz="800" dirty="0">
@@ -12947,7 +13041,7 @@
                 <a:ea typeface="Courier New" pitchFamily="34" charset="-122"/>
                 <a:cs typeface="Courier New" pitchFamily="34" charset="-120"/>
               </a:rPr>
-              <a:t>i_cargo</a:t>
+              <a:t>i_parcelas</a:t>
             </a:r>
             <a:r>
               <a:rPr lang="en-US" sz="800" dirty="0">
@@ -13055,7 +13149,7 @@
                 <a:ea typeface="Courier New" pitchFamily="34" charset="-122"/>
                 <a:cs typeface="Courier New" pitchFamily="34" charset="-120"/>
               </a:rPr>
-              <a:t>get_attributes</a:t>
+              <a:t>get_resumo</a:t>
             </a:r>
             <a:r>
               <a:rPr lang="en-US" sz="800" dirty="0">
@@ -13205,7 +13299,7 @@
                 <a:ea typeface="Courier New" pitchFamily="34" charset="-122"/>
                 <a:cs typeface="Courier New" pitchFamily="34" charset="-120"/>
               </a:rPr>
-              <a:t>cargo</a:t>
+              <a:t>parcelas</a:t>
             </a:r>
             <a:r>
               <a:rPr lang="en-US" sz="800" dirty="0">
@@ -13353,7 +13447,7 @@
                 <a:ea typeface="Courier New" pitchFamily="34" charset="-122"/>
                 <a:cs typeface="Courier New" pitchFamily="34" charset="-120"/>
               </a:rPr>
-              <a:t>lcl_cargo_plane</a:t>
+              <a:t>lcl_pagamento_credito</a:t>
             </a:r>
             <a:r>
               <a:rPr lang="en-US" sz="800" dirty="0">
@@ -13536,7 +13630,7 @@
                 <a:ea typeface="Courier New" pitchFamily="34" charset="-122"/>
                 <a:cs typeface="Courier New" pitchFamily="34" charset="-120"/>
               </a:rPr>
-              <a:t>i_manufacturer</a:t>
+              <a:t>i_bandeira</a:t>
             </a:r>
             <a:r>
               <a:rPr lang="en-US" sz="800" dirty="0">
@@ -13580,7 +13674,7 @@
                 <a:ea typeface="Courier New" pitchFamily="34" charset="-122"/>
                 <a:cs typeface="Courier New" pitchFamily="34" charset="-120"/>
               </a:rPr>
-              <a:t>i_manufacturer</a:t>
+              <a:t>i_bandeira</a:t>
             </a:r>
             <a:r>
               <a:rPr lang="en-US" sz="800" dirty="0">
@@ -13602,7 +13696,7 @@
                 <a:ea typeface="Courier New" pitchFamily="34" charset="-122"/>
                 <a:cs typeface="Courier New" pitchFamily="34" charset="-120"/>
               </a:rPr>
-              <a:t>i_type</a:t>
+              <a:t>i_ultimos4</a:t>
             </a:r>
             <a:r>
               <a:rPr lang="en-US" sz="800" dirty="0">
@@ -13646,7 +13740,7 @@
                 <a:ea typeface="Courier New" pitchFamily="34" charset="-122"/>
                 <a:cs typeface="Courier New" pitchFamily="34" charset="-120"/>
               </a:rPr>
-              <a:t>i_type</a:t>
+              <a:t>i_ultimos4</a:t>
             </a:r>
             <a:r>
               <a:rPr lang="en-US" sz="800" dirty="0">
@@ -13710,7 +13804,7 @@
                 <a:ea typeface="Courier New" pitchFamily="34" charset="-122"/>
                 <a:cs typeface="Courier New" pitchFamily="34" charset="-120"/>
               </a:rPr>
-              <a:t>cargo</a:t>
+              <a:t>parcelas</a:t>
             </a:r>
             <a:r>
               <a:rPr lang="en-US" sz="800" dirty="0">
@@ -13754,7 +13848,7 @@
                 <a:ea typeface="Courier New" pitchFamily="34" charset="-122"/>
                 <a:cs typeface="Courier New" pitchFamily="34" charset="-120"/>
               </a:rPr>
-              <a:t>i_cargo</a:t>
+              <a:t>i_parcelas</a:t>
             </a:r>
             <a:r>
               <a:rPr lang="en-US" sz="800" dirty="0">
@@ -13860,7 +13954,7 @@
                 <a:ea typeface="Courier New" pitchFamily="34" charset="-122"/>
                 <a:cs typeface="Courier New" pitchFamily="34" charset="-120"/>
               </a:rPr>
-              <a:t>get_attributes</a:t>
+              <a:t>get_resumo</a:t>
             </a:r>
             <a:r>
               <a:rPr lang="en-US" sz="800" dirty="0">
@@ -13968,7 +14062,7 @@
                 <a:ea typeface="Courier New" pitchFamily="34" charset="-122"/>
                 <a:cs typeface="Courier New" pitchFamily="34" charset="-120"/>
               </a:rPr>
-              <a:t>get_attributes</a:t>
+              <a:t>get_resumo</a:t>
             </a:r>
             <a:r>
               <a:rPr lang="en-US" sz="800" dirty="0">
@@ -14065,7 +14159,7 @@
                 <a:ea typeface="Courier New" pitchFamily="34" charset="-122"/>
                 <a:cs typeface="Courier New" pitchFamily="34" charset="-120"/>
               </a:rPr>
-              <a:t>|Carga: { cargo } t|</a:t>
+              <a:t>|Crédito em { parcelas }x|</a:t>
             </a:r>
             <a:r>
               <a:rPr lang="en-US" sz="800" dirty="0">
@@ -14939,7 +15033,7 @@
         <p:spPr>
           <a:xfrm>
             <a:off x="640080" y="1700784"/>
-            <a:ext cx="2153412" cy="292608"/>
+            <a:ext cx="2775204" cy="292608"/>
           </a:xfrm>
           <a:prstGeom prst="rect">
             <a:avLst/>
@@ -14959,7 +15053,7 @@
         <p:spPr>
           <a:xfrm>
             <a:off x="640080" y="1700784"/>
-            <a:ext cx="2153412" cy="27432"/>
+            <a:ext cx="2775204" cy="27432"/>
           </a:xfrm>
           <a:prstGeom prst="rect">
             <a:avLst/>
@@ -14979,7 +15073,7 @@
         <p:spPr>
           <a:xfrm>
             <a:off x="731520" y="1719072"/>
-            <a:ext cx="1970532" cy="274320"/>
+            <a:ext cx="2592324" cy="274320"/>
           </a:xfrm>
           <a:prstGeom prst="rect">
             <a:avLst/>
@@ -15000,7 +15094,7 @@
                   <a:srgbClr val="FFFFFF"/>
                 </a:solidFill>
               </a:rPr>
-              <a:t>zcl_07_planes.clas.abap</a:t>
+              <a:t>zcl_pc_pagamento_demo.clas.abap</a:t>
             </a:r>
             <a:endParaRPr lang="en-US" sz="950" dirty="0"/>
           </a:p>
@@ -15036,7 +15130,7 @@
                   <a:srgbClr val="9DA5B4"/>
                 </a:solidFill>
               </a:rPr>
-              <a:t>ZCL_07_PLANES › main</a:t>
+              <a:t>Exemplo · main</a:t>
             </a:r>
             <a:endParaRPr lang="en-US" sz="850" dirty="0"/>
           </a:p>
@@ -15382,7 +15476,7 @@
                 <a:ea typeface="Courier New" pitchFamily="34" charset="-122"/>
                 <a:cs typeface="Courier New" pitchFamily="34" charset="-120"/>
               </a:rPr>
-              <a:t>planes</a:t>
+              <a:t>pagamentos</a:t>
             </a:r>
             <a:r>
               <a:rPr lang="en-US" sz="1050" dirty="0">
@@ -15514,7 +15608,7 @@
                 <a:ea typeface="Courier New" pitchFamily="34" charset="-122"/>
                 <a:cs typeface="Courier New" pitchFamily="34" charset="-120"/>
               </a:rPr>
-              <a:t>lcl_plane</a:t>
+              <a:t>lcl_pagamento</a:t>
             </a:r>
             <a:r>
               <a:rPr lang="en-US" sz="1050" dirty="0">
@@ -15609,7 +15703,7 @@
                 <a:ea typeface="Courier New" pitchFamily="34" charset="-122"/>
                 <a:cs typeface="Courier New" pitchFamily="34" charset="-120"/>
               </a:rPr>
-              <a:t>lcl_passenger_plane</a:t>
+              <a:t>lcl_pagamento_debito</a:t>
             </a:r>
             <a:r>
               <a:rPr lang="en-US" sz="1050" dirty="0">
@@ -15642,7 +15736,7 @@
                 <a:ea typeface="Courier New" pitchFamily="34" charset="-122"/>
                 <a:cs typeface="Courier New" pitchFamily="34" charset="-120"/>
               </a:rPr>
-              <a:t>i_manufacturer</a:t>
+              <a:t>i_bandeira</a:t>
             </a:r>
             <a:r>
               <a:rPr lang="en-US" sz="1050" dirty="0">
@@ -15686,7 +15780,7 @@
                 <a:ea typeface="Courier New" pitchFamily="34" charset="-122"/>
                 <a:cs typeface="Courier New" pitchFamily="34" charset="-120"/>
               </a:rPr>
-              <a:t>'Airbus'</a:t>
+              <a:t>'VISA'</a:t>
             </a:r>
             <a:endParaRPr lang="en-US" sz="1050" dirty="0"/>
           </a:p>
@@ -15717,7 +15811,7 @@
                 <a:ea typeface="Courier New" pitchFamily="34" charset="-122"/>
                 <a:cs typeface="Courier New" pitchFamily="34" charset="-120"/>
               </a:rPr>
-              <a:t>i_type</a:t>
+              <a:t>i_ultimos4</a:t>
             </a:r>
             <a:r>
               <a:rPr lang="en-US" sz="1050" dirty="0">
@@ -15761,7 +15855,7 @@
                 <a:ea typeface="Courier New" pitchFamily="34" charset="-122"/>
                 <a:cs typeface="Courier New" pitchFamily="34" charset="-120"/>
               </a:rPr>
-              <a:t>'A380'</a:t>
+              <a:t>'1111'</a:t>
             </a:r>
             <a:r>
               <a:rPr lang="en-US" sz="1050" dirty="0">
@@ -15783,7 +15877,7 @@
                 <a:ea typeface="Courier New" pitchFamily="34" charset="-122"/>
                 <a:cs typeface="Courier New" pitchFamily="34" charset="-120"/>
               </a:rPr>
-              <a:t>i_seats</a:t>
+              <a:t>)</a:t>
             </a:r>
             <a:r>
               <a:rPr lang="en-US" sz="1050" dirty="0">
@@ -15799,13 +15893,13 @@
             <a:r>
               <a:rPr lang="en-US" sz="1050" dirty="0">
                 <a:solidFill>
-                  <a:srgbClr val="CCCCCC"/>
-                </a:solidFill>
-                <a:latin typeface="Courier New" pitchFamily="34" charset="0"/>
-                <a:ea typeface="Courier New" pitchFamily="34" charset="-122"/>
-                <a:cs typeface="Courier New" pitchFamily="34" charset="-120"/>
-              </a:rPr>
-              <a:t>=</a:t>
+                  <a:srgbClr val="569CD6"/>
+                </a:solidFill>
+                <a:latin typeface="Courier New" pitchFamily="34" charset="0"/>
+                <a:ea typeface="Courier New" pitchFamily="34" charset="-122"/>
+                <a:cs typeface="Courier New" pitchFamily="34" charset="-120"/>
+              </a:rPr>
+              <a:t>TO</a:t>
             </a:r>
             <a:r>
               <a:rPr lang="en-US" sz="1050" dirty="0">
@@ -15821,13 +15915,13 @@
             <a:r>
               <a:rPr lang="en-US" sz="1050" dirty="0">
                 <a:solidFill>
-                  <a:srgbClr val="B5CEA8"/>
-                </a:solidFill>
-                <a:latin typeface="Courier New" pitchFamily="34" charset="0"/>
-                <a:ea typeface="Courier New" pitchFamily="34" charset="-122"/>
-                <a:cs typeface="Courier New" pitchFamily="34" charset="-120"/>
-              </a:rPr>
-              <a:t>575</a:t>
+                  <a:srgbClr val="CCCCCC"/>
+                </a:solidFill>
+                <a:latin typeface="Courier New" pitchFamily="34" charset="0"/>
+                <a:ea typeface="Courier New" pitchFamily="34" charset="-122"/>
+                <a:cs typeface="Courier New" pitchFamily="34" charset="-120"/>
+              </a:rPr>
+              <a:t>pagamentos</a:t>
             </a:r>
             <a:r>
               <a:rPr lang="en-US" sz="1050" dirty="0">
@@ -15838,7 +15932,7 @@
                 <a:ea typeface="Courier New" pitchFamily="34" charset="-122"/>
                 <a:cs typeface="Courier New" pitchFamily="34" charset="-120"/>
               </a:rPr>
-              <a:t> </a:t>
+              <a:t>.</a:t>
             </a:r>
             <a:r>
               <a:rPr lang="en-US" sz="1050" dirty="0">
@@ -15849,73 +15943,7 @@
                 <a:ea typeface="Courier New" pitchFamily="34" charset="-122"/>
                 <a:cs typeface="Courier New" pitchFamily="34" charset="-120"/>
               </a:rPr>
-              <a:t>)</a:t>
-            </a:r>
-            <a:r>
-              <a:rPr lang="en-US" sz="1050" dirty="0">
-                <a:solidFill>
-                  <a:srgbClr val="CCCCCC"/>
-                </a:solidFill>
-                <a:latin typeface="Courier New" pitchFamily="34" charset="0"/>
-                <a:ea typeface="Courier New" pitchFamily="34" charset="-122"/>
-                <a:cs typeface="Courier New" pitchFamily="34" charset="-120"/>
-              </a:rPr>
-              <a:t> </a:t>
-            </a:r>
-            <a:r>
-              <a:rPr lang="en-US" sz="1050" dirty="0">
-                <a:solidFill>
-                  <a:srgbClr val="569CD6"/>
-                </a:solidFill>
-                <a:latin typeface="Courier New" pitchFamily="34" charset="0"/>
-                <a:ea typeface="Courier New" pitchFamily="34" charset="-122"/>
-                <a:cs typeface="Courier New" pitchFamily="34" charset="-120"/>
-              </a:rPr>
-              <a:t>TO</a:t>
-            </a:r>
-            <a:r>
-              <a:rPr lang="en-US" sz="1050" dirty="0">
-                <a:solidFill>
-                  <a:srgbClr val="CCCCCC"/>
-                </a:solidFill>
-                <a:latin typeface="Courier New" pitchFamily="34" charset="0"/>
-                <a:ea typeface="Courier New" pitchFamily="34" charset="-122"/>
-                <a:cs typeface="Courier New" pitchFamily="34" charset="-120"/>
-              </a:rPr>
-              <a:t> </a:t>
-            </a:r>
-            <a:r>
-              <a:rPr lang="en-US" sz="1050" dirty="0">
-                <a:solidFill>
-                  <a:srgbClr val="CCCCCC"/>
-                </a:solidFill>
-                <a:latin typeface="Courier New" pitchFamily="34" charset="0"/>
-                <a:ea typeface="Courier New" pitchFamily="34" charset="-122"/>
-                <a:cs typeface="Courier New" pitchFamily="34" charset="-120"/>
-              </a:rPr>
-              <a:t>planes</a:t>
-            </a:r>
-            <a:r>
-              <a:rPr lang="en-US" sz="1050" dirty="0">
-                <a:solidFill>
-                  <a:srgbClr val="CCCCCC"/>
-                </a:solidFill>
-                <a:latin typeface="Courier New" pitchFamily="34" charset="0"/>
-                <a:ea typeface="Courier New" pitchFamily="34" charset="-122"/>
-                <a:cs typeface="Courier New" pitchFamily="34" charset="-120"/>
-              </a:rPr>
-              <a:t>.</a:t>
-            </a:r>
-            <a:r>
-              <a:rPr lang="en-US" sz="1050" dirty="0">
-                <a:solidFill>
-                  <a:srgbClr val="CCCCCC"/>
-                </a:solidFill>
-                <a:latin typeface="Courier New" pitchFamily="34" charset="0"/>
-                <a:ea typeface="Courier New" pitchFamily="34" charset="-122"/>
-                <a:cs typeface="Courier New" pitchFamily="34" charset="-120"/>
-              </a:rPr>
-              <a:t>      </a:t>
+              <a:t>                </a:t>
             </a:r>
             <a:r>
               <a:rPr lang="en-US" sz="1050" i="1" dirty="0">
@@ -15990,7 +16018,7 @@
                 <a:ea typeface="Courier New" pitchFamily="34" charset="-122"/>
                 <a:cs typeface="Courier New" pitchFamily="34" charset="-120"/>
               </a:rPr>
-              <a:t>lcl_cargo_plane</a:t>
+              <a:t>lcl_pagamento_credito</a:t>
             </a:r>
             <a:r>
               <a:rPr lang="en-US" sz="1050" dirty="0">
@@ -16023,7 +16051,7 @@
                 <a:ea typeface="Courier New" pitchFamily="34" charset="-122"/>
                 <a:cs typeface="Courier New" pitchFamily="34" charset="-120"/>
               </a:rPr>
-              <a:t>i_manufacturer</a:t>
+              <a:t>i_bandeira</a:t>
             </a:r>
             <a:r>
               <a:rPr lang="en-US" sz="1050" dirty="0">
@@ -16067,7 +16095,7 @@
                 <a:ea typeface="Courier New" pitchFamily="34" charset="-122"/>
                 <a:cs typeface="Courier New" pitchFamily="34" charset="-120"/>
               </a:rPr>
-              <a:t>'Boeing'</a:t>
+              <a:t>'MASTERCARD'</a:t>
             </a:r>
             <a:endParaRPr lang="en-US" sz="1050" dirty="0"/>
           </a:p>
@@ -16098,7 +16126,7 @@
                 <a:ea typeface="Courier New" pitchFamily="34" charset="-122"/>
                 <a:cs typeface="Courier New" pitchFamily="34" charset="-120"/>
               </a:rPr>
-              <a:t>i_type</a:t>
+              <a:t>i_ultimos4</a:t>
             </a:r>
             <a:r>
               <a:rPr lang="en-US" sz="1050" dirty="0">
@@ -16142,7 +16170,7 @@
                 <a:ea typeface="Courier New" pitchFamily="34" charset="-122"/>
                 <a:cs typeface="Courier New" pitchFamily="34" charset="-120"/>
               </a:rPr>
-              <a:t>'747-400F'</a:t>
+              <a:t>'4444'</a:t>
             </a:r>
             <a:r>
               <a:rPr lang="en-US" sz="1050" dirty="0">
@@ -16164,7 +16192,7 @@
                 <a:ea typeface="Courier New" pitchFamily="34" charset="-122"/>
                 <a:cs typeface="Courier New" pitchFamily="34" charset="-120"/>
               </a:rPr>
-              <a:t>i_cargo</a:t>
+              <a:t>i_parcelas</a:t>
             </a:r>
             <a:r>
               <a:rPr lang="en-US" sz="1050" dirty="0">
@@ -16208,7 +16236,7 @@
                 <a:ea typeface="Courier New" pitchFamily="34" charset="-122"/>
                 <a:cs typeface="Courier New" pitchFamily="34" charset="-120"/>
               </a:rPr>
-              <a:t>113</a:t>
+              <a:t>3</a:t>
             </a:r>
             <a:r>
               <a:rPr lang="en-US" sz="1050" dirty="0">
@@ -16274,7 +16302,7 @@
                 <a:ea typeface="Courier New" pitchFamily="34" charset="-122"/>
                 <a:cs typeface="Courier New" pitchFamily="34" charset="-120"/>
               </a:rPr>
-              <a:t>planes</a:t>
+              <a:t>pagamentos</a:t>
             </a:r>
             <a:r>
               <a:rPr lang="en-US" sz="1050" dirty="0">
@@ -16296,7 +16324,7 @@
                 <a:ea typeface="Courier New" pitchFamily="34" charset="-122"/>
                 <a:cs typeface="Courier New" pitchFamily="34" charset="-120"/>
               </a:rPr>
-              <a:t>  </a:t>
+              <a:t> </a:t>
             </a:r>
             <a:r>
               <a:rPr lang="en-US" sz="1050" i="1" dirty="0">
@@ -16391,7 +16419,7 @@
                 <a:ea typeface="Courier New" pitchFamily="34" charset="-122"/>
                 <a:cs typeface="Courier New" pitchFamily="34" charset="-120"/>
               </a:rPr>
-              <a:t>planes</a:t>
+              <a:t>pagamentos</a:t>
             </a:r>
             <a:r>
               <a:rPr lang="en-US" sz="1050" dirty="0">
@@ -16457,7 +16485,7 @@
                 <a:ea typeface="Courier New" pitchFamily="34" charset="-122"/>
                 <a:cs typeface="Courier New" pitchFamily="34" charset="-120"/>
               </a:rPr>
-              <a:t>plane</a:t>
+              <a:t>pagamento</a:t>
             </a:r>
             <a:r>
               <a:rPr lang="en-US" sz="1050" dirty="0">
@@ -16565,7 +16593,7 @@
                 <a:ea typeface="Courier New" pitchFamily="34" charset="-122"/>
                 <a:cs typeface="Courier New" pitchFamily="34" charset="-120"/>
               </a:rPr>
-              <a:t>plane-</a:t>
+              <a:t>pagamento-</a:t>
             </a:r>
             <a:r>
               <a:rPr lang="en-US" sz="1050" dirty="0">
@@ -16587,7 +16615,7 @@
                 <a:ea typeface="Courier New" pitchFamily="34" charset="-122"/>
                 <a:cs typeface="Courier New" pitchFamily="34" charset="-120"/>
               </a:rPr>
-              <a:t>get_attributes</a:t>
+              <a:t>get_resumo</a:t>
             </a:r>
             <a:r>
               <a:rPr lang="en-US" sz="1050" dirty="0">
@@ -16728,7 +16756,7 @@
                 <a:ea typeface="Courier New" pitchFamily="34" charset="-122"/>
                 <a:cs typeface="Courier New" pitchFamily="34" charset="-120"/>
               </a:rPr>
-              <a:t>plane</a:t>
+              <a:t>pagamento</a:t>
             </a:r>
             <a:r>
               <a:rPr lang="en-US" sz="1050" dirty="0">
@@ -16816,7 +16844,7 @@
                 <a:ea typeface="Courier New" pitchFamily="34" charset="-122"/>
                 <a:cs typeface="Courier New" pitchFamily="34" charset="-120"/>
               </a:rPr>
-              <a:t>lcl_cargo_plane</a:t>
+              <a:t>lcl_pagamento_credito</a:t>
             </a:r>
             <a:r>
               <a:rPr lang="en-US" sz="1050" dirty="0">
@@ -16880,7 +16908,7 @@
                 <a:ea typeface="Courier New" pitchFamily="34" charset="-122"/>
                 <a:cs typeface="Courier New" pitchFamily="34" charset="-120"/>
               </a:rPr>
-              <a:t>cargo_plane</a:t>
+              <a:t>credito</a:t>
             </a:r>
             <a:r>
               <a:rPr lang="en-US" sz="1050" dirty="0">
@@ -16957,7 +16985,7 @@
                 <a:ea typeface="Courier New" pitchFamily="34" charset="-122"/>
                 <a:cs typeface="Courier New" pitchFamily="34" charset="-120"/>
               </a:rPr>
-              <a:t>lcl_cargo_plane</a:t>
+              <a:t>lcl_pagamento_credito</a:t>
             </a:r>
             <a:r>
               <a:rPr lang="en-US" sz="1050" dirty="0">
@@ -16990,7 +17018,7 @@
                 <a:ea typeface="Courier New" pitchFamily="34" charset="-122"/>
                 <a:cs typeface="Courier New" pitchFamily="34" charset="-120"/>
               </a:rPr>
-              <a:t>plane</a:t>
+              <a:t>pagamento</a:t>
             </a:r>
             <a:r>
               <a:rPr lang="en-US" sz="1050" dirty="0">
@@ -17034,7 +17062,7 @@
                 <a:ea typeface="Courier New" pitchFamily="34" charset="-122"/>
                 <a:cs typeface="Courier New" pitchFamily="34" charset="-120"/>
               </a:rPr>
-              <a:t>   </a:t>
+              <a:t>  </a:t>
             </a:r>
             <a:r>
               <a:rPr lang="en-US" sz="1050" i="1" dirty="0">
@@ -17746,7 +17774,7 @@
                   <a:srgbClr val="89D1FF"/>
                 </a:solidFill>
               </a:rPr>
-              <a:t>AULA 04.07 · SEÇÃO 2</a:t>
+              <a:t>AULA 02.07 · SEÇÃO 2</a:t>
             </a:r>
             <a:endParaRPr lang="en-US" sz="1300" dirty="0"/>
           </a:p>
@@ -18221,7 +18249,7 @@
                   <a:srgbClr val="1D2D3E"/>
                 </a:solidFill>
               </a:rPr>
-              <a:t>Uma interface para parceiros de negócio</a:t>
+              <a:t>O contrato da consulta de CEP</a:t>
             </a:r>
             <a:endParaRPr lang="en-US" sz="2800" dirty="0"/>
           </a:p>
@@ -18285,7 +18313,7 @@
         <p:spPr>
           <a:xfrm>
             <a:off x="640080" y="1700784"/>
-            <a:ext cx="3163824" cy="292608"/>
+            <a:ext cx="2153412" cy="292608"/>
           </a:xfrm>
           <a:prstGeom prst="rect">
             <a:avLst/>
@@ -18305,7 +18333,7 @@
         <p:spPr>
           <a:xfrm>
             <a:off x="640080" y="1700784"/>
-            <a:ext cx="3163824" cy="27432"/>
+            <a:ext cx="2153412" cy="27432"/>
           </a:xfrm>
           <a:prstGeom prst="rect">
             <a:avLst/>
@@ -18325,7 +18353,7 @@
         <p:spPr>
           <a:xfrm>
             <a:off x="731520" y="1719072"/>
-            <a:ext cx="2980944" cy="274320"/>
+            <a:ext cx="1970532" cy="274320"/>
           </a:xfrm>
           <a:prstGeom prst="rect">
             <a:avLst/>
@@ -18346,7 +18374,7 @@
                   <a:srgbClr val="FFFFFF"/>
                 </a:solidFill>
               </a:rPr>
-              <a:t>zcl_07_partners.clas.locals_imp.abap</a:t>
+              <a:t>zif_pc_viacep.intf.abap</a:t>
             </a:r>
             <a:endParaRPr lang="en-US" sz="950" dirty="0"/>
           </a:p>
@@ -18382,7 +18410,7 @@
                   <a:srgbClr val="9DA5B4"/>
                 </a:solidFill>
               </a:rPr>
-              <a:t>ZCL_07_PARTNERS › Local Types</a:t>
+              <a:t>ZAVBS_PC_COMMON › ZIF_PC_VIACEP e ZCL_PC_VIACEP (simplificadas)</a:t>
             </a:r>
             <a:endParaRPr lang="en-US" sz="850" dirty="0"/>
           </a:p>
@@ -18728,106 +18756,6 @@
             </a:r>
             <a:endParaRPr lang="en-US" sz="900" dirty="0"/>
           </a:p>
-          <a:p>
-            <a:pPr algn="r" indent="0" marL="0">
-              <a:lnSpc>
-                <a:spcPct val="105000"/>
-              </a:lnSpc>
-              <a:buNone/>
-            </a:pPr>
-            <a:r>
-              <a:rPr lang="en-US" sz="900" dirty="0">
-                <a:solidFill>
-                  <a:srgbClr val="6E7681"/>
-                </a:solidFill>
-                <a:latin typeface="Courier New" pitchFamily="34" charset="0"/>
-                <a:ea typeface="Courier New" pitchFamily="34" charset="-122"/>
-                <a:cs typeface="Courier New" pitchFamily="34" charset="-120"/>
-              </a:rPr>
-              <a:t>17</a:t>
-            </a:r>
-            <a:endParaRPr lang="en-US" sz="900" dirty="0"/>
-          </a:p>
-          <a:p>
-            <a:pPr algn="r" indent="0" marL="0">
-              <a:lnSpc>
-                <a:spcPct val="105000"/>
-              </a:lnSpc>
-              <a:buNone/>
-            </a:pPr>
-            <a:r>
-              <a:rPr lang="en-US" sz="900" dirty="0">
-                <a:solidFill>
-                  <a:srgbClr val="6E7681"/>
-                </a:solidFill>
-                <a:latin typeface="Courier New" pitchFamily="34" charset="0"/>
-                <a:ea typeface="Courier New" pitchFamily="34" charset="-122"/>
-                <a:cs typeface="Courier New" pitchFamily="34" charset="-120"/>
-              </a:rPr>
-              <a:t>18</a:t>
-            </a:r>
-            <a:endParaRPr lang="en-US" sz="900" dirty="0"/>
-          </a:p>
-          <a:p>
-            <a:pPr algn="r" indent="0" marL="0">
-              <a:lnSpc>
-                <a:spcPct val="105000"/>
-              </a:lnSpc>
-              <a:buNone/>
-            </a:pPr>
-            <a:r>
-              <a:rPr lang="en-US" sz="900" dirty="0">
-                <a:solidFill>
-                  <a:srgbClr val="6E7681"/>
-                </a:solidFill>
-                <a:latin typeface="Courier New" pitchFamily="34" charset="0"/>
-                <a:ea typeface="Courier New" pitchFamily="34" charset="-122"/>
-                <a:cs typeface="Courier New" pitchFamily="34" charset="-120"/>
-              </a:rPr>
-              <a:t>19</a:t>
-            </a:r>
-            <a:endParaRPr lang="en-US" sz="900" dirty="0"/>
-          </a:p>
-          <a:p>
-            <a:pPr algn="r" indent="0" marL="0">
-              <a:lnSpc>
-                <a:spcPct val="105000"/>
-              </a:lnSpc>
-              <a:buNone/>
-            </a:pPr>
-            <a:r>
-              <a:rPr lang="en-US" sz="900" dirty="0">
-                <a:solidFill>
-                  <a:srgbClr val="6E7681"/>
-                </a:solidFill>
-                <a:latin typeface="Courier New" pitchFamily="34" charset="0"/>
-                <a:ea typeface="Courier New" pitchFamily="34" charset="-122"/>
-                <a:cs typeface="Courier New" pitchFamily="34" charset="-120"/>
-              </a:rPr>
-              <a:t>20</a:t>
-            </a:r>
-            <a:endParaRPr lang="en-US" sz="900" dirty="0"/>
-          </a:p>
-          <a:p>
-            <a:pPr algn="r" indent="0" marL="0">
-              <a:lnSpc>
-                <a:spcPct val="105000"/>
-              </a:lnSpc>
-              <a:buNone/>
-            </a:pPr>
-            <a:r>
-              <a:rPr lang="en-US" sz="900" dirty="0">
-                <a:solidFill>
-                  <a:srgbClr val="6E7681"/>
-                </a:solidFill>
-                <a:latin typeface="Courier New" pitchFamily="34" charset="0"/>
-                <a:ea typeface="Courier New" pitchFamily="34" charset="-122"/>
-                <a:cs typeface="Courier New" pitchFamily="34" charset="-120"/>
-              </a:rPr>
-              <a:t>21</a:t>
-            </a:r>
-            <a:endParaRPr lang="en-US" sz="900" dirty="0"/>
-          </a:p>
         </p:txBody>
       </p:sp>
       <p:sp>
@@ -18888,7 +18816,29 @@
                 <a:ea typeface="Courier New" pitchFamily="34" charset="-122"/>
                 <a:cs typeface="Courier New" pitchFamily="34" charset="-120"/>
               </a:rPr>
-              <a:t>lif_partner</a:t>
+              <a:t>zif_pc_viacep</a:t>
+            </a:r>
+            <a:r>
+              <a:rPr lang="en-US" sz="900" dirty="0">
+                <a:solidFill>
+                  <a:srgbClr val="CCCCCC"/>
+                </a:solidFill>
+                <a:latin typeface="Courier New" pitchFamily="34" charset="0"/>
+                <a:ea typeface="Courier New" pitchFamily="34" charset="-122"/>
+                <a:cs typeface="Courier New" pitchFamily="34" charset="-120"/>
+              </a:rPr>
+              <a:t> </a:t>
+            </a:r>
+            <a:r>
+              <a:rPr lang="en-US" sz="900" dirty="0">
+                <a:solidFill>
+                  <a:srgbClr val="569CD6"/>
+                </a:solidFill>
+                <a:latin typeface="Courier New" pitchFamily="34" charset="0"/>
+                <a:ea typeface="Courier New" pitchFamily="34" charset="-122"/>
+                <a:cs typeface="Courier New" pitchFamily="34" charset="-120"/>
+              </a:rPr>
+              <a:t>PUBLIC</a:t>
             </a:r>
             <a:r>
               <a:rPr lang="en-US" sz="900" dirty="0">
@@ -18930,7 +18880,7 @@
                 <a:ea typeface="Courier New" pitchFamily="34" charset="-122"/>
                 <a:cs typeface="Courier New" pitchFamily="34" charset="-120"/>
               </a:rPr>
-              <a:t>METHODS</a:t>
+              <a:t>TYPES</a:t>
             </a:r>
             <a:r>
               <a:rPr lang="en-US" sz="900" dirty="0">
@@ -18952,7 +18902,51 @@
                 <a:ea typeface="Courier New" pitchFamily="34" charset="-122"/>
                 <a:cs typeface="Courier New" pitchFamily="34" charset="-120"/>
               </a:rPr>
-              <a:t>get_partner_attributes</a:t>
+              <a:t>ty_resultado</a:t>
+            </a:r>
+            <a:r>
+              <a:rPr lang="en-US" sz="900" dirty="0">
+                <a:solidFill>
+                  <a:srgbClr val="CCCCCC"/>
+                </a:solidFill>
+                <a:latin typeface="Courier New" pitchFamily="34" charset="0"/>
+                <a:ea typeface="Courier New" pitchFamily="34" charset="-122"/>
+                <a:cs typeface="Courier New" pitchFamily="34" charset="-120"/>
+              </a:rPr>
+              <a:t> </a:t>
+            </a:r>
+            <a:r>
+              <a:rPr lang="en-US" sz="900" dirty="0">
+                <a:solidFill>
+                  <a:srgbClr val="CCCCCC"/>
+                </a:solidFill>
+                <a:latin typeface="Courier New" pitchFamily="34" charset="0"/>
+                <a:ea typeface="Courier New" pitchFamily="34" charset="-122"/>
+                <a:cs typeface="Courier New" pitchFamily="34" charset="-120"/>
+              </a:rPr>
+              <a:t>…</a:t>
+            </a:r>
+            <a:r>
+              <a:rPr lang="en-US" sz="900" dirty="0">
+                <a:solidFill>
+                  <a:srgbClr val="CCCCCC"/>
+                </a:solidFill>
+                <a:latin typeface="Courier New" pitchFamily="34" charset="0"/>
+                <a:ea typeface="Courier New" pitchFamily="34" charset="-122"/>
+                <a:cs typeface="Courier New" pitchFamily="34" charset="-120"/>
+              </a:rPr>
+              <a:t>     </a:t>
+            </a:r>
+            <a:r>
+              <a:rPr lang="en-US" sz="900" i="1" dirty="0">
+                <a:solidFill>
+                  <a:srgbClr val="6A9955"/>
+                </a:solidFill>
+                <a:latin typeface="Courier New" pitchFamily="34" charset="0"/>
+                <a:ea typeface="Courier New" pitchFamily="34" charset="-122"/>
+                <a:cs typeface="Courier New" pitchFamily="34" charset="-120"/>
+              </a:rPr>
+              <a:t>" valido, indisponivel, endereco</a:t>
             </a:r>
             <a:endParaRPr lang="en-US" sz="900" dirty="0"/>
           </a:p>
@@ -18972,7 +18966,7 @@
                 <a:ea typeface="Courier New" pitchFamily="34" charset="-122"/>
                 <a:cs typeface="Courier New" pitchFamily="34" charset="-120"/>
               </a:rPr>
-              <a:t>    </a:t>
+              <a:t>  </a:t>
             </a:r>
             <a:r>
               <a:rPr lang="en-US" sz="900" dirty="0">
@@ -18983,7 +18977,7 @@
                 <a:ea typeface="Courier New" pitchFamily="34" charset="-122"/>
                 <a:cs typeface="Courier New" pitchFamily="34" charset="-120"/>
               </a:rPr>
-              <a:t>RETURNING</a:t>
+              <a:t>CLASS-METHODS</a:t>
             </a:r>
             <a:r>
               <a:rPr lang="en-US" sz="900" dirty="0">
@@ -18999,101 +18993,13 @@
             <a:r>
               <a:rPr lang="en-US" sz="900" dirty="0">
                 <a:solidFill>
-                  <a:srgbClr val="569CD6"/>
-                </a:solidFill>
-                <a:latin typeface="Courier New" pitchFamily="34" charset="0"/>
-                <a:ea typeface="Courier New" pitchFamily="34" charset="-122"/>
-                <a:cs typeface="Courier New" pitchFamily="34" charset="-120"/>
-              </a:rPr>
-              <a:t>VALUE</a:t>
-            </a:r>
-            <a:r>
-              <a:rPr lang="en-US" sz="900" dirty="0">
-                <a:solidFill>
-                  <a:srgbClr val="CCCCCC"/>
-                </a:solidFill>
-                <a:latin typeface="Courier New" pitchFamily="34" charset="0"/>
-                <a:ea typeface="Courier New" pitchFamily="34" charset="-122"/>
-                <a:cs typeface="Courier New" pitchFamily="34" charset="-120"/>
-              </a:rPr>
-              <a:t>(</a:t>
-            </a:r>
-            <a:r>
-              <a:rPr lang="en-US" sz="900" dirty="0">
-                <a:solidFill>
-                  <a:srgbClr val="CCCCCC"/>
-                </a:solidFill>
-                <a:latin typeface="Courier New" pitchFamily="34" charset="0"/>
-                <a:ea typeface="Courier New" pitchFamily="34" charset="-122"/>
-                <a:cs typeface="Courier New" pitchFamily="34" charset="-120"/>
-              </a:rPr>
-              <a:t>r_attributes</a:t>
-            </a:r>
-            <a:r>
-              <a:rPr lang="en-US" sz="900" dirty="0">
-                <a:solidFill>
-                  <a:srgbClr val="CCCCCC"/>
-                </a:solidFill>
-                <a:latin typeface="Courier New" pitchFamily="34" charset="0"/>
-                <a:ea typeface="Courier New" pitchFamily="34" charset="-122"/>
-                <a:cs typeface="Courier New" pitchFamily="34" charset="-120"/>
-              </a:rPr>
-              <a:t>)</a:t>
-            </a:r>
-            <a:r>
-              <a:rPr lang="en-US" sz="900" dirty="0">
-                <a:solidFill>
-                  <a:srgbClr val="CCCCCC"/>
-                </a:solidFill>
-                <a:latin typeface="Courier New" pitchFamily="34" charset="0"/>
-                <a:ea typeface="Courier New" pitchFamily="34" charset="-122"/>
-                <a:cs typeface="Courier New" pitchFamily="34" charset="-120"/>
-              </a:rPr>
-              <a:t> </a:t>
-            </a:r>
-            <a:r>
-              <a:rPr lang="en-US" sz="900" dirty="0">
-                <a:solidFill>
-                  <a:srgbClr val="569CD6"/>
-                </a:solidFill>
-                <a:latin typeface="Courier New" pitchFamily="34" charset="0"/>
-                <a:ea typeface="Courier New" pitchFamily="34" charset="-122"/>
-                <a:cs typeface="Courier New" pitchFamily="34" charset="-120"/>
-              </a:rPr>
-              <a:t>TYPE</a:t>
-            </a:r>
-            <a:r>
-              <a:rPr lang="en-US" sz="900" dirty="0">
-                <a:solidFill>
-                  <a:srgbClr val="CCCCCC"/>
-                </a:solidFill>
-                <a:latin typeface="Courier New" pitchFamily="34" charset="0"/>
-                <a:ea typeface="Courier New" pitchFamily="34" charset="-122"/>
-                <a:cs typeface="Courier New" pitchFamily="34" charset="-120"/>
-              </a:rPr>
-              <a:t> </a:t>
-            </a:r>
-            <a:r>
-              <a:rPr lang="en-US" sz="900" dirty="0">
-                <a:solidFill>
-                  <a:srgbClr val="CCCCCC"/>
-                </a:solidFill>
-                <a:latin typeface="Courier New" pitchFamily="34" charset="0"/>
-                <a:ea typeface="Courier New" pitchFamily="34" charset="-122"/>
-                <a:cs typeface="Courier New" pitchFamily="34" charset="-120"/>
-              </a:rPr>
-              <a:t>string_table</a:t>
-            </a:r>
-            <a:r>
-              <a:rPr lang="en-US" sz="900" dirty="0">
-                <a:solidFill>
-                  <a:srgbClr val="CCCCCC"/>
-                </a:solidFill>
-                <a:latin typeface="Courier New" pitchFamily="34" charset="0"/>
-                <a:ea typeface="Courier New" pitchFamily="34" charset="-122"/>
-                <a:cs typeface="Courier New" pitchFamily="34" charset="-120"/>
-              </a:rPr>
-              <a:t>.</a:t>
+                  <a:srgbClr val="CCCCCC"/>
+                </a:solidFill>
+                <a:latin typeface="Courier New" pitchFamily="34" charset="0"/>
+                <a:ea typeface="Courier New" pitchFamily="34" charset="-122"/>
+                <a:cs typeface="Courier New" pitchFamily="34" charset="-120"/>
+              </a:rPr>
+              <a:t>consultar</a:t>
             </a:r>
             <a:endParaRPr lang="en-US" sz="900" dirty="0"/>
           </a:p>
@@ -19107,13 +19013,24 @@
             <a:r>
               <a:rPr lang="en-US" sz="900" dirty="0">
                 <a:solidFill>
+                  <a:srgbClr val="CCCCCC"/>
+                </a:solidFill>
+                <a:latin typeface="Courier New" pitchFamily="34" charset="0"/>
+                <a:ea typeface="Courier New" pitchFamily="34" charset="-122"/>
+                <a:cs typeface="Courier New" pitchFamily="34" charset="-120"/>
+              </a:rPr>
+              <a:t>    </a:t>
+            </a:r>
+            <a:r>
+              <a:rPr lang="en-US" sz="900" dirty="0">
+                <a:solidFill>
                   <a:srgbClr val="569CD6"/>
                 </a:solidFill>
                 <a:latin typeface="Courier New" pitchFamily="34" charset="0"/>
                 <a:ea typeface="Courier New" pitchFamily="34" charset="-122"/>
                 <a:cs typeface="Courier New" pitchFamily="34" charset="-120"/>
               </a:rPr>
-              <a:t>ENDINTERFACE</a:t>
+              <a:t>IMPORTING</a:t>
             </a:r>
             <a:r>
               <a:rPr lang="en-US" sz="900" dirty="0">
@@ -19124,7 +19041,62 @@
                 <a:ea typeface="Courier New" pitchFamily="34" charset="-122"/>
                 <a:cs typeface="Courier New" pitchFamily="34" charset="-120"/>
               </a:rPr>
-              <a:t>.</a:t>
+              <a:t> </a:t>
+            </a:r>
+            <a:r>
+              <a:rPr lang="en-US" sz="900" dirty="0">
+                <a:solidFill>
+                  <a:srgbClr val="CCCCCC"/>
+                </a:solidFill>
+                <a:latin typeface="Courier New" pitchFamily="34" charset="0"/>
+                <a:ea typeface="Courier New" pitchFamily="34" charset="-122"/>
+                <a:cs typeface="Courier New" pitchFamily="34" charset="-120"/>
+              </a:rPr>
+              <a:t>iv_cep</a:t>
+            </a:r>
+            <a:r>
+              <a:rPr lang="en-US" sz="900" dirty="0">
+                <a:solidFill>
+                  <a:srgbClr val="CCCCCC"/>
+                </a:solidFill>
+                <a:latin typeface="Courier New" pitchFamily="34" charset="0"/>
+                <a:ea typeface="Courier New" pitchFamily="34" charset="-122"/>
+                <a:cs typeface="Courier New" pitchFamily="34" charset="-120"/>
+              </a:rPr>
+              <a:t>              </a:t>
+            </a:r>
+            <a:r>
+              <a:rPr lang="en-US" sz="900" dirty="0">
+                <a:solidFill>
+                  <a:srgbClr val="569CD6"/>
+                </a:solidFill>
+                <a:latin typeface="Courier New" pitchFamily="34" charset="0"/>
+                <a:ea typeface="Courier New" pitchFamily="34" charset="-122"/>
+                <a:cs typeface="Courier New" pitchFamily="34" charset="-120"/>
+              </a:rPr>
+              <a:t>TYPE</a:t>
+            </a:r>
+            <a:r>
+              <a:rPr lang="en-US" sz="900" dirty="0">
+                <a:solidFill>
+                  <a:srgbClr val="CCCCCC"/>
+                </a:solidFill>
+                <a:latin typeface="Courier New" pitchFamily="34" charset="0"/>
+                <a:ea typeface="Courier New" pitchFamily="34" charset="-122"/>
+                <a:cs typeface="Courier New" pitchFamily="34" charset="-120"/>
+              </a:rPr>
+              <a:t> </a:t>
+            </a:r>
+            <a:r>
+              <a:rPr lang="en-US" sz="900" dirty="0">
+                <a:solidFill>
+                  <a:srgbClr val="CCCCCC"/>
+                </a:solidFill>
+                <a:latin typeface="Courier New" pitchFamily="34" charset="0"/>
+                <a:ea typeface="Courier New" pitchFamily="34" charset="-122"/>
+                <a:cs typeface="Courier New" pitchFamily="34" charset="-120"/>
+              </a:rPr>
+              <a:t>csequence</a:t>
             </a:r>
             <a:endParaRPr lang="en-US" sz="900" dirty="0"/>
           </a:p>
@@ -19138,13 +19110,134 @@
             <a:r>
               <a:rPr lang="en-US" sz="900" dirty="0">
                 <a:solidFill>
-                  <a:srgbClr val="000000"/>
+                  <a:srgbClr val="CCCCCC"/>
+                </a:solidFill>
+                <a:latin typeface="Courier New" pitchFamily="34" charset="0"/>
+                <a:ea typeface="Courier New" pitchFamily="34" charset="-122"/>
+                <a:cs typeface="Courier New" pitchFamily="34" charset="-120"/>
+              </a:rPr>
+              <a:t>    </a:t>
+            </a:r>
+            <a:r>
+              <a:rPr lang="en-US" sz="900" dirty="0">
+                <a:solidFill>
+                  <a:srgbClr val="569CD6"/>
+                </a:solidFill>
+                <a:latin typeface="Courier New" pitchFamily="34" charset="0"/>
+                <a:ea typeface="Courier New" pitchFamily="34" charset="-122"/>
+                <a:cs typeface="Courier New" pitchFamily="34" charset="-120"/>
+              </a:rPr>
+              <a:t>RETURNING</a:t>
+            </a:r>
+            <a:r>
+              <a:rPr lang="en-US" sz="900" dirty="0">
+                <a:solidFill>
+                  <a:srgbClr val="CCCCCC"/>
                 </a:solidFill>
                 <a:latin typeface="Courier New" pitchFamily="34" charset="0"/>
                 <a:ea typeface="Courier New" pitchFamily="34" charset="-122"/>
                 <a:cs typeface="Courier New" pitchFamily="34" charset="-120"/>
               </a:rPr>
               <a:t> </a:t>
+            </a:r>
+            <a:r>
+              <a:rPr lang="en-US" sz="900" dirty="0">
+                <a:solidFill>
+                  <a:srgbClr val="569CD6"/>
+                </a:solidFill>
+                <a:latin typeface="Courier New" pitchFamily="34" charset="0"/>
+                <a:ea typeface="Courier New" pitchFamily="34" charset="-122"/>
+                <a:cs typeface="Courier New" pitchFamily="34" charset="-120"/>
+              </a:rPr>
+              <a:t>VALUE</a:t>
+            </a:r>
+            <a:r>
+              <a:rPr lang="en-US" sz="900" dirty="0">
+                <a:solidFill>
+                  <a:srgbClr val="CCCCCC"/>
+                </a:solidFill>
+                <a:latin typeface="Courier New" pitchFamily="34" charset="0"/>
+                <a:ea typeface="Courier New" pitchFamily="34" charset="-122"/>
+                <a:cs typeface="Courier New" pitchFamily="34" charset="-120"/>
+              </a:rPr>
+              <a:t>(</a:t>
+            </a:r>
+            <a:r>
+              <a:rPr lang="en-US" sz="900" dirty="0">
+                <a:solidFill>
+                  <a:srgbClr val="CCCCCC"/>
+                </a:solidFill>
+                <a:latin typeface="Courier New" pitchFamily="34" charset="0"/>
+                <a:ea typeface="Courier New" pitchFamily="34" charset="-122"/>
+                <a:cs typeface="Courier New" pitchFamily="34" charset="-120"/>
+              </a:rPr>
+              <a:t>rs_resultado</a:t>
+            </a:r>
+            <a:r>
+              <a:rPr lang="en-US" sz="900" dirty="0">
+                <a:solidFill>
+                  <a:srgbClr val="CCCCCC"/>
+                </a:solidFill>
+                <a:latin typeface="Courier New" pitchFamily="34" charset="0"/>
+                <a:ea typeface="Courier New" pitchFamily="34" charset="-122"/>
+                <a:cs typeface="Courier New" pitchFamily="34" charset="-120"/>
+              </a:rPr>
+              <a:t>)</a:t>
+            </a:r>
+            <a:r>
+              <a:rPr lang="en-US" sz="900" dirty="0">
+                <a:solidFill>
+                  <a:srgbClr val="CCCCCC"/>
+                </a:solidFill>
+                <a:latin typeface="Courier New" pitchFamily="34" charset="0"/>
+                <a:ea typeface="Courier New" pitchFamily="34" charset="-122"/>
+                <a:cs typeface="Courier New" pitchFamily="34" charset="-120"/>
+              </a:rPr>
+              <a:t> </a:t>
+            </a:r>
+            <a:r>
+              <a:rPr lang="en-US" sz="900" dirty="0">
+                <a:solidFill>
+                  <a:srgbClr val="569CD6"/>
+                </a:solidFill>
+                <a:latin typeface="Courier New" pitchFamily="34" charset="0"/>
+                <a:ea typeface="Courier New" pitchFamily="34" charset="-122"/>
+                <a:cs typeface="Courier New" pitchFamily="34" charset="-120"/>
+              </a:rPr>
+              <a:t>TYPE</a:t>
+            </a:r>
+            <a:r>
+              <a:rPr lang="en-US" sz="900" dirty="0">
+                <a:solidFill>
+                  <a:srgbClr val="CCCCCC"/>
+                </a:solidFill>
+                <a:latin typeface="Courier New" pitchFamily="34" charset="0"/>
+                <a:ea typeface="Courier New" pitchFamily="34" charset="-122"/>
+                <a:cs typeface="Courier New" pitchFamily="34" charset="-120"/>
+              </a:rPr>
+              <a:t> </a:t>
+            </a:r>
+            <a:r>
+              <a:rPr lang="en-US" sz="900" dirty="0">
+                <a:solidFill>
+                  <a:srgbClr val="CCCCCC"/>
+                </a:solidFill>
+                <a:latin typeface="Courier New" pitchFamily="34" charset="0"/>
+                <a:ea typeface="Courier New" pitchFamily="34" charset="-122"/>
+                <a:cs typeface="Courier New" pitchFamily="34" charset="-120"/>
+              </a:rPr>
+              <a:t>ty_resultado</a:t>
+            </a:r>
+            <a:r>
+              <a:rPr lang="en-US" sz="900" dirty="0">
+                <a:solidFill>
+                  <a:srgbClr val="CCCCCC"/>
+                </a:solidFill>
+                <a:latin typeface="Courier New" pitchFamily="34" charset="0"/>
+                <a:ea typeface="Courier New" pitchFamily="34" charset="-122"/>
+                <a:cs typeface="Courier New" pitchFamily="34" charset="-120"/>
+              </a:rPr>
+              <a:t>.</a:t>
             </a:r>
             <a:endParaRPr lang="en-US" sz="900" dirty="0"/>
           </a:p>
@@ -19164,51 +19257,7 @@
                 <a:ea typeface="Courier New" pitchFamily="34" charset="-122"/>
                 <a:cs typeface="Courier New" pitchFamily="34" charset="-120"/>
               </a:rPr>
-              <a:t>CLASS</a:t>
-            </a:r>
-            <a:r>
-              <a:rPr lang="en-US" sz="900" dirty="0">
-                <a:solidFill>
-                  <a:srgbClr val="CCCCCC"/>
-                </a:solidFill>
-                <a:latin typeface="Courier New" pitchFamily="34" charset="0"/>
-                <a:ea typeface="Courier New" pitchFamily="34" charset="-122"/>
-                <a:cs typeface="Courier New" pitchFamily="34" charset="-120"/>
-              </a:rPr>
-              <a:t> </a:t>
-            </a:r>
-            <a:r>
-              <a:rPr lang="en-US" sz="900" dirty="0">
-                <a:solidFill>
-                  <a:srgbClr val="4EC9B0"/>
-                </a:solidFill>
-                <a:latin typeface="Courier New" pitchFamily="34" charset="0"/>
-                <a:ea typeface="Courier New" pitchFamily="34" charset="-122"/>
-                <a:cs typeface="Courier New" pitchFamily="34" charset="-120"/>
-              </a:rPr>
-              <a:t>lcl_carrier</a:t>
-            </a:r>
-            <a:r>
-              <a:rPr lang="en-US" sz="900" dirty="0">
-                <a:solidFill>
-                  <a:srgbClr val="CCCCCC"/>
-                </a:solidFill>
-                <a:latin typeface="Courier New" pitchFamily="34" charset="0"/>
-                <a:ea typeface="Courier New" pitchFamily="34" charset="-122"/>
-                <a:cs typeface="Courier New" pitchFamily="34" charset="-120"/>
-              </a:rPr>
-              <a:t> </a:t>
-            </a:r>
-            <a:r>
-              <a:rPr lang="en-US" sz="900" dirty="0">
-                <a:solidFill>
-                  <a:srgbClr val="569CD6"/>
-                </a:solidFill>
-                <a:latin typeface="Courier New" pitchFamily="34" charset="0"/>
-                <a:ea typeface="Courier New" pitchFamily="34" charset="-122"/>
-                <a:cs typeface="Courier New" pitchFamily="34" charset="-120"/>
-              </a:rPr>
-              <a:t>DEFINITION</a:t>
+              <a:t>ENDINTERFACE</a:t>
             </a:r>
             <a:r>
               <a:rPr lang="en-US" sz="900" dirty="0">
@@ -19233,57 +19282,13 @@
             <a:r>
               <a:rPr lang="en-US" sz="900" dirty="0">
                 <a:solidFill>
-                  <a:srgbClr val="CCCCCC"/>
-                </a:solidFill>
-                <a:latin typeface="Courier New" pitchFamily="34" charset="0"/>
-                <a:ea typeface="Courier New" pitchFamily="34" charset="-122"/>
-                <a:cs typeface="Courier New" pitchFamily="34" charset="-120"/>
-              </a:rPr>
-              <a:t>  </a:t>
-            </a:r>
-            <a:r>
-              <a:rPr lang="en-US" sz="900" dirty="0">
-                <a:solidFill>
-                  <a:srgbClr val="569CD6"/>
-                </a:solidFill>
-                <a:latin typeface="Courier New" pitchFamily="34" charset="0"/>
-                <a:ea typeface="Courier New" pitchFamily="34" charset="-122"/>
-                <a:cs typeface="Courier New" pitchFamily="34" charset="-120"/>
-              </a:rPr>
-              <a:t>PUBLIC</a:t>
-            </a:r>
-            <a:r>
-              <a:rPr lang="en-US" sz="900" dirty="0">
-                <a:solidFill>
-                  <a:srgbClr val="CCCCCC"/>
+                  <a:srgbClr val="000000"/>
                 </a:solidFill>
                 <a:latin typeface="Courier New" pitchFamily="34" charset="0"/>
                 <a:ea typeface="Courier New" pitchFamily="34" charset="-122"/>
                 <a:cs typeface="Courier New" pitchFamily="34" charset="-120"/>
               </a:rPr>
               <a:t> </a:t>
-            </a:r>
-            <a:r>
-              <a:rPr lang="en-US" sz="900" dirty="0">
-                <a:solidFill>
-                  <a:srgbClr val="569CD6"/>
-                </a:solidFill>
-                <a:latin typeface="Courier New" pitchFamily="34" charset="0"/>
-                <a:ea typeface="Courier New" pitchFamily="34" charset="-122"/>
-                <a:cs typeface="Courier New" pitchFamily="34" charset="-120"/>
-              </a:rPr>
-              <a:t>SECTION</a:t>
-            </a:r>
-            <a:r>
-              <a:rPr lang="en-US" sz="900" dirty="0">
-                <a:solidFill>
-                  <a:srgbClr val="CCCCCC"/>
-                </a:solidFill>
-                <a:latin typeface="Courier New" pitchFamily="34" charset="0"/>
-                <a:ea typeface="Courier New" pitchFamily="34" charset="-122"/>
-                <a:cs typeface="Courier New" pitchFamily="34" charset="-120"/>
-              </a:rPr>
-              <a:t>.</a:t>
             </a:r>
             <a:endParaRPr lang="en-US" sz="900" dirty="0"/>
           </a:p>
@@ -19297,24 +19302,57 @@
             <a:r>
               <a:rPr lang="en-US" sz="900" dirty="0">
                 <a:solidFill>
-                  <a:srgbClr val="CCCCCC"/>
-                </a:solidFill>
-                <a:latin typeface="Courier New" pitchFamily="34" charset="0"/>
-                <a:ea typeface="Courier New" pitchFamily="34" charset="-122"/>
-                <a:cs typeface="Courier New" pitchFamily="34" charset="-120"/>
-              </a:rPr>
-              <a:t>    </a:t>
+                  <a:srgbClr val="569CD6"/>
+                </a:solidFill>
+                <a:latin typeface="Courier New" pitchFamily="34" charset="0"/>
+                <a:ea typeface="Courier New" pitchFamily="34" charset="-122"/>
+                <a:cs typeface="Courier New" pitchFamily="34" charset="-120"/>
+              </a:rPr>
+              <a:t>CLASS</a:t>
             </a:r>
             <a:r>
               <a:rPr lang="en-US" sz="900" dirty="0">
                 <a:solidFill>
+                  <a:srgbClr val="CCCCCC"/>
+                </a:solidFill>
+                <a:latin typeface="Courier New" pitchFamily="34" charset="0"/>
+                <a:ea typeface="Courier New" pitchFamily="34" charset="-122"/>
+                <a:cs typeface="Courier New" pitchFamily="34" charset="-120"/>
+              </a:rPr>
+              <a:t> </a:t>
+            </a:r>
+            <a:r>
+              <a:rPr lang="en-US" sz="900" dirty="0">
+                <a:solidFill>
+                  <a:srgbClr val="4EC9B0"/>
+                </a:solidFill>
+                <a:latin typeface="Courier New" pitchFamily="34" charset="0"/>
+                <a:ea typeface="Courier New" pitchFamily="34" charset="-122"/>
+                <a:cs typeface="Courier New" pitchFamily="34" charset="-120"/>
+              </a:rPr>
+              <a:t>zcl_pc_viacep</a:t>
+            </a:r>
+            <a:r>
+              <a:rPr lang="en-US" sz="900" dirty="0">
+                <a:solidFill>
+                  <a:srgbClr val="CCCCCC"/>
+                </a:solidFill>
+                <a:latin typeface="Courier New" pitchFamily="34" charset="0"/>
+                <a:ea typeface="Courier New" pitchFamily="34" charset="-122"/>
+                <a:cs typeface="Courier New" pitchFamily="34" charset="-120"/>
+              </a:rPr>
+              <a:t> </a:t>
+            </a:r>
+            <a:r>
+              <a:rPr lang="en-US" sz="900" dirty="0">
+                <a:solidFill>
                   <a:srgbClr val="569CD6"/>
                 </a:solidFill>
                 <a:latin typeface="Courier New" pitchFamily="34" charset="0"/>
                 <a:ea typeface="Courier New" pitchFamily="34" charset="-122"/>
                 <a:cs typeface="Courier New" pitchFamily="34" charset="-120"/>
               </a:rPr>
-              <a:t>INTERFACES</a:t>
+              <a:t>DEFINITION</a:t>
             </a:r>
             <a:r>
               <a:rPr lang="en-US" sz="900" dirty="0">
@@ -19330,13 +19368,79 @@
             <a:r>
               <a:rPr lang="en-US" sz="900" dirty="0">
                 <a:solidFill>
-                  <a:srgbClr val="4EC9B0"/>
-                </a:solidFill>
-                <a:latin typeface="Courier New" pitchFamily="34" charset="0"/>
-                <a:ea typeface="Courier New" pitchFamily="34" charset="-122"/>
-                <a:cs typeface="Courier New" pitchFamily="34" charset="-120"/>
-              </a:rPr>
-              <a:t>lif_partner</a:t>
+                  <a:srgbClr val="569CD6"/>
+                </a:solidFill>
+                <a:latin typeface="Courier New" pitchFamily="34" charset="0"/>
+                <a:ea typeface="Courier New" pitchFamily="34" charset="-122"/>
+                <a:cs typeface="Courier New" pitchFamily="34" charset="-120"/>
+              </a:rPr>
+              <a:t>PUBLIC</a:t>
+            </a:r>
+            <a:r>
+              <a:rPr lang="en-US" sz="900" dirty="0">
+                <a:solidFill>
+                  <a:srgbClr val="CCCCCC"/>
+                </a:solidFill>
+                <a:latin typeface="Courier New" pitchFamily="34" charset="0"/>
+                <a:ea typeface="Courier New" pitchFamily="34" charset="-122"/>
+                <a:cs typeface="Courier New" pitchFamily="34" charset="-120"/>
+              </a:rPr>
+              <a:t> </a:t>
+            </a:r>
+            <a:r>
+              <a:rPr lang="en-US" sz="900" dirty="0">
+                <a:solidFill>
+                  <a:srgbClr val="569CD6"/>
+                </a:solidFill>
+                <a:latin typeface="Courier New" pitchFamily="34" charset="0"/>
+                <a:ea typeface="Courier New" pitchFamily="34" charset="-122"/>
+                <a:cs typeface="Courier New" pitchFamily="34" charset="-120"/>
+              </a:rPr>
+              <a:t>FINAL</a:t>
+            </a:r>
+            <a:r>
+              <a:rPr lang="en-US" sz="900" dirty="0">
+                <a:solidFill>
+                  <a:srgbClr val="CCCCCC"/>
+                </a:solidFill>
+                <a:latin typeface="Courier New" pitchFamily="34" charset="0"/>
+                <a:ea typeface="Courier New" pitchFamily="34" charset="-122"/>
+                <a:cs typeface="Courier New" pitchFamily="34" charset="-120"/>
+              </a:rPr>
+              <a:t> </a:t>
+            </a:r>
+            <a:r>
+              <a:rPr lang="en-US" sz="900" dirty="0">
+                <a:solidFill>
+                  <a:srgbClr val="569CD6"/>
+                </a:solidFill>
+                <a:latin typeface="Courier New" pitchFamily="34" charset="0"/>
+                <a:ea typeface="Courier New" pitchFamily="34" charset="-122"/>
+                <a:cs typeface="Courier New" pitchFamily="34" charset="-120"/>
+              </a:rPr>
+              <a:t>CREATE</a:t>
+            </a:r>
+            <a:r>
+              <a:rPr lang="en-US" sz="900" dirty="0">
+                <a:solidFill>
+                  <a:srgbClr val="CCCCCC"/>
+                </a:solidFill>
+                <a:latin typeface="Courier New" pitchFamily="34" charset="0"/>
+                <a:ea typeface="Courier New" pitchFamily="34" charset="-122"/>
+                <a:cs typeface="Courier New" pitchFamily="34" charset="-120"/>
+              </a:rPr>
+              <a:t> </a:t>
+            </a:r>
+            <a:r>
+              <a:rPr lang="en-US" sz="900" dirty="0">
+                <a:solidFill>
+                  <a:srgbClr val="569CD6"/>
+                </a:solidFill>
+                <a:latin typeface="Courier New" pitchFamily="34" charset="0"/>
+                <a:ea typeface="Courier New" pitchFamily="34" charset="-122"/>
+                <a:cs typeface="Courier New" pitchFamily="34" charset="-120"/>
+              </a:rPr>
+              <a:t>PUBLIC</a:t>
             </a:r>
             <a:r>
               <a:rPr lang="en-US" sz="900" dirty="0">
@@ -19367,7 +19471,7 @@
                 <a:ea typeface="Courier New" pitchFamily="34" charset="-122"/>
                 <a:cs typeface="Courier New" pitchFamily="34" charset="-120"/>
               </a:rPr>
-              <a:t>    </a:t>
+              <a:t>  </a:t>
             </a:r>
             <a:r>
               <a:rPr lang="en-US" sz="900" dirty="0">
@@ -19378,7 +19482,7 @@
                 <a:ea typeface="Courier New" pitchFamily="34" charset="-122"/>
                 <a:cs typeface="Courier New" pitchFamily="34" charset="-120"/>
               </a:rPr>
-              <a:t>ALIASES</a:t>
+              <a:t>PUBLIC</a:t>
             </a:r>
             <a:r>
               <a:rPr lang="en-US" sz="900" dirty="0">
@@ -19394,57 +19498,13 @@
             <a:r>
               <a:rPr lang="en-US" sz="900" dirty="0">
                 <a:solidFill>
-                  <a:srgbClr val="CCCCCC"/>
-                </a:solidFill>
-                <a:latin typeface="Courier New" pitchFamily="34" charset="0"/>
-                <a:ea typeface="Courier New" pitchFamily="34" charset="-122"/>
-                <a:cs typeface="Courier New" pitchFamily="34" charset="-120"/>
-              </a:rPr>
-              <a:t>get_attributes</a:t>
-            </a:r>
-            <a:r>
-              <a:rPr lang="en-US" sz="900" dirty="0">
-                <a:solidFill>
-                  <a:srgbClr val="CCCCCC"/>
-                </a:solidFill>
-                <a:latin typeface="Courier New" pitchFamily="34" charset="0"/>
-                <a:ea typeface="Courier New" pitchFamily="34" charset="-122"/>
-                <a:cs typeface="Courier New" pitchFamily="34" charset="-120"/>
-              </a:rPr>
-              <a:t> </a:t>
-            </a:r>
-            <a:r>
-              <a:rPr lang="en-US" sz="900" dirty="0">
-                <a:solidFill>
                   <a:srgbClr val="569CD6"/>
                 </a:solidFill>
                 <a:latin typeface="Courier New" pitchFamily="34" charset="0"/>
                 <a:ea typeface="Courier New" pitchFamily="34" charset="-122"/>
                 <a:cs typeface="Courier New" pitchFamily="34" charset="-120"/>
               </a:rPr>
-              <a:t>FOR</a:t>
-            </a:r>
-            <a:r>
-              <a:rPr lang="en-US" sz="900" dirty="0">
-                <a:solidFill>
-                  <a:srgbClr val="CCCCCC"/>
-                </a:solidFill>
-                <a:latin typeface="Courier New" pitchFamily="34" charset="0"/>
-                <a:ea typeface="Courier New" pitchFamily="34" charset="-122"/>
-                <a:cs typeface="Courier New" pitchFamily="34" charset="-120"/>
-              </a:rPr>
-              <a:t> </a:t>
-            </a:r>
-            <a:r>
-              <a:rPr lang="en-US" sz="900" dirty="0">
-                <a:solidFill>
-                  <a:srgbClr val="4EC9B0"/>
-                </a:solidFill>
-                <a:latin typeface="Courier New" pitchFamily="34" charset="0"/>
-                <a:ea typeface="Courier New" pitchFamily="34" charset="-122"/>
-                <a:cs typeface="Courier New" pitchFamily="34" charset="-120"/>
-              </a:rPr>
-              <a:t>lif_partner~get_partner_attributes</a:t>
+              <a:t>SECTION</a:t>
             </a:r>
             <a:r>
               <a:rPr lang="en-US" sz="900" dirty="0">
@@ -19469,13 +19529,46 @@
             <a:r>
               <a:rPr lang="en-US" sz="900" dirty="0">
                 <a:solidFill>
+                  <a:srgbClr val="CCCCCC"/>
+                </a:solidFill>
+                <a:latin typeface="Courier New" pitchFamily="34" charset="0"/>
+                <a:ea typeface="Courier New" pitchFamily="34" charset="-122"/>
+                <a:cs typeface="Courier New" pitchFamily="34" charset="-120"/>
+              </a:rPr>
+              <a:t>    </a:t>
+            </a:r>
+            <a:r>
+              <a:rPr lang="en-US" sz="900" dirty="0">
+                <a:solidFill>
                   <a:srgbClr val="569CD6"/>
                 </a:solidFill>
                 <a:latin typeface="Courier New" pitchFamily="34" charset="0"/>
                 <a:ea typeface="Courier New" pitchFamily="34" charset="-122"/>
                 <a:cs typeface="Courier New" pitchFamily="34" charset="-120"/>
               </a:rPr>
-              <a:t>ENDCLASS</a:t>
+              <a:t>INTERFACES</a:t>
+            </a:r>
+            <a:r>
+              <a:rPr lang="en-US" sz="900" dirty="0">
+                <a:solidFill>
+                  <a:srgbClr val="CCCCCC"/>
+                </a:solidFill>
+                <a:latin typeface="Courier New" pitchFamily="34" charset="0"/>
+                <a:ea typeface="Courier New" pitchFamily="34" charset="-122"/>
+                <a:cs typeface="Courier New" pitchFamily="34" charset="-120"/>
+              </a:rPr>
+              <a:t> </a:t>
+            </a:r>
+            <a:r>
+              <a:rPr lang="en-US" sz="900" dirty="0">
+                <a:solidFill>
+                  <a:srgbClr val="4EC9B0"/>
+                </a:solidFill>
+                <a:latin typeface="Courier New" pitchFamily="34" charset="0"/>
+                <a:ea typeface="Courier New" pitchFamily="34" charset="-122"/>
+                <a:cs typeface="Courier New" pitchFamily="34" charset="-120"/>
+              </a:rPr>
+              <a:t>zif_pc_viacep</a:t>
             </a:r>
             <a:r>
               <a:rPr lang="en-US" sz="900" dirty="0">
@@ -19500,13 +19593,101 @@
             <a:r>
               <a:rPr lang="en-US" sz="900" dirty="0">
                 <a:solidFill>
-                  <a:srgbClr val="000000"/>
+                  <a:srgbClr val="CCCCCC"/>
+                </a:solidFill>
+                <a:latin typeface="Courier New" pitchFamily="34" charset="0"/>
+                <a:ea typeface="Courier New" pitchFamily="34" charset="-122"/>
+                <a:cs typeface="Courier New" pitchFamily="34" charset="-120"/>
+              </a:rPr>
+              <a:t>    </a:t>
+            </a:r>
+            <a:r>
+              <a:rPr lang="en-US" sz="900" dirty="0">
+                <a:solidFill>
+                  <a:srgbClr val="569CD6"/>
+                </a:solidFill>
+                <a:latin typeface="Courier New" pitchFamily="34" charset="0"/>
+                <a:ea typeface="Courier New" pitchFamily="34" charset="-122"/>
+                <a:cs typeface="Courier New" pitchFamily="34" charset="-120"/>
+              </a:rPr>
+              <a:t>ALIASES</a:t>
+            </a:r>
+            <a:r>
+              <a:rPr lang="en-US" sz="900" dirty="0">
+                <a:solidFill>
+                  <a:srgbClr val="CCCCCC"/>
                 </a:solidFill>
                 <a:latin typeface="Courier New" pitchFamily="34" charset="0"/>
                 <a:ea typeface="Courier New" pitchFamily="34" charset="-122"/>
                 <a:cs typeface="Courier New" pitchFamily="34" charset="-120"/>
               </a:rPr>
               <a:t> </a:t>
+            </a:r>
+            <a:r>
+              <a:rPr lang="en-US" sz="900" dirty="0">
+                <a:solidFill>
+                  <a:srgbClr val="CCCCCC"/>
+                </a:solidFill>
+                <a:latin typeface="Courier New" pitchFamily="34" charset="0"/>
+                <a:ea typeface="Courier New" pitchFamily="34" charset="-122"/>
+                <a:cs typeface="Courier New" pitchFamily="34" charset="-120"/>
+              </a:rPr>
+              <a:t>consultar</a:t>
+            </a:r>
+            <a:r>
+              <a:rPr lang="en-US" sz="900" dirty="0">
+                <a:solidFill>
+                  <a:srgbClr val="CCCCCC"/>
+                </a:solidFill>
+                <a:latin typeface="Courier New" pitchFamily="34" charset="0"/>
+                <a:ea typeface="Courier New" pitchFamily="34" charset="-122"/>
+                <a:cs typeface="Courier New" pitchFamily="34" charset="-120"/>
+              </a:rPr>
+              <a:t> </a:t>
+            </a:r>
+            <a:r>
+              <a:rPr lang="en-US" sz="900" dirty="0">
+                <a:solidFill>
+                  <a:srgbClr val="569CD6"/>
+                </a:solidFill>
+                <a:latin typeface="Courier New" pitchFamily="34" charset="0"/>
+                <a:ea typeface="Courier New" pitchFamily="34" charset="-122"/>
+                <a:cs typeface="Courier New" pitchFamily="34" charset="-120"/>
+              </a:rPr>
+              <a:t>FOR</a:t>
+            </a:r>
+            <a:r>
+              <a:rPr lang="en-US" sz="900" dirty="0">
+                <a:solidFill>
+                  <a:srgbClr val="CCCCCC"/>
+                </a:solidFill>
+                <a:latin typeface="Courier New" pitchFamily="34" charset="0"/>
+                <a:ea typeface="Courier New" pitchFamily="34" charset="-122"/>
+                <a:cs typeface="Courier New" pitchFamily="34" charset="-120"/>
+              </a:rPr>
+              <a:t> </a:t>
+            </a:r>
+            <a:r>
+              <a:rPr lang="en-US" sz="900" dirty="0">
+                <a:solidFill>
+                  <a:srgbClr val="4EC9B0"/>
+                </a:solidFill>
+                <a:latin typeface="Courier New" pitchFamily="34" charset="0"/>
+                <a:ea typeface="Courier New" pitchFamily="34" charset="-122"/>
+                <a:cs typeface="Courier New" pitchFamily="34" charset="-120"/>
+              </a:rPr>
+              <a:t>zif_pc_viacep~consultar</a:t>
+            </a:r>
+            <a:r>
+              <a:rPr lang="en-US" sz="900" dirty="0">
+                <a:solidFill>
+                  <a:srgbClr val="CCCCCC"/>
+                </a:solidFill>
+                <a:latin typeface="Courier New" pitchFamily="34" charset="0"/>
+                <a:ea typeface="Courier New" pitchFamily="34" charset="-122"/>
+                <a:cs typeface="Courier New" pitchFamily="34" charset="-120"/>
+              </a:rPr>
+              <a:t>.</a:t>
             </a:r>
             <a:endParaRPr lang="en-US" sz="900" dirty="0"/>
           </a:p>
@@ -19526,51 +19707,7 @@
                 <a:ea typeface="Courier New" pitchFamily="34" charset="-122"/>
                 <a:cs typeface="Courier New" pitchFamily="34" charset="-120"/>
               </a:rPr>
-              <a:t>CLASS</a:t>
-            </a:r>
-            <a:r>
-              <a:rPr lang="en-US" sz="900" dirty="0">
-                <a:solidFill>
-                  <a:srgbClr val="CCCCCC"/>
-                </a:solidFill>
-                <a:latin typeface="Courier New" pitchFamily="34" charset="0"/>
-                <a:ea typeface="Courier New" pitchFamily="34" charset="-122"/>
-                <a:cs typeface="Courier New" pitchFamily="34" charset="-120"/>
-              </a:rPr>
-              <a:t> </a:t>
-            </a:r>
-            <a:r>
-              <a:rPr lang="en-US" sz="900" dirty="0">
-                <a:solidFill>
-                  <a:srgbClr val="4EC9B0"/>
-                </a:solidFill>
-                <a:latin typeface="Courier New" pitchFamily="34" charset="0"/>
-                <a:ea typeface="Courier New" pitchFamily="34" charset="-122"/>
-                <a:cs typeface="Courier New" pitchFamily="34" charset="-120"/>
-              </a:rPr>
-              <a:t>lcl_carrier</a:t>
-            </a:r>
-            <a:r>
-              <a:rPr lang="en-US" sz="900" dirty="0">
-                <a:solidFill>
-                  <a:srgbClr val="CCCCCC"/>
-                </a:solidFill>
-                <a:latin typeface="Courier New" pitchFamily="34" charset="0"/>
-                <a:ea typeface="Courier New" pitchFamily="34" charset="-122"/>
-                <a:cs typeface="Courier New" pitchFamily="34" charset="-120"/>
-              </a:rPr>
-              <a:t> </a:t>
-            </a:r>
-            <a:r>
-              <a:rPr lang="en-US" sz="900" dirty="0">
-                <a:solidFill>
-                  <a:srgbClr val="569CD6"/>
-                </a:solidFill>
-                <a:latin typeface="Courier New" pitchFamily="34" charset="0"/>
-                <a:ea typeface="Courier New" pitchFamily="34" charset="-122"/>
-                <a:cs typeface="Courier New" pitchFamily="34" charset="-120"/>
-              </a:rPr>
-              <a:t>IMPLEMENTATION</a:t>
+              <a:t>ENDCLASS</a:t>
             </a:r>
             <a:r>
               <a:rPr lang="en-US" sz="900" dirty="0">
@@ -19595,57 +19732,13 @@
             <a:r>
               <a:rPr lang="en-US" sz="900" dirty="0">
                 <a:solidFill>
-                  <a:srgbClr val="CCCCCC"/>
-                </a:solidFill>
-                <a:latin typeface="Courier New" pitchFamily="34" charset="0"/>
-                <a:ea typeface="Courier New" pitchFamily="34" charset="-122"/>
-                <a:cs typeface="Courier New" pitchFamily="34" charset="-120"/>
-              </a:rPr>
-              <a:t>  </a:t>
-            </a:r>
-            <a:r>
-              <a:rPr lang="en-US" sz="900" dirty="0">
-                <a:solidFill>
-                  <a:srgbClr val="569CD6"/>
-                </a:solidFill>
-                <a:latin typeface="Courier New" pitchFamily="34" charset="0"/>
-                <a:ea typeface="Courier New" pitchFamily="34" charset="-122"/>
-                <a:cs typeface="Courier New" pitchFamily="34" charset="-120"/>
-              </a:rPr>
-              <a:t>METHOD</a:t>
-            </a:r>
-            <a:r>
-              <a:rPr lang="en-US" sz="900" dirty="0">
-                <a:solidFill>
-                  <a:srgbClr val="CCCCCC"/>
+                  <a:srgbClr val="000000"/>
                 </a:solidFill>
                 <a:latin typeface="Courier New" pitchFamily="34" charset="0"/>
                 <a:ea typeface="Courier New" pitchFamily="34" charset="-122"/>
                 <a:cs typeface="Courier New" pitchFamily="34" charset="-120"/>
               </a:rPr>
               <a:t> </a:t>
-            </a:r>
-            <a:r>
-              <a:rPr lang="en-US" sz="900" dirty="0">
-                <a:solidFill>
-                  <a:srgbClr val="4EC9B0"/>
-                </a:solidFill>
-                <a:latin typeface="Courier New" pitchFamily="34" charset="0"/>
-                <a:ea typeface="Courier New" pitchFamily="34" charset="-122"/>
-                <a:cs typeface="Courier New" pitchFamily="34" charset="-120"/>
-              </a:rPr>
-              <a:t>lif_partner~get_partner_attributes</a:t>
-            </a:r>
-            <a:r>
-              <a:rPr lang="en-US" sz="900" dirty="0">
-                <a:solidFill>
-                  <a:srgbClr val="CCCCCC"/>
-                </a:solidFill>
-                <a:latin typeface="Courier New" pitchFamily="34" charset="0"/>
-                <a:ea typeface="Courier New" pitchFamily="34" charset="-122"/>
-                <a:cs typeface="Courier New" pitchFamily="34" charset="-120"/>
-              </a:rPr>
-              <a:t>.</a:t>
             </a:r>
             <a:endParaRPr lang="en-US" sz="900" dirty="0"/>
           </a:p>
@@ -19657,103 +19750,15 @@
               <a:buNone/>
             </a:pPr>
             <a:r>
-              <a:rPr lang="en-US" sz="900" dirty="0">
-                <a:solidFill>
-                  <a:srgbClr val="CCCCCC"/>
-                </a:solidFill>
-                <a:latin typeface="Courier New" pitchFamily="34" charset="0"/>
-                <a:ea typeface="Courier New" pitchFamily="34" charset="-122"/>
-                <a:cs typeface="Courier New" pitchFamily="34" charset="-120"/>
-              </a:rPr>
-              <a:t>    </a:t>
-            </a:r>
-            <a:r>
-              <a:rPr lang="en-US" sz="900" dirty="0">
-                <a:solidFill>
-                  <a:srgbClr val="569CD6"/>
-                </a:solidFill>
-                <a:latin typeface="Courier New" pitchFamily="34" charset="0"/>
-                <a:ea typeface="Courier New" pitchFamily="34" charset="-122"/>
-                <a:cs typeface="Courier New" pitchFamily="34" charset="-120"/>
-              </a:rPr>
-              <a:t>APPEND</a:t>
-            </a:r>
-            <a:r>
-              <a:rPr lang="en-US" sz="900" dirty="0">
-                <a:solidFill>
-                  <a:srgbClr val="CCCCCC"/>
-                </a:solidFill>
-                <a:latin typeface="Courier New" pitchFamily="34" charset="0"/>
-                <a:ea typeface="Courier New" pitchFamily="34" charset="-122"/>
-                <a:cs typeface="Courier New" pitchFamily="34" charset="-120"/>
-              </a:rPr>
-              <a:t> </a:t>
-            </a:r>
-            <a:r>
-              <a:rPr lang="en-US" sz="900" dirty="0">
-                <a:solidFill>
-                  <a:srgbClr val="CE9178"/>
-                </a:solidFill>
-                <a:latin typeface="Courier New" pitchFamily="34" charset="0"/>
-                <a:ea typeface="Courier New" pitchFamily="34" charset="-122"/>
-                <a:cs typeface="Courier New" pitchFamily="34" charset="-120"/>
-              </a:rPr>
-              <a:t>|Companhia { name }|</a:t>
-            </a:r>
-            <a:r>
-              <a:rPr lang="en-US" sz="900" dirty="0">
-                <a:solidFill>
-                  <a:srgbClr val="CCCCCC"/>
-                </a:solidFill>
-                <a:latin typeface="Courier New" pitchFamily="34" charset="0"/>
-                <a:ea typeface="Courier New" pitchFamily="34" charset="-122"/>
-                <a:cs typeface="Courier New" pitchFamily="34" charset="-120"/>
-              </a:rPr>
-              <a:t> </a:t>
-            </a:r>
-            <a:r>
-              <a:rPr lang="en-US" sz="900" dirty="0">
-                <a:solidFill>
-                  <a:srgbClr val="569CD6"/>
-                </a:solidFill>
-                <a:latin typeface="Courier New" pitchFamily="34" charset="0"/>
-                <a:ea typeface="Courier New" pitchFamily="34" charset="-122"/>
-                <a:cs typeface="Courier New" pitchFamily="34" charset="-120"/>
-              </a:rPr>
-              <a:t>TO</a:t>
-            </a:r>
-            <a:r>
-              <a:rPr lang="en-US" sz="900" dirty="0">
-                <a:solidFill>
-                  <a:srgbClr val="CCCCCC"/>
-                </a:solidFill>
-                <a:latin typeface="Courier New" pitchFamily="34" charset="0"/>
-                <a:ea typeface="Courier New" pitchFamily="34" charset="-122"/>
-                <a:cs typeface="Courier New" pitchFamily="34" charset="-120"/>
-              </a:rPr>
-              <a:t> </a:t>
-            </a:r>
-            <a:r>
-              <a:rPr lang="en-US" sz="900" dirty="0">
-                <a:solidFill>
-                  <a:srgbClr val="CCCCCC"/>
-                </a:solidFill>
-                <a:latin typeface="Courier New" pitchFamily="34" charset="0"/>
-                <a:ea typeface="Courier New" pitchFamily="34" charset="-122"/>
-                <a:cs typeface="Courier New" pitchFamily="34" charset="-120"/>
-              </a:rPr>
-              <a:t>r_attributes</a:t>
-            </a:r>
-            <a:r>
-              <a:rPr lang="en-US" sz="900" dirty="0">
-                <a:solidFill>
-                  <a:srgbClr val="CCCCCC"/>
-                </a:solidFill>
-                <a:latin typeface="Courier New" pitchFamily="34" charset="0"/>
-                <a:ea typeface="Courier New" pitchFamily="34" charset="-122"/>
-                <a:cs typeface="Courier New" pitchFamily="34" charset="-120"/>
-              </a:rPr>
-              <a:t>.</a:t>
+              <a:rPr lang="en-US" sz="900" i="1" dirty="0">
+                <a:solidFill>
+                  <a:srgbClr val="6A9955"/>
+                </a:solidFill>
+                <a:latin typeface="Courier New" pitchFamily="34" charset="0"/>
+                <a:ea typeface="Courier New" pitchFamily="34" charset="-122"/>
+                <a:cs typeface="Courier New" pitchFamily="34" charset="-120"/>
+              </a:rPr>
+              <a:t>" BTP: HTTP pela URL; On-Premise: destination da SM59.</a:t>
             </a:r>
             <a:endParaRPr lang="en-US" sz="900" dirty="0"/>
           </a:p>
@@ -19765,37 +19770,15 @@
               <a:buNone/>
             </a:pPr>
             <a:r>
-              <a:rPr lang="en-US" sz="900" dirty="0">
-                <a:solidFill>
-                  <a:srgbClr val="CCCCCC"/>
-                </a:solidFill>
-                <a:latin typeface="Courier New" pitchFamily="34" charset="0"/>
-                <a:ea typeface="Courier New" pitchFamily="34" charset="-122"/>
-                <a:cs typeface="Courier New" pitchFamily="34" charset="-120"/>
-              </a:rPr>
-              <a:t>  </a:t>
-            </a:r>
-            <a:r>
-              <a:rPr lang="en-US" sz="900" dirty="0">
-                <a:solidFill>
-                  <a:srgbClr val="569CD6"/>
-                </a:solidFill>
-                <a:latin typeface="Courier New" pitchFamily="34" charset="0"/>
-                <a:ea typeface="Courier New" pitchFamily="34" charset="-122"/>
-                <a:cs typeface="Courier New" pitchFamily="34" charset="-120"/>
-              </a:rPr>
-              <a:t>ENDMETHOD</a:t>
-            </a:r>
-            <a:r>
-              <a:rPr lang="en-US" sz="900" dirty="0">
-                <a:solidFill>
-                  <a:srgbClr val="CCCCCC"/>
-                </a:solidFill>
-                <a:latin typeface="Courier New" pitchFamily="34" charset="0"/>
-                <a:ea typeface="Courier New" pitchFamily="34" charset="-122"/>
-                <a:cs typeface="Courier New" pitchFamily="34" charset="-120"/>
-              </a:rPr>
-              <a:t>.</a:t>
+              <a:rPr lang="en-US" sz="900" i="1" dirty="0">
+                <a:solidFill>
+                  <a:srgbClr val="6A9955"/>
+                </a:solidFill>
+                <a:latin typeface="Courier New" pitchFamily="34" charset="0"/>
+                <a:ea typeface="Courier New" pitchFamily="34" charset="-122"/>
+                <a:cs typeface="Courier New" pitchFamily="34" charset="-120"/>
+              </a:rPr>
+              <a:t>" Quem chama não muda:</a:t>
             </a:r>
             <a:endParaRPr lang="en-US" sz="900" dirty="0"/>
           </a:p>
@@ -19815,7 +19798,7 @@
                 <a:ea typeface="Courier New" pitchFamily="34" charset="-122"/>
                 <a:cs typeface="Courier New" pitchFamily="34" charset="-120"/>
               </a:rPr>
-              <a:t>ENDCLASS</a:t>
+              <a:t>DATA</a:t>
             </a:r>
             <a:r>
               <a:rPr lang="en-US" sz="900" dirty="0">
@@ -19826,21 +19809,34 @@
                 <a:ea typeface="Courier New" pitchFamily="34" charset="-122"/>
                 <a:cs typeface="Courier New" pitchFamily="34" charset="-120"/>
               </a:rPr>
-              <a:t>.</a:t>
-            </a:r>
-            <a:endParaRPr lang="en-US" sz="900" dirty="0"/>
-          </a:p>
-          <a:p>
-            <a:pPr indent="0" marL="0">
-              <a:lnSpc>
-                <a:spcPct val="105000"/>
-              </a:lnSpc>
-              <a:buNone/>
-            </a:pPr>
+              <a:t>(</a:t>
+            </a:r>
             <a:r>
               <a:rPr lang="en-US" sz="900" dirty="0">
                 <a:solidFill>
-                  <a:srgbClr val="000000"/>
+                  <a:srgbClr val="CCCCCC"/>
+                </a:solidFill>
+                <a:latin typeface="Courier New" pitchFamily="34" charset="0"/>
+                <a:ea typeface="Courier New" pitchFamily="34" charset="-122"/>
+                <a:cs typeface="Courier New" pitchFamily="34" charset="-120"/>
+              </a:rPr>
+              <a:t>ls_cep</a:t>
+            </a:r>
+            <a:r>
+              <a:rPr lang="en-US" sz="900" dirty="0">
+                <a:solidFill>
+                  <a:srgbClr val="CCCCCC"/>
+                </a:solidFill>
+                <a:latin typeface="Courier New" pitchFamily="34" charset="0"/>
+                <a:ea typeface="Courier New" pitchFamily="34" charset="-122"/>
+                <a:cs typeface="Courier New" pitchFamily="34" charset="-120"/>
+              </a:rPr>
+              <a:t>)</a:t>
+            </a:r>
+            <a:r>
+              <a:rPr lang="en-US" sz="900" dirty="0">
+                <a:solidFill>
+                  <a:srgbClr val="CCCCCC"/>
                 </a:solidFill>
                 <a:latin typeface="Courier New" pitchFamily="34" charset="0"/>
                 <a:ea typeface="Courier New" pitchFamily="34" charset="-122"/>
@@ -19848,45 +19844,16 @@
               </a:rPr>
               <a:t> </a:t>
             </a:r>
-            <a:endParaRPr lang="en-US" sz="900" dirty="0"/>
-          </a:p>
-          <a:p>
-            <a:pPr indent="0" marL="0">
-              <a:lnSpc>
-                <a:spcPct val="105000"/>
-              </a:lnSpc>
-              <a:buNone/>
-            </a:pPr>
-            <a:r>
-              <a:rPr lang="en-US" sz="900" i="1" dirty="0">
-                <a:solidFill>
-                  <a:srgbClr val="6A9955"/>
-                </a:solidFill>
-                <a:latin typeface="Courier New" pitchFamily="34" charset="0"/>
-                <a:ea typeface="Courier New" pitchFamily="34" charset="-122"/>
-                <a:cs typeface="Courier New" pitchFamily="34" charset="-120"/>
-              </a:rPr>
-              <a:t>" Uso: uma lista de parceiros de tipos diferentes</a:t>
-            </a:r>
-            <a:endParaRPr lang="en-US" sz="900" dirty="0"/>
-          </a:p>
-          <a:p>
-            <a:pPr indent="0" marL="0">
-              <a:lnSpc>
-                <a:spcPct val="105000"/>
-              </a:lnSpc>
-              <a:buNone/>
-            </a:pPr>
             <a:r>
               <a:rPr lang="en-US" sz="900" dirty="0">
                 <a:solidFill>
-                  <a:srgbClr val="569CD6"/>
-                </a:solidFill>
-                <a:latin typeface="Courier New" pitchFamily="34" charset="0"/>
-                <a:ea typeface="Courier New" pitchFamily="34" charset="-122"/>
-                <a:cs typeface="Courier New" pitchFamily="34" charset="-120"/>
-              </a:rPr>
-              <a:t>DATA</a:t>
+                  <a:srgbClr val="CCCCCC"/>
+                </a:solidFill>
+                <a:latin typeface="Courier New" pitchFamily="34" charset="0"/>
+                <a:ea typeface="Courier New" pitchFamily="34" charset="-122"/>
+                <a:cs typeface="Courier New" pitchFamily="34" charset="-120"/>
+              </a:rPr>
+              <a:t>=</a:t>
             </a:r>
             <a:r>
               <a:rPr lang="en-US" sz="900" dirty="0">
@@ -19902,13 +19869,13 @@
             <a:r>
               <a:rPr lang="en-US" sz="900" dirty="0">
                 <a:solidFill>
-                  <a:srgbClr val="CCCCCC"/>
-                </a:solidFill>
-                <a:latin typeface="Courier New" pitchFamily="34" charset="0"/>
-                <a:ea typeface="Courier New" pitchFamily="34" charset="-122"/>
-                <a:cs typeface="Courier New" pitchFamily="34" charset="-120"/>
-              </a:rPr>
-              <a:t>partners</a:t>
+                  <a:srgbClr val="4EC9B0"/>
+                </a:solidFill>
+                <a:latin typeface="Courier New" pitchFamily="34" charset="0"/>
+                <a:ea typeface="Courier New" pitchFamily="34" charset="-122"/>
+                <a:cs typeface="Courier New" pitchFamily="34" charset="-120"/>
+              </a:rPr>
+              <a:t>zcl_pc_viacep=&gt;</a:t>
             </a:r>
             <a:r>
               <a:rPr lang="en-US" sz="900" dirty="0">
@@ -19919,18 +19886,40 @@
                 <a:ea typeface="Courier New" pitchFamily="34" charset="-122"/>
                 <a:cs typeface="Courier New" pitchFamily="34" charset="-120"/>
               </a:rPr>
+              <a:t>consultar</a:t>
+            </a:r>
+            <a:r>
+              <a:rPr lang="en-US" sz="900" dirty="0">
+                <a:solidFill>
+                  <a:srgbClr val="CCCCCC"/>
+                </a:solidFill>
+                <a:latin typeface="Courier New" pitchFamily="34" charset="0"/>
+                <a:ea typeface="Courier New" pitchFamily="34" charset="-122"/>
+                <a:cs typeface="Courier New" pitchFamily="34" charset="-120"/>
+              </a:rPr>
+              <a:t>(</a:t>
+            </a:r>
+            <a:r>
+              <a:rPr lang="en-US" sz="900" dirty="0">
+                <a:solidFill>
+                  <a:srgbClr val="CCCCCC"/>
+                </a:solidFill>
+                <a:latin typeface="Courier New" pitchFamily="34" charset="0"/>
+                <a:ea typeface="Courier New" pitchFamily="34" charset="-122"/>
+                <a:cs typeface="Courier New" pitchFamily="34" charset="-120"/>
+              </a:rPr>
               <a:t> </a:t>
             </a:r>
             <a:r>
               <a:rPr lang="en-US" sz="900" dirty="0">
                 <a:solidFill>
-                  <a:srgbClr val="569CD6"/>
-                </a:solidFill>
-                <a:latin typeface="Courier New" pitchFamily="34" charset="0"/>
-                <a:ea typeface="Courier New" pitchFamily="34" charset="-122"/>
-                <a:cs typeface="Courier New" pitchFamily="34" charset="-120"/>
-              </a:rPr>
-              <a:t>TYPE</a:t>
+                  <a:srgbClr val="CE9178"/>
+                </a:solidFill>
+                <a:latin typeface="Courier New" pitchFamily="34" charset="0"/>
+                <a:ea typeface="Courier New" pitchFamily="34" charset="-122"/>
+                <a:cs typeface="Courier New" pitchFamily="34" charset="-120"/>
+              </a:rPr>
+              <a:t>'01310100'</a:t>
             </a:r>
             <a:r>
               <a:rPr lang="en-US" sz="900" dirty="0">
@@ -19946,202 +19935,6 @@
             <a:r>
               <a:rPr lang="en-US" sz="900" dirty="0">
                 <a:solidFill>
-                  <a:srgbClr val="569CD6"/>
-                </a:solidFill>
-                <a:latin typeface="Courier New" pitchFamily="34" charset="0"/>
-                <a:ea typeface="Courier New" pitchFamily="34" charset="-122"/>
-                <a:cs typeface="Courier New" pitchFamily="34" charset="-120"/>
-              </a:rPr>
-              <a:t>TABLE</a:t>
-            </a:r>
-            <a:r>
-              <a:rPr lang="en-US" sz="900" dirty="0">
-                <a:solidFill>
-                  <a:srgbClr val="CCCCCC"/>
-                </a:solidFill>
-                <a:latin typeface="Courier New" pitchFamily="34" charset="0"/>
-                <a:ea typeface="Courier New" pitchFamily="34" charset="-122"/>
-                <a:cs typeface="Courier New" pitchFamily="34" charset="-120"/>
-              </a:rPr>
-              <a:t> </a:t>
-            </a:r>
-            <a:r>
-              <a:rPr lang="en-US" sz="900" dirty="0">
-                <a:solidFill>
-                  <a:srgbClr val="569CD6"/>
-                </a:solidFill>
-                <a:latin typeface="Courier New" pitchFamily="34" charset="0"/>
-                <a:ea typeface="Courier New" pitchFamily="34" charset="-122"/>
-                <a:cs typeface="Courier New" pitchFamily="34" charset="-120"/>
-              </a:rPr>
-              <a:t>OF</a:t>
-            </a:r>
-            <a:r>
-              <a:rPr lang="en-US" sz="900" dirty="0">
-                <a:solidFill>
-                  <a:srgbClr val="CCCCCC"/>
-                </a:solidFill>
-                <a:latin typeface="Courier New" pitchFamily="34" charset="0"/>
-                <a:ea typeface="Courier New" pitchFamily="34" charset="-122"/>
-                <a:cs typeface="Courier New" pitchFamily="34" charset="-120"/>
-              </a:rPr>
-              <a:t> </a:t>
-            </a:r>
-            <a:r>
-              <a:rPr lang="en-US" sz="900" dirty="0">
-                <a:solidFill>
-                  <a:srgbClr val="569CD6"/>
-                </a:solidFill>
-                <a:latin typeface="Courier New" pitchFamily="34" charset="0"/>
-                <a:ea typeface="Courier New" pitchFamily="34" charset="-122"/>
-                <a:cs typeface="Courier New" pitchFamily="34" charset="-120"/>
-              </a:rPr>
-              <a:t>REF</a:t>
-            </a:r>
-            <a:r>
-              <a:rPr lang="en-US" sz="900" dirty="0">
-                <a:solidFill>
-                  <a:srgbClr val="CCCCCC"/>
-                </a:solidFill>
-                <a:latin typeface="Courier New" pitchFamily="34" charset="0"/>
-                <a:ea typeface="Courier New" pitchFamily="34" charset="-122"/>
-                <a:cs typeface="Courier New" pitchFamily="34" charset="-120"/>
-              </a:rPr>
-              <a:t> </a:t>
-            </a:r>
-            <a:r>
-              <a:rPr lang="en-US" sz="900" dirty="0">
-                <a:solidFill>
-                  <a:srgbClr val="569CD6"/>
-                </a:solidFill>
-                <a:latin typeface="Courier New" pitchFamily="34" charset="0"/>
-                <a:ea typeface="Courier New" pitchFamily="34" charset="-122"/>
-                <a:cs typeface="Courier New" pitchFamily="34" charset="-120"/>
-              </a:rPr>
-              <a:t>TO</a:t>
-            </a:r>
-            <a:r>
-              <a:rPr lang="en-US" sz="900" dirty="0">
-                <a:solidFill>
-                  <a:srgbClr val="CCCCCC"/>
-                </a:solidFill>
-                <a:latin typeface="Courier New" pitchFamily="34" charset="0"/>
-                <a:ea typeface="Courier New" pitchFamily="34" charset="-122"/>
-                <a:cs typeface="Courier New" pitchFamily="34" charset="-120"/>
-              </a:rPr>
-              <a:t> </a:t>
-            </a:r>
-            <a:r>
-              <a:rPr lang="en-US" sz="900" dirty="0">
-                <a:solidFill>
-                  <a:srgbClr val="4EC9B0"/>
-                </a:solidFill>
-                <a:latin typeface="Courier New" pitchFamily="34" charset="0"/>
-                <a:ea typeface="Courier New" pitchFamily="34" charset="-122"/>
-                <a:cs typeface="Courier New" pitchFamily="34" charset="-120"/>
-              </a:rPr>
-              <a:t>lif_partner</a:t>
-            </a:r>
-            <a:r>
-              <a:rPr lang="en-US" sz="900" dirty="0">
-                <a:solidFill>
-                  <a:srgbClr val="CCCCCC"/>
-                </a:solidFill>
-                <a:latin typeface="Courier New" pitchFamily="34" charset="0"/>
-                <a:ea typeface="Courier New" pitchFamily="34" charset="-122"/>
-                <a:cs typeface="Courier New" pitchFamily="34" charset="-120"/>
-              </a:rPr>
-              <a:t>.</a:t>
-            </a:r>
-            <a:endParaRPr lang="en-US" sz="900" dirty="0"/>
-          </a:p>
-          <a:p>
-            <a:pPr indent="0" marL="0">
-              <a:lnSpc>
-                <a:spcPct val="105000"/>
-              </a:lnSpc>
-              <a:buNone/>
-            </a:pPr>
-            <a:r>
-              <a:rPr lang="en-US" sz="900" dirty="0">
-                <a:solidFill>
-                  <a:srgbClr val="569CD6"/>
-                </a:solidFill>
-                <a:latin typeface="Courier New" pitchFamily="34" charset="0"/>
-                <a:ea typeface="Courier New" pitchFamily="34" charset="-122"/>
-                <a:cs typeface="Courier New" pitchFamily="34" charset="-120"/>
-              </a:rPr>
-              <a:t>APPEND</a:t>
-            </a:r>
-            <a:r>
-              <a:rPr lang="en-US" sz="900" dirty="0">
-                <a:solidFill>
-                  <a:srgbClr val="CCCCCC"/>
-                </a:solidFill>
-                <a:latin typeface="Courier New" pitchFamily="34" charset="0"/>
-                <a:ea typeface="Courier New" pitchFamily="34" charset="-122"/>
-                <a:cs typeface="Courier New" pitchFamily="34" charset="-120"/>
-              </a:rPr>
-              <a:t> </a:t>
-            </a:r>
-            <a:r>
-              <a:rPr lang="en-US" sz="900" dirty="0">
-                <a:solidFill>
-                  <a:srgbClr val="569CD6"/>
-                </a:solidFill>
-                <a:latin typeface="Courier New" pitchFamily="34" charset="0"/>
-                <a:ea typeface="Courier New" pitchFamily="34" charset="-122"/>
-                <a:cs typeface="Courier New" pitchFamily="34" charset="-120"/>
-              </a:rPr>
-              <a:t>NEW</a:t>
-            </a:r>
-            <a:r>
-              <a:rPr lang="en-US" sz="900" dirty="0">
-                <a:solidFill>
-                  <a:srgbClr val="CCCCCC"/>
-                </a:solidFill>
-                <a:latin typeface="Courier New" pitchFamily="34" charset="0"/>
-                <a:ea typeface="Courier New" pitchFamily="34" charset="-122"/>
-                <a:cs typeface="Courier New" pitchFamily="34" charset="-120"/>
-              </a:rPr>
-              <a:t> </a:t>
-            </a:r>
-            <a:r>
-              <a:rPr lang="en-US" sz="900" dirty="0">
-                <a:solidFill>
-                  <a:srgbClr val="4EC9B0"/>
-                </a:solidFill>
-                <a:latin typeface="Courier New" pitchFamily="34" charset="0"/>
-                <a:ea typeface="Courier New" pitchFamily="34" charset="-122"/>
-                <a:cs typeface="Courier New" pitchFamily="34" charset="-120"/>
-              </a:rPr>
-              <a:t>lcl_carrier</a:t>
-            </a:r>
-            <a:r>
-              <a:rPr lang="en-US" sz="900" dirty="0">
-                <a:solidFill>
-                  <a:srgbClr val="CCCCCC"/>
-                </a:solidFill>
-                <a:latin typeface="Courier New" pitchFamily="34" charset="0"/>
-                <a:ea typeface="Courier New" pitchFamily="34" charset="-122"/>
-                <a:cs typeface="Courier New" pitchFamily="34" charset="-120"/>
-              </a:rPr>
-              <a:t>(</a:t>
-            </a:r>
-            <a:r>
-              <a:rPr lang="en-US" sz="900" dirty="0">
-                <a:solidFill>
-                  <a:srgbClr val="CCCCCC"/>
-                </a:solidFill>
-                <a:latin typeface="Courier New" pitchFamily="34" charset="0"/>
-                <a:ea typeface="Courier New" pitchFamily="34" charset="-122"/>
-                <a:cs typeface="Courier New" pitchFamily="34" charset="-120"/>
-              </a:rPr>
-              <a:t> </a:t>
-            </a:r>
-            <a:r>
-              <a:rPr lang="en-US" sz="900" dirty="0">
-                <a:solidFill>
                   <a:srgbClr val="CCCCCC"/>
                 </a:solidFill>
                 <a:latin typeface="Courier New" pitchFamily="34" charset="0"/>
@@ -20149,202 +19942,6 @@
                 <a:cs typeface="Courier New" pitchFamily="34" charset="-120"/>
               </a:rPr>
               <a:t>)</a:t>
-            </a:r>
-            <a:r>
-              <a:rPr lang="en-US" sz="900" dirty="0">
-                <a:solidFill>
-                  <a:srgbClr val="CCCCCC"/>
-                </a:solidFill>
-                <a:latin typeface="Courier New" pitchFamily="34" charset="0"/>
-                <a:ea typeface="Courier New" pitchFamily="34" charset="-122"/>
-                <a:cs typeface="Courier New" pitchFamily="34" charset="-120"/>
-              </a:rPr>
-              <a:t> </a:t>
-            </a:r>
-            <a:r>
-              <a:rPr lang="en-US" sz="900" dirty="0">
-                <a:solidFill>
-                  <a:srgbClr val="569CD6"/>
-                </a:solidFill>
-                <a:latin typeface="Courier New" pitchFamily="34" charset="0"/>
-                <a:ea typeface="Courier New" pitchFamily="34" charset="-122"/>
-                <a:cs typeface="Courier New" pitchFamily="34" charset="-120"/>
-              </a:rPr>
-              <a:t>TO</a:t>
-            </a:r>
-            <a:r>
-              <a:rPr lang="en-US" sz="900" dirty="0">
-                <a:solidFill>
-                  <a:srgbClr val="CCCCCC"/>
-                </a:solidFill>
-                <a:latin typeface="Courier New" pitchFamily="34" charset="0"/>
-                <a:ea typeface="Courier New" pitchFamily="34" charset="-122"/>
-                <a:cs typeface="Courier New" pitchFamily="34" charset="-120"/>
-              </a:rPr>
-              <a:t> </a:t>
-            </a:r>
-            <a:r>
-              <a:rPr lang="en-US" sz="900" dirty="0">
-                <a:solidFill>
-                  <a:srgbClr val="CCCCCC"/>
-                </a:solidFill>
-                <a:latin typeface="Courier New" pitchFamily="34" charset="0"/>
-                <a:ea typeface="Courier New" pitchFamily="34" charset="-122"/>
-                <a:cs typeface="Courier New" pitchFamily="34" charset="-120"/>
-              </a:rPr>
-              <a:t>partners</a:t>
-            </a:r>
-            <a:r>
-              <a:rPr lang="en-US" sz="900" dirty="0">
-                <a:solidFill>
-                  <a:srgbClr val="CCCCCC"/>
-                </a:solidFill>
-                <a:latin typeface="Courier New" pitchFamily="34" charset="0"/>
-                <a:ea typeface="Courier New" pitchFamily="34" charset="-122"/>
-                <a:cs typeface="Courier New" pitchFamily="34" charset="-120"/>
-              </a:rPr>
-              <a:t>.</a:t>
-            </a:r>
-            <a:endParaRPr lang="en-US" sz="900" dirty="0"/>
-          </a:p>
-          <a:p>
-            <a:pPr indent="0" marL="0">
-              <a:lnSpc>
-                <a:spcPct val="105000"/>
-              </a:lnSpc>
-              <a:buNone/>
-            </a:pPr>
-            <a:r>
-              <a:rPr lang="en-US" sz="900" dirty="0">
-                <a:solidFill>
-                  <a:srgbClr val="569CD6"/>
-                </a:solidFill>
-                <a:latin typeface="Courier New" pitchFamily="34" charset="0"/>
-                <a:ea typeface="Courier New" pitchFamily="34" charset="-122"/>
-                <a:cs typeface="Courier New" pitchFamily="34" charset="-120"/>
-              </a:rPr>
-              <a:t>APPEND</a:t>
-            </a:r>
-            <a:r>
-              <a:rPr lang="en-US" sz="900" dirty="0">
-                <a:solidFill>
-                  <a:srgbClr val="CCCCCC"/>
-                </a:solidFill>
-                <a:latin typeface="Courier New" pitchFamily="34" charset="0"/>
-                <a:ea typeface="Courier New" pitchFamily="34" charset="-122"/>
-                <a:cs typeface="Courier New" pitchFamily="34" charset="-120"/>
-              </a:rPr>
-              <a:t> </a:t>
-            </a:r>
-            <a:r>
-              <a:rPr lang="en-US" sz="900" dirty="0">
-                <a:solidFill>
-                  <a:srgbClr val="569CD6"/>
-                </a:solidFill>
-                <a:latin typeface="Courier New" pitchFamily="34" charset="0"/>
-                <a:ea typeface="Courier New" pitchFamily="34" charset="-122"/>
-                <a:cs typeface="Courier New" pitchFamily="34" charset="-120"/>
-              </a:rPr>
-              <a:t>NEW</a:t>
-            </a:r>
-            <a:r>
-              <a:rPr lang="en-US" sz="900" dirty="0">
-                <a:solidFill>
-                  <a:srgbClr val="CCCCCC"/>
-                </a:solidFill>
-                <a:latin typeface="Courier New" pitchFamily="34" charset="0"/>
-                <a:ea typeface="Courier New" pitchFamily="34" charset="-122"/>
-                <a:cs typeface="Courier New" pitchFamily="34" charset="-120"/>
-              </a:rPr>
-              <a:t> </a:t>
-            </a:r>
-            <a:r>
-              <a:rPr lang="en-US" sz="900" dirty="0">
-                <a:solidFill>
-                  <a:srgbClr val="4EC9B0"/>
-                </a:solidFill>
-                <a:latin typeface="Courier New" pitchFamily="34" charset="0"/>
-                <a:ea typeface="Courier New" pitchFamily="34" charset="-122"/>
-                <a:cs typeface="Courier New" pitchFamily="34" charset="-120"/>
-              </a:rPr>
-              <a:t>lcl_rental</a:t>
-            </a:r>
-            <a:r>
-              <a:rPr lang="en-US" sz="900" dirty="0">
-                <a:solidFill>
-                  <a:srgbClr val="CCCCCC"/>
-                </a:solidFill>
-                <a:latin typeface="Courier New" pitchFamily="34" charset="0"/>
-                <a:ea typeface="Courier New" pitchFamily="34" charset="-122"/>
-                <a:cs typeface="Courier New" pitchFamily="34" charset="-120"/>
-              </a:rPr>
-              <a:t>(</a:t>
-            </a:r>
-            <a:r>
-              <a:rPr lang="en-US" sz="900" dirty="0">
-                <a:solidFill>
-                  <a:srgbClr val="CCCCCC"/>
-                </a:solidFill>
-                <a:latin typeface="Courier New" pitchFamily="34" charset="0"/>
-                <a:ea typeface="Courier New" pitchFamily="34" charset="-122"/>
-                <a:cs typeface="Courier New" pitchFamily="34" charset="-120"/>
-              </a:rPr>
-              <a:t> </a:t>
-            </a:r>
-            <a:r>
-              <a:rPr lang="en-US" sz="900" dirty="0">
-                <a:solidFill>
-                  <a:srgbClr val="CCCCCC"/>
-                </a:solidFill>
-                <a:latin typeface="Courier New" pitchFamily="34" charset="0"/>
-                <a:ea typeface="Courier New" pitchFamily="34" charset="-122"/>
-                <a:cs typeface="Courier New" pitchFamily="34" charset="-120"/>
-              </a:rPr>
-              <a:t>)</a:t>
-            </a:r>
-            <a:r>
-              <a:rPr lang="en-US" sz="900" dirty="0">
-                <a:solidFill>
-                  <a:srgbClr val="CCCCCC"/>
-                </a:solidFill>
-                <a:latin typeface="Courier New" pitchFamily="34" charset="0"/>
-                <a:ea typeface="Courier New" pitchFamily="34" charset="-122"/>
-                <a:cs typeface="Courier New" pitchFamily="34" charset="-120"/>
-              </a:rPr>
-              <a:t>  </a:t>
-            </a:r>
-            <a:r>
-              <a:rPr lang="en-US" sz="900" dirty="0">
-                <a:solidFill>
-                  <a:srgbClr val="569CD6"/>
-                </a:solidFill>
-                <a:latin typeface="Courier New" pitchFamily="34" charset="0"/>
-                <a:ea typeface="Courier New" pitchFamily="34" charset="-122"/>
-                <a:cs typeface="Courier New" pitchFamily="34" charset="-120"/>
-              </a:rPr>
-              <a:t>TO</a:t>
-            </a:r>
-            <a:r>
-              <a:rPr lang="en-US" sz="900" dirty="0">
-                <a:solidFill>
-                  <a:srgbClr val="CCCCCC"/>
-                </a:solidFill>
-                <a:latin typeface="Courier New" pitchFamily="34" charset="0"/>
-                <a:ea typeface="Courier New" pitchFamily="34" charset="-122"/>
-                <a:cs typeface="Courier New" pitchFamily="34" charset="-120"/>
-              </a:rPr>
-              <a:t> </a:t>
-            </a:r>
-            <a:r>
-              <a:rPr lang="en-US" sz="900" dirty="0">
-                <a:solidFill>
-                  <a:srgbClr val="CCCCCC"/>
-                </a:solidFill>
-                <a:latin typeface="Courier New" pitchFamily="34" charset="0"/>
-                <a:ea typeface="Courier New" pitchFamily="34" charset="-122"/>
-                <a:cs typeface="Courier New" pitchFamily="34" charset="-120"/>
-              </a:rPr>
-              <a:t>partners</a:t>
             </a:r>
             <a:r>
               <a:rPr lang="en-US" sz="900" dirty="0">
@@ -20727,7 +20324,7 @@
                 <a:ea typeface="Courier New" pitchFamily="34" charset="-122"/>
                 <a:cs typeface="Courier New" pitchFamily="34" charset="-120"/>
               </a:rPr>
-              <a:t>lif_partner~…</a:t>
+              <a:t>zif_pc_viacep~…</a:t>
             </a:r>
             <a:endParaRPr lang="en-US" sz="1400" dirty="0"/>
           </a:p>
@@ -20760,7 +20357,26 @@
                   <a:srgbClr val="556B82"/>
                 </a:solidFill>
               </a:rPr>
-              <a:t> cria um atalho.</a:t>
+              <a:t> cria o atalho </a:t>
+            </a:r>
+            <a:r>
+              <a:rPr lang="en-US" sz="1050" dirty="0">
+                <a:solidFill>
+                  <a:srgbClr val="0064D9"/>
+                </a:solidFill>
+                <a:latin typeface="Courier New" pitchFamily="34" charset="0"/>
+                <a:ea typeface="Courier New" pitchFamily="34" charset="-122"/>
+                <a:cs typeface="Courier New" pitchFamily="34" charset="-120"/>
+              </a:rPr>
+              <a:t>consultar</a:t>
+            </a:r>
+            <a:r>
+              <a:rPr lang="en-US" sz="1050" dirty="0">
+                <a:solidFill>
+                  <a:srgbClr val="556B82"/>
+                </a:solidFill>
+              </a:rPr>
+              <a:t>.</a:t>
             </a:r>
             <a:endParaRPr lang="en-US" sz="1400" dirty="0"/>
           </a:p>
@@ -20855,7 +20471,7 @@
                   <a:srgbClr val="1D2D3E"/>
                 </a:solidFill>
               </a:rPr>
-              <a:t>Referência de interface</a:t>
+              <a:t>Duas implementações</a:t>
             </a:r>
             <a:endParaRPr lang="en-US" sz="1400" dirty="0"/>
           </a:p>
@@ -20869,7 +20485,26 @@
                   <a:srgbClr val="556B82"/>
                 </a:solidFill>
               </a:rPr>
-              <a:t>Guarda qualquer objeto que implemente o contrato.</a:t>
+              <a:t>A pasta </a:t>
+            </a:r>
+            <a:r>
+              <a:rPr lang="en-US" sz="1050" dirty="0">
+                <a:solidFill>
+                  <a:srgbClr val="0064D9"/>
+                </a:solidFill>
+                <a:latin typeface="Courier New" pitchFamily="34" charset="0"/>
+                <a:ea typeface="Courier New" pitchFamily="34" charset="-122"/>
+                <a:cs typeface="Courier New" pitchFamily="34" charset="-120"/>
+              </a:rPr>
+              <a:t>ZCL_PC_VIACEP_T2</a:t>
+            </a:r>
+            <a:r>
+              <a:rPr lang="en-US" sz="1050" dirty="0">
+                <a:solidFill>
+                  <a:srgbClr val="556B82"/>
+                </a:solidFill>
+              </a:rPr>
+              <a:t> traz a versão On-Premise com o mesmo contrato.</a:t>
             </a:r>
             <a:endParaRPr lang="en-US" sz="1400" dirty="0"/>
           </a:p>
